--- a/CRM_Final.pptx
+++ b/CRM_Final.pptx
@@ -4,29 +4,29 @@
   <p:sldMasterIdLst>
     <p:sldMasterId id="2147483648" r:id="rId1"/>
   </p:sldMasterIdLst>
+  <p:notesMasterIdLst>
+    <p:notesMasterId r:id="rId20"/>
+  </p:notesMasterIdLst>
   <p:sldIdLst>
     <p:sldId id="256" r:id="rId2"/>
     <p:sldId id="257" r:id="rId3"/>
     <p:sldId id="258" r:id="rId4"/>
-    <p:sldId id="260" r:id="rId6"/>
-    <p:sldId id="261" r:id="rId7"/>
-    <p:sldId id="275" r:id="rId26"/>
-    <p:sldId id="276" r:id="rId27"/>
-    <p:sldId id="267" r:id="rId13"/>
-    <p:sldId id="268" r:id="rId14"/>
-    <p:sldId id="277" r:id="rId28"/>
-    <p:sldId id="263" r:id="rId9"/>
-    <p:sldId id="265" r:id="rId11"/>
-    <p:sldId id="269" r:id="rId15"/>
-    <p:sldId id="274" r:id="rId25"/>
+    <p:sldId id="260" r:id="rId5"/>
+    <p:sldId id="261" r:id="rId6"/>
+    <p:sldId id="275" r:id="rId7"/>
+    <p:sldId id="276" r:id="rId8"/>
+    <p:sldId id="267" r:id="rId9"/>
+    <p:sldId id="268" r:id="rId10"/>
+    <p:sldId id="277" r:id="rId11"/>
+    <p:sldId id="263" r:id="rId12"/>
+    <p:sldId id="265" r:id="rId13"/>
+    <p:sldId id="269" r:id="rId14"/>
+    <p:sldId id="274" r:id="rId15"/>
     <p:sldId id="270" r:id="rId16"/>
     <p:sldId id="271" r:id="rId17"/>
     <p:sldId id="272" r:id="rId18"/>
     <p:sldId id="273" r:id="rId19"/>
   </p:sldIdLst>
-  <p:notesMasterIdLst>
-    <p:notesMasterId r:id="rId20"/>
-  </p:notesMasterIdLst>
   <p:sldSz cx="12192000" cy="6858000"/>
   <p:notesSz cx="6858000" cy="12192000"/>
   <p:defaultTextStyle>
@@ -124,34 +124,34 @@
   <p:extLst>
     <p:ext uri="{521415D9-36F7-43E2-AB2F-B90AF26B5E84}">
       <p14:sectionLst xmlns:p14="http://schemas.microsoft.com/office/powerpoint/2010/main">
-        <p14:section name="Introduction" id="{5a960240-e348-6fb5-4431-30c03be043be}">
+        <p14:section name="Introduction" id="{5A960240-E348-6FB5-4431-30C03BE043BE}">
           <p14:sldIdLst>
             <p14:sldId id="256"/>
             <p14:sldId id="257"/>
           </p14:sldIdLst>
         </p14:section>
-        <p14:section name="Scenario A: original data" id="{a27f2ef0-0e70-fff2-48f3-b7d3a864b71d}">
+        <p14:section name="Scenario A: original data" id="{A27F2EF0-0E70-FFF2-48F3-B7D3A864B71D}">
           <p14:sldIdLst>
             <p14:sldId id="258"/>
-            <p14:sldId id="259"/>
             <p14:sldId id="260"/>
             <p14:sldId id="261"/>
-            <p14:sldId id="262"/>
-            <p14:sldId id="263"/>
-            <p14:sldId id="264"/>
-            <p14:sldId id="265"/>
-            <p14:sldId id="266"/>
+            <p14:sldId id="275"/>
+            <p14:sldId id="276"/>
           </p14:sldIdLst>
         </p14:section>
-        <p14:section name="Scenario B: simulated data" id="{543797b1-51cb-0dff-4a40-e5f6e881e2b2}">
+        <p14:section name="Scenario B: simulated data" id="{543797B1-51CB-0DFF-4A40-E5F6E881E2B2}">
           <p14:sldIdLst>
             <p14:sldId id="267"/>
             <p14:sldId id="268"/>
+            <p14:sldId id="277"/>
+            <p14:sldId id="263"/>
+            <p14:sldId id="265"/>
             <p14:sldId id="269"/>
+            <p14:sldId id="274"/>
             <p14:sldId id="270"/>
           </p14:sldIdLst>
         </p14:section>
-        <p14:section name="Conclusion" id="{68cb6e84-4f43-2850-4527-6d43a96d3a5a}">
+        <p14:section name="Conclusion" id="{68CB6E84-4F43-2850-4527-6D43A96D3A5A}">
           <p14:sldIdLst>
             <p14:sldId id="271"/>
             <p14:sldId id="272"/>
@@ -168,9 +168,11 @@
 </file>
 
 <file path=ppt/charts/chart1.xml><?xml version="1.0" encoding="utf-8"?>
-<c:chartSpace xmlns:c="http://schemas.openxmlformats.org/drawingml/2006/chart" xmlns:a="http://schemas.openxmlformats.org/drawingml/2006/main" xmlns:r="http://schemas.openxmlformats.org/officeDocument/2006/relationships">
+<c:chartSpace xmlns:c="http://schemas.openxmlformats.org/drawingml/2006/chart" xmlns:a="http://schemas.openxmlformats.org/drawingml/2006/main" xmlns:r="http://schemas.openxmlformats.org/officeDocument/2006/relationships" xmlns:c16r2="http://schemas.microsoft.com/office/drawing/2015/06/chart">
   <c:date1904 val="0"/>
+  <c:lang val="en-US"/>
   <c:roundedCorners val="1"/>
+  <c:style val="2"/>
   <c:chart>
     <c:title>
       <c:tx>
@@ -187,7 +189,7 @@
               </a:defRPr>
             </a:pPr>
             <a:r>
-              <a:rPr sz="1400" b="0" i="0" u="none" strike="noStrike">
+              <a:rPr lang="en-US" sz="1400" b="0" i="0" u="none" strike="noStrike">
                 <a:solidFill>
                   <a:srgbClr val="0E3B43"/>
                 </a:solidFill>
@@ -198,7 +200,6 @@
           </a:p>
         </c:rich>
       </c:tx>
-      <c:layout/>
       <c:overlay val="0"/>
     </c:title>
     <c:autoTitleDeleted val="0"/>
@@ -242,6 +243,11 @@
               </a:solidFill>
               <a:effectLst/>
             </c:spPr>
+            <c:extLst>
+              <c:ext xmlns:c16="http://schemas.microsoft.com/office/drawing/2014/chart" uri="{C3380CC4-5D6E-409C-BE32-E72D297353CC}">
+                <c16:uniqueId val="{00000001-3713-B543-BCF2-E8B30A0A96CE}"/>
+              </c:ext>
+            </c:extLst>
           </c:dPt>
           <c:dPt>
             <c:idx val="1"/>
@@ -252,6 +258,11 @@
               </a:solidFill>
               <a:effectLst/>
             </c:spPr>
+            <c:extLst>
+              <c:ext xmlns:c16="http://schemas.microsoft.com/office/drawing/2014/chart" uri="{C3380CC4-5D6E-409C-BE32-E72D297353CC}">
+                <c16:uniqueId val="{00000003-3713-B543-BCF2-E8B30A0A96CE}"/>
+              </c:ext>
+            </c:extLst>
           </c:dPt>
           <c:dPt>
             <c:idx val="2"/>
@@ -262,6 +273,11 @@
               </a:solidFill>
               <a:effectLst/>
             </c:spPr>
+            <c:extLst>
+              <c:ext xmlns:c16="http://schemas.microsoft.com/office/drawing/2014/chart" uri="{C3380CC4-5D6E-409C-BE32-E72D297353CC}">
+                <c16:uniqueId val="{00000005-3713-B543-BCF2-E8B30A0A96CE}"/>
+              </c:ext>
+            </c:extLst>
           </c:dPt>
           <c:dPt>
             <c:idx val="3"/>
@@ -272,6 +288,11 @@
               </a:solidFill>
               <a:effectLst/>
             </c:spPr>
+            <c:extLst>
+              <c:ext xmlns:c16="http://schemas.microsoft.com/office/drawing/2014/chart" uri="{C3380CC4-5D6E-409C-BE32-E72D297353CC}">
+                <c16:uniqueId val="{00000007-3713-B543-BCF2-E8B30A0A96CE}"/>
+              </c:ext>
+            </c:extLst>
           </c:dPt>
           <c:dLbls>
             <c:dLbl>
@@ -290,6 +311,7 @@
                       <a:latin typeface="+mn-lt"/>
                     </a:defRPr>
                   </a:pPr>
+                  <a:endParaRPr lang="en-US"/>
                 </a:p>
               </c:txPr>
               <c:showLegendKey val="0"/>
@@ -298,6 +320,12 @@
               <c:showSerName val="0"/>
               <c:showPercent val="0"/>
               <c:showBubbleSize val="0"/>
+              <c:extLst>
+                <c:ext xmlns:c15="http://schemas.microsoft.com/office/drawing/2012/chart" uri="{CE6537A1-D6FC-4f65-9D91-7224C49458BB}"/>
+                <c:ext xmlns:c16="http://schemas.microsoft.com/office/drawing/2014/chart" uri="{C3380CC4-5D6E-409C-BE32-E72D297353CC}">
+                  <c16:uniqueId val="{00000001-3713-B543-BCF2-E8B30A0A96CE}"/>
+                </c:ext>
+              </c:extLst>
             </c:dLbl>
             <c:dLbl>
               <c:idx val="1"/>
@@ -315,6 +343,7 @@
                       <a:latin typeface="+mn-lt"/>
                     </a:defRPr>
                   </a:pPr>
+                  <a:endParaRPr lang="en-US"/>
                 </a:p>
               </c:txPr>
               <c:showLegendKey val="0"/>
@@ -323,6 +352,12 @@
               <c:showSerName val="0"/>
               <c:showPercent val="0"/>
               <c:showBubbleSize val="0"/>
+              <c:extLst>
+                <c:ext xmlns:c15="http://schemas.microsoft.com/office/drawing/2012/chart" uri="{CE6537A1-D6FC-4f65-9D91-7224C49458BB}"/>
+                <c:ext xmlns:c16="http://schemas.microsoft.com/office/drawing/2014/chart" uri="{C3380CC4-5D6E-409C-BE32-E72D297353CC}">
+                  <c16:uniqueId val="{00000003-3713-B543-BCF2-E8B30A0A96CE}"/>
+                </c:ext>
+              </c:extLst>
             </c:dLbl>
             <c:dLbl>
               <c:idx val="2"/>
@@ -340,6 +375,7 @@
                       <a:latin typeface="+mn-lt"/>
                     </a:defRPr>
                   </a:pPr>
+                  <a:endParaRPr lang="en-US"/>
                 </a:p>
               </c:txPr>
               <c:showLegendKey val="0"/>
@@ -348,6 +384,12 @@
               <c:showSerName val="0"/>
               <c:showPercent val="0"/>
               <c:showBubbleSize val="0"/>
+              <c:extLst>
+                <c:ext xmlns:c15="http://schemas.microsoft.com/office/drawing/2012/chart" uri="{CE6537A1-D6FC-4f65-9D91-7224C49458BB}"/>
+                <c:ext xmlns:c16="http://schemas.microsoft.com/office/drawing/2014/chart" uri="{C3380CC4-5D6E-409C-BE32-E72D297353CC}">
+                  <c16:uniqueId val="{00000005-3713-B543-BCF2-E8B30A0A96CE}"/>
+                </c:ext>
+              </c:extLst>
             </c:dLbl>
             <c:dLbl>
               <c:idx val="3"/>
@@ -365,6 +407,7 @@
                       <a:latin typeface="+mn-lt"/>
                     </a:defRPr>
                   </a:pPr>
+                  <a:endParaRPr lang="en-US"/>
                 </a:p>
               </c:txPr>
               <c:showLegendKey val="0"/>
@@ -373,8 +416,21 @@
               <c:showSerName val="0"/>
               <c:showPercent val="0"/>
               <c:showBubbleSize val="0"/>
+              <c:extLst>
+                <c:ext xmlns:c15="http://schemas.microsoft.com/office/drawing/2012/chart" uri="{CE6537A1-D6FC-4f65-9D91-7224C49458BB}"/>
+                <c:ext xmlns:c16="http://schemas.microsoft.com/office/drawing/2014/chart" uri="{C3380CC4-5D6E-409C-BE32-E72D297353CC}">
+                  <c16:uniqueId val="{00000007-3713-B543-BCF2-E8B30A0A96CE}"/>
+                </c:ext>
+              </c:extLst>
             </c:dLbl>
             <c:numFmt formatCode="General" sourceLinked="0"/>
+            <c:spPr>
+              <a:noFill/>
+              <a:ln>
+                <a:noFill/>
+              </a:ln>
+              <a:effectLst/>
+            </c:spPr>
             <c:txPr>
               <a:bodyPr/>
               <a:lstStyle/>
@@ -387,6 +443,7 @@
                     <a:latin typeface="Arial"/>
                   </a:defRPr>
                 </a:pPr>
+                <a:endParaRPr lang="en-US"/>
               </a:p>
             </c:txPr>
             <c:showLegendKey val="0"/>
@@ -396,6 +453,9 @@
             <c:showPercent val="1"/>
             <c:showBubbleSize val="0"/>
             <c:showLeaderLines val="0"/>
+            <c:extLst>
+              <c:ext xmlns:c15="http://schemas.microsoft.com/office/drawing/2012/chart" uri="{CE6537A1-D6FC-4f65-9D91-7224C49458BB}"/>
+            </c:extLst>
           </c:dLbls>
           <c:cat>
             <c:strRef>
@@ -421,6 +481,7 @@
             <c:numRef>
               <c:f>Sheet1!$B$2:$B$5</c:f>
               <c:numCache>
+                <c:formatCode>General</c:formatCode>
                 <c:ptCount val="4"/>
                 <c:pt idx="0">
                   <c:v>4238</c:v>
@@ -437,7 +498,21 @@
               </c:numCache>
             </c:numRef>
           </c:val>
+          <c:extLst>
+            <c:ext xmlns:c16="http://schemas.microsoft.com/office/drawing/2014/chart" uri="{C3380CC4-5D6E-409C-BE32-E72D297353CC}">
+              <c16:uniqueId val="{00000008-3713-B543-BCF2-E8B30A0A96CE}"/>
+            </c:ext>
+          </c:extLst>
         </c:ser>
+        <c:dLbls>
+          <c:showLegendKey val="0"/>
+          <c:showVal val="0"/>
+          <c:showCatName val="0"/>
+          <c:showSerName val="0"/>
+          <c:showPercent val="0"/>
+          <c:showBubbleSize val="0"/>
+          <c:showLeaderLines val="0"/>
+        </c:dLbls>
         <c:firstSliceAng val="0"/>
         <c:holeSize val="55"/>
       </c:doughnutChart>
@@ -471,6 +546,7 @@
     </c:legend>
     <c:plotVisOnly val="1"/>
     <c:dispBlanksAs val="span"/>
+    <c:showDLblsOverMax val="1"/>
   </c:chart>
   <c:spPr>
     <a:noFill/>
@@ -485,10 +561,12 @@
 </c:chartSpace>
 </file>
 
-<file path=ppt/charts/chart6.xml><?xml version="1.0" encoding="utf-8"?>
-<c:chartSpace xmlns:c="http://schemas.openxmlformats.org/drawingml/2006/chart" xmlns:a="http://schemas.openxmlformats.org/drawingml/2006/main" xmlns:r="http://schemas.openxmlformats.org/officeDocument/2006/relationships">
+<file path=ppt/charts/chart2.xml><?xml version="1.0" encoding="utf-8"?>
+<c:chartSpace xmlns:c="http://schemas.openxmlformats.org/drawingml/2006/chart" xmlns:a="http://schemas.openxmlformats.org/drawingml/2006/main" xmlns:r="http://schemas.openxmlformats.org/officeDocument/2006/relationships" xmlns:c16r2="http://schemas.microsoft.com/office/drawing/2015/06/chart">
   <c:date1904 val="0"/>
+  <c:lang val="en-US"/>
   <c:roundedCorners val="1"/>
+  <c:style val="2"/>
   <c:chart>
     <c:title>
       <c:tx>
@@ -516,7 +594,6 @@
           </a:p>
         </c:rich>
       </c:tx>
-      <c:layout/>
       <c:overlay val="0"/>
     </c:title>
     <c:autoTitleDeleted val="0"/>
@@ -549,26 +626,41 @@
           <c:invertIfNegative val="0"/>
           <c:dPt>
             <c:idx val="4"/>
+            <c:invertIfNegative val="1"/>
+            <c:bubble3D val="0"/>
             <c:spPr>
               <a:solidFill>
                 <a:srgbClr val="9AA5A3"/>
               </a:solidFill>
             </c:spPr>
+            <c:extLst>
+              <c:ext xmlns:c16="http://schemas.microsoft.com/office/drawing/2014/chart" uri="{C3380CC4-5D6E-409C-BE32-E72D297353CC}">
+                <c16:uniqueId val="{00000001-6AB6-4C4D-A4AC-60D70A0A689D}"/>
+              </c:ext>
+            </c:extLst>
           </c:dPt>
           <c:dLbls>
             <c:numFmt formatCode="0.000" sourceLinked="0"/>
+            <c:spPr>
+              <a:noFill/>
+              <a:ln>
+                <a:noFill/>
+              </a:ln>
+              <a:effectLst/>
+            </c:spPr>
             <c:txPr>
               <a:bodyPr/>
               <a:lstStyle/>
               <a:p>
                 <a:pPr>
-                  <a:defRPr b="0" i="0" strike="noStrike" sz="1100" u="none">
+                  <a:defRPr sz="1100" b="0" i="0" u="none" strike="noStrike">
                     <a:solidFill>
                       <a:srgbClr val="16232E"/>
                     </a:solidFill>
                     <a:latin typeface="+mn-lt"/>
                   </a:defRPr>
                 </a:pPr>
+                <a:endParaRPr lang="en-US"/>
               </a:p>
             </c:txPr>
             <c:showLegendKey val="0"/>
@@ -578,6 +670,11 @@
             <c:showPercent val="0"/>
             <c:showBubbleSize val="0"/>
             <c:showLeaderLines val="0"/>
+            <c:extLst>
+              <c:ext xmlns:c15="http://schemas.microsoft.com/office/drawing/2012/chart" uri="{CE6537A1-D6FC-4f65-9D91-7224C49458BB}">
+                <c15:showLeaderLines val="0"/>
+              </c:ext>
+            </c:extLst>
           </c:dLbls>
           <c:cat>
             <c:strRef>
@@ -609,16 +706,16 @@
                 <c:formatCode>General</c:formatCode>
                 <c:ptCount val="5"/>
                 <c:pt idx="0">
-                  <c:v>0.809</c:v>
+                  <c:v>0.80900000000000005</c:v>
                 </c:pt>
                 <c:pt idx="1">
-                  <c:v>0.864</c:v>
+                  <c:v>0.86399999999999999</c:v>
                 </c:pt>
                 <c:pt idx="2">
-                  <c:v>0.866</c:v>
+                  <c:v>0.86599999999999999</c:v>
                 </c:pt>
                 <c:pt idx="3">
-                  <c:v>0.869</c:v>
+                  <c:v>0.86899999999999999</c:v>
                 </c:pt>
                 <c:pt idx="4">
                   <c:v>0.878</c:v>
@@ -626,36 +723,23 @@
               </c:numCache>
             </c:numRef>
           </c:val>
+          <c:extLst>
+            <c:ext xmlns:c16="http://schemas.microsoft.com/office/drawing/2014/chart" uri="{C3380CC4-5D6E-409C-BE32-E72D297353CC}">
+              <c16:uniqueId val="{00000002-6AB6-4C4D-A4AC-60D70A0A689D}"/>
+            </c:ext>
+          </c:extLst>
         </c:ser>
         <c:dLbls>
-          <c:numFmt formatCode="0.000" sourceLinked="0"/>
-          <c:txPr>
-            <a:bodyPr/>
-            <a:lstStyle/>
-            <a:p>
-              <a:pPr>
-                <a:defRPr b="0" i="0" strike="noStrike" sz="1100" u="none">
-                  <a:solidFill>
-                    <a:srgbClr val="16232E"/>
-                  </a:solidFill>
-                  <a:latin typeface="+mn-lt"/>
-                </a:defRPr>
-              </a:pPr>
-            </a:p>
-          </c:txPr>
           <c:showLegendKey val="0"/>
           <c:showVal val="1"/>
           <c:showCatName val="0"/>
           <c:showSerName val="0"/>
           <c:showPercent val="0"/>
           <c:showBubbleSize val="0"/>
-          <c:showLeaderLines val="0"/>
         </c:dLbls>
         <c:gapWidth val="150"/>
-        <c:overlap val="0"/>
         <c:axId val="2094734554"/>
         <c:axId val="2094734552"/>
-        <c:axId val="2094734556"/>
       </c:barChart>
       <c:catAx>
         <c:axId val="2094734554"/>
@@ -696,6 +780,7 @@
         <c:crosses val="autoZero"/>
         <c:auto val="1"/>
         <c:lblAlgn val="ctr"/>
+        <c:lblOffset val="100"/>
         <c:noMultiLvlLbl val="1"/>
       </c:catAx>
       <c:valAx>
@@ -761,6 +846,7 @@
     </c:plotArea>
     <c:plotVisOnly val="1"/>
     <c:dispBlanksAs val="span"/>
+    <c:showDLblsOverMax val="1"/>
   </c:chart>
   <c:spPr>
     <a:noFill/>
@@ -797,234 +883,10 @@
           <a:chExt cx="0" cy="0"/>
         </a:xfrm>
       </p:grpSpPr>
-      <p:sp>
-        <p:nvSpPr>
-          <p:cNvPr id="2" name="Header Placeholder 1"/>
-          <p:cNvSpPr>
-            <a:spLocks noGrp="1"/>
-          </p:cNvSpPr>
-          <p:nvPr>
-            <p:ph type="hdr" sz="quarter"/>
-          </p:nvPr>
-        </p:nvSpPr>
-        <p:spPr>
-          <a:xfrm>
-            <a:off x="0" y="0"/>
-            <a:ext cx="2971800" cy="458788"/>
-          </a:xfrm>
-          <a:prstGeom prst="rect">
-            <a:avLst/>
-          </a:prstGeom>
-        </p:spPr>
-        <p:txBody>
-          <a:bodyPr vert="horz" lIns="91440" tIns="45720" rIns="91440" bIns="45720" rtlCol="0"/>
-          <a:lstStyle>
-            <a:lvl1pPr algn="l">
-              <a:defRPr sz="1200"/>
-            </a:lvl1pPr>
-          </a:lstStyle>
-          <a:p>
-            <a:endParaRPr lang="en-US"/>
-          </a:p>
-        </p:txBody>
-      </p:sp>
-      <p:sp>
-        <p:nvSpPr>
-          <p:cNvPr id="3" name="Date Placeholder 2"/>
-          <p:cNvSpPr>
-            <a:spLocks noGrp="1"/>
-          </p:cNvSpPr>
-          <p:nvPr>
-            <p:ph type="dt" idx="1"/>
-          </p:nvPr>
-        </p:nvSpPr>
-        <p:spPr>
-          <a:xfrm>
-            <a:off x="3884613" y="0"/>
-            <a:ext cx="2971800" cy="458788"/>
-          </a:xfrm>
-          <a:prstGeom prst="rect">
-            <a:avLst/>
-          </a:prstGeom>
-        </p:spPr>
-        <p:txBody>
-          <a:bodyPr vert="horz" lIns="91440" tIns="45720" rIns="91440" bIns="45720" rtlCol="0"/>
-          <a:lstStyle>
-            <a:lvl1pPr algn="r">
-              <a:defRPr sz="1200"/>
-            </a:lvl1pPr>
-          </a:lstStyle>
-          <a:p>
-            <a:fld id="{5282F153-3F37-0F45-9E97-73ACFA13230C}" type="datetimeFigureOut">
-              <a:rPr lang="en-US"/>
-              <a:t>7/23/19</a:t>
-            </a:fld>
-            <a:endParaRPr lang="en-US"/>
-          </a:p>
-        </p:txBody>
-      </p:sp>
-      <p:sp>
-        <p:nvSpPr>
-          <p:cNvPr id="4" name="Slide Image Placeholder 3"/>
-          <p:cNvSpPr>
-            <a:spLocks noGrp="1" noRot="1" noChangeAspect="1"/>
-          </p:cNvSpPr>
-          <p:nvPr>
-            <p:ph type="sldImg" idx="2"/>
-          </p:nvPr>
-        </p:nvSpPr>
-        <p:spPr>
-          <a:xfrm>
-            <a:off x="685800" y="1143000"/>
-            <a:ext cx="5486400" cy="3086100"/>
-          </a:xfrm>
-          <a:prstGeom prst="rect">
-            <a:avLst/>
-          </a:prstGeom>
-          <a:noFill/>
-          <a:ln w="12700">
-            <a:solidFill>
-              <a:prstClr val="black"/>
-            </a:solidFill>
-          </a:ln>
-        </p:spPr>
-        <p:txBody>
-          <a:bodyPr vert="horz" lIns="91440" tIns="45720" rIns="91440" bIns="45720" rtlCol="0" anchor="ctr"/>
-          <a:lstStyle/>
-          <a:p>
-            <a:endParaRPr lang="en-US"/>
-          </a:p>
-        </p:txBody>
-      </p:sp>
-      <p:sp>
-        <p:nvSpPr>
-          <p:cNvPr id="5" name="Notes Placeholder 4"/>
-          <p:cNvSpPr>
-            <a:spLocks noGrp="1"/>
-          </p:cNvSpPr>
-          <p:nvPr>
-            <p:ph type="body" sz="quarter" idx="3"/>
-          </p:nvPr>
-        </p:nvSpPr>
-        <p:spPr>
-          <a:xfrm>
-            <a:off x="685800" y="4400550"/>
-            <a:ext cx="5486400" cy="3600450"/>
-          </a:xfrm>
-          <a:prstGeom prst="rect">
-            <a:avLst/>
-          </a:prstGeom>
-        </p:spPr>
-        <p:txBody>
-          <a:bodyPr vert="horz" lIns="91440" tIns="45720" rIns="91440" bIns="45720" rtlCol="0"/>
-          <a:lstStyle/>
-          <a:p>
-            <a:pPr lvl="0"/>
-            <a:r>
-              <a:rPr lang="en-US"/>
-              <a:t>Click to edit Master text styles</a:t>
-            </a:r>
-          </a:p>
-          <a:p>
-            <a:pPr lvl="1"/>
-            <a:r>
-              <a:rPr lang="en-US"/>
-              <a:t>Second level</a:t>
-            </a:r>
-          </a:p>
-          <a:p>
-            <a:pPr lvl="2"/>
-            <a:r>
-              <a:rPr lang="en-US"/>
-              <a:t>Third level</a:t>
-            </a:r>
-          </a:p>
-          <a:p>
-            <a:pPr lvl="3"/>
-            <a:r>
-              <a:rPr lang="en-US"/>
-              <a:t>Fourth level</a:t>
-            </a:r>
-          </a:p>
-          <a:p>
-            <a:pPr lvl="4"/>
-            <a:r>
-              <a:rPr lang="en-US"/>
-              <a:t>Fifth level</a:t>
-            </a:r>
-          </a:p>
-        </p:txBody>
-      </p:sp>
-      <p:sp>
-        <p:nvSpPr>
-          <p:cNvPr id="6" name="Footer Placeholder 5"/>
-          <p:cNvSpPr>
-            <a:spLocks noGrp="1"/>
-          </p:cNvSpPr>
-          <p:nvPr>
-            <p:ph type="ftr" sz="quarter" idx="4"/>
-          </p:nvPr>
-        </p:nvSpPr>
-        <p:spPr>
-          <a:xfrm>
-            <a:off x="0" y="8685213"/>
-            <a:ext cx="2971800" cy="458787"/>
-          </a:xfrm>
-          <a:prstGeom prst="rect">
-            <a:avLst/>
-          </a:prstGeom>
-        </p:spPr>
-        <p:txBody>
-          <a:bodyPr vert="horz" lIns="91440" tIns="45720" rIns="91440" bIns="45720" rtlCol="0" anchor="b"/>
-          <a:lstStyle>
-            <a:lvl1pPr algn="l">
-              <a:defRPr sz="1200"/>
-            </a:lvl1pPr>
-          </a:lstStyle>
-          <a:p>
-            <a:endParaRPr lang="en-US"/>
-          </a:p>
-        </p:txBody>
-      </p:sp>
-      <p:sp>
-        <p:nvSpPr>
-          <p:cNvPr id="7" name="Slide Number Placeholder 6"/>
-          <p:cNvSpPr>
-            <a:spLocks noGrp="1"/>
-          </p:cNvSpPr>
-          <p:nvPr>
-            <p:ph type="sldNum" sz="quarter" idx="5"/>
-          </p:nvPr>
-        </p:nvSpPr>
-        <p:spPr>
-          <a:xfrm>
-            <a:off x="3884613" y="8685213"/>
-            <a:ext cx="2971800" cy="458787"/>
-          </a:xfrm>
-          <a:prstGeom prst="rect">
-            <a:avLst/>
-          </a:prstGeom>
-        </p:spPr>
-        <p:txBody>
-          <a:bodyPr vert="horz" lIns="91440" tIns="45720" rIns="91440" bIns="45720" rtlCol="0" anchor="b"/>
-          <a:lstStyle>
-            <a:lvl1pPr algn="r">
-              <a:defRPr sz="1200"/>
-            </a:lvl1pPr>
-          </a:lstStyle>
-          <a:p>
-            <a:fld id="{CE5E9CC1-C706-0F49-92D6-E571CC5EEA8F}" type="slidenum">
-              <a:rPr lang="en-US"/>
-              <a:t>‹#›</a:t>
-            </a:fld>
-            <a:endParaRPr lang="en-US"/>
-          </a:p>
-        </p:txBody>
-      </p:sp>
     </p:spTree>
     <p:extLst>
       <p:ext uri="{BB962C8B-B14F-4D97-AF65-F5344CB8AC3E}">
-        <p14:creationId xmlns:p14="http://schemas.microsoft.com/office/powerpoint/2010/main" val="1024086991"/>
+        <p14:creationId xmlns:p14="http://schemas.microsoft.com/office/powerpoint/2010/main" val="3241827713"/>
       </p:ext>
     </p:extLst>
   </p:cSld>
@@ -1168,8 +1030,18 @@
           <a:bodyPr/>
           <a:lstStyle/>
           <a:p>
-            <a:r>
-              <a:t>Hello everyone. We are Group 2. Our project is Predicting CRM Sales Opportunities Using Machine Learning. We predict whether a sales opportunity will be Won or Lost, and we show which factors influence the score.</a:t>
+            <a:pPr lvl="0"/>
+            <a:r>
+              <a:rPr sz="1700" baseline="0" dirty="0"/>
+              <a:t>Hello everyone. We are Group 2. Our project is Predicting CRM Sales Opportunities Using Machine Learning. </a:t>
+            </a:r>
+            <a:endParaRPr lang="vi-VN" sz="1700" baseline="0" dirty="0"/>
+          </a:p>
+          <a:p>
+            <a:pPr lvl="0"/>
+            <a:r>
+              <a:rPr sz="1700" baseline="0" dirty="0"/>
+              <a:t>We predict whether a sales opportunity will be Won or Lost, and we show which factors influence the score.</a:t>
             </a:r>
           </a:p>
         </p:txBody>
@@ -1234,7 +1106,7 @@
             <a:spLocks noGrp="1" noRot="1" noChangeAspect="1"/>
           </p:cNvSpPr>
           <p:nvPr>
-            <p:ph type="sldImg"/>
+            <p:ph type="sldImg" idx="2"/>
           </p:nvPr>
         </p:nvSpPr>
         <p:spPr/>
@@ -1246,7 +1118,7 @@
             <a:spLocks noGrp="1"/>
           </p:cNvSpPr>
           <p:nvPr>
-            <p:ph type="body" idx="1"/>
+            <p:ph type="body" sz="quarter" idx="3"/>
           </p:nvPr>
         </p:nvSpPr>
         <p:spPr/>
@@ -1255,7 +1127,7 @@
           <a:lstStyle/>
           <a:p>
             <a:r>
-              <a:t>We scored 1,589 Engaging deals. Win and loss probabilities sum to one. 1,088 have a missing account and are flagged. Each deal gets a priority band and the factors that raise or lower its score: we reset one input at a time to its training median or mode and measure the change in win probability. This example is the highest-scored deal. We checked that these factors describe the model: on the Random Forest they agree with TreeSHAP, with a median Spearman correlation of 0.76, and resetting a deal's top three factors moves the score 3.1 times more than resetting three random ones. They show what the model reacts to, not causes, and the priority bands are a heuristic that has not been validated.</a:t>
+              <a:t>Now a short live demo. We run the three notebooks for the original data in order: 1_train fits the five models and selects one on validation, 2_evaluate computes the test metrics and figures from the saved models, and 3_predict scores the open deals and shows the factors behind one score. If time allows, we show the same three steps on the simulated data. After the demo we go through the results.</a:t>
             </a:r>
           </a:p>
         </p:txBody>
@@ -1267,28 +1139,12 @@
             <a:spLocks noGrp="1"/>
           </p:cNvSpPr>
           <p:nvPr>
-            <p:ph type="sldNum" sz="quarter" idx="10"/>
+            <p:ph type="sldNum" sz="quarter" idx="5"/>
           </p:nvPr>
         </p:nvSpPr>
         <p:spPr/>
-        <p:txBody>
-          <a:bodyPr/>
-          <a:lstStyle/>
-          <a:p>
-            <a:fld id="{F7021451-1387-4CA6-816F-3879F97B5CBC}" type="slidenum">
-              <a:rPr lang="en-US"/>
-              <a:t>10</a:t>
-            </a:fld>
-            <a:endParaRPr lang="en-US"/>
-          </a:p>
-        </p:txBody>
       </p:sp>
     </p:spTree>
-    <p:extLst>
-      <p:ext uri="{BB962C8B-B14F-4D97-AF65-F5344CB8AC3E}">
-        <p14:creationId xmlns:p14="http://schemas.microsoft.com/office/powerpoint/2010/main" val="1024086991"/>
-      </p:ext>
-    </p:extLst>
   </p:cSld>
   <p:clrMapOvr>
     <a:masterClrMapping/>
@@ -1297,7 +1153,7 @@
 </file>
 
 <file path=ppt/notesSlides/notesSlide11.xml><?xml version="1.0" encoding="utf-8"?>
-<p:notes xmlns:a="http://schemas.openxmlformats.org/drawingml/2006/main" xmlns:p="http://schemas.openxmlformats.org/presentationml/2006/main" xmlns:r="http://schemas.openxmlformats.org/officeDocument/2006/relationships">
+<p:notes xmlns:a="http://schemas.openxmlformats.org/drawingml/2006/main" xmlns:r="http://schemas.openxmlformats.org/officeDocument/2006/relationships" xmlns:p="http://schemas.openxmlformats.org/presentationml/2006/main">
   <p:cSld>
     <p:spTree>
       <p:nvGrpSpPr>
@@ -1317,10 +1173,10 @@
         <p:nvSpPr>
           <p:cNvPr id="2" name="Slide Image Placeholder 1"/>
           <p:cNvSpPr>
-            <a:spLocks noGrp="1"/>
+            <a:spLocks noGrp="1" noRot="1" noChangeAspect="1"/>
           </p:cNvSpPr>
           <p:nvPr>
-            <p:ph type="sldImg" idx="2"/>
+            <p:ph type="sldImg"/>
           </p:nvPr>
         </p:nvSpPr>
         <p:spPr/>
@@ -1332,7 +1188,7 @@
             <a:spLocks noGrp="1"/>
           </p:cNvSpPr>
           <p:nvPr>
-            <p:ph type="body" idx="3" sz="quarter"/>
+            <p:ph type="body" idx="1"/>
           </p:nvPr>
         </p:nvSpPr>
         <p:spPr/>
@@ -1341,7 +1197,7 @@
           <a:lstStyle/>
           <a:p>
             <a:r>
-              <a:t>Before comparing results, here is how the two deep models differ. An MLP is a stack of fully connected layers. Every neuron looks at every input, and the network learns interactions inside its weighted sums. Ours has two hidden layers, 64 and 32 units. It has no built-in idea of which inputs matter, so we explain it with methods like permutation importance or SHAP. TabNet was designed for tabular data. It works in several steps. At each step, an attention module chooses a small set of inputs for that particular deal, using a sparse mask. Only those inputs are processed in that step, and the results of all steps are added together. This makes TabNet behave a bit like a sequence of decision-tree splits, and the masks show which inputs it used for each deal. The cost is more hyperparameters and slower training.</a:t>
+              <a:t>Here is the main result on the original data. Test ROC-AUC is between 0.495 and 0.524 for all models, and 0.5 means random ranking. The selected Logistic Regression has 0.524. Its recall is low because its threshold, chosen on validation, is strict. The Dummy gets 60 percent accuracy only because about 60 percent of deals are Won and it always predicts Won, so accuracy alone is misleading. Calibration improved the Brier score of Logistic Regression from 0.2794 to 0.2443, but that is still slightly worse than the Dummy, and it does not change the ranking.</a:t>
             </a:r>
           </a:p>
         </p:txBody>
@@ -1353,12 +1209,28 @@
             <a:spLocks noGrp="1"/>
           </p:cNvSpPr>
           <p:nvPr>
-            <p:ph type="sldNum" idx="5" sz="quarter"/>
+            <p:ph type="sldNum" sz="quarter" idx="10"/>
           </p:nvPr>
         </p:nvSpPr>
         <p:spPr/>
+        <p:txBody>
+          <a:bodyPr/>
+          <a:lstStyle/>
+          <a:p>
+            <a:fld id="{F7021451-1387-4CA6-816F-3879F97B5CBC}" type="slidenum">
+              <a:rPr lang="en-US"/>
+              <a:t>11</a:t>
+            </a:fld>
+            <a:endParaRPr lang="en-US"/>
+          </a:p>
+        </p:txBody>
       </p:sp>
     </p:spTree>
+    <p:extLst>
+      <p:ext uri="{BB962C8B-B14F-4D97-AF65-F5344CB8AC3E}">
+        <p14:creationId xmlns:p14="http://schemas.microsoft.com/office/powerpoint/2010/main" val="1024086991"/>
+      </p:ext>
+    </p:extLst>
   </p:cSld>
   <p:clrMapOvr>
     <a:masterClrMapping/>
@@ -1411,7 +1283,7 @@
           <a:lstStyle/>
           <a:p>
             <a:r>
-              <a:t>Low scores could mean the data has no signal, or that our pipeline is broken. To tell these apart, we ran the same pipeline on simulated data where we know the signal exists.</a:t>
+              <a:t>We scored 1,589 Engaging deals. Win and loss probabilities sum to one. 1,088 have a missing account and are flagged. Each deal gets a priority band and the factors that raise or lower its score: we reset one input at a time to its training median or mode and measure the change in win probability. This example is the highest-scored deal. We checked that these factors describe the model: on the Random Forest they agree with TreeSHAP, with a median Spearman correlation of 0.76, and resetting a deal's top three factors moves the score 3.1 times more than resetting three random ones. They show what the model reacts to, not causes, and the priority bands are a heuristic that has not been validated.</a:t>
             </a:r>
           </a:p>
         </p:txBody>
@@ -1497,7 +1369,7 @@
           <a:lstStyle/>
           <a:p>
             <a:r>
-              <a:t>The simulated data reuses the real accounts, agents and products, and matches the real date range and win rate. We added new products, competitor products and industry trends. Each deal's win probability comes from a formula we wrote, including interaction effects such as an expensive product sold to a small account. Because we wrote the formula, we know the true probability, which gives us the oracle: the best possible score. It is never used as a feature.</a:t>
+              <a:t>On the simulated data, test ROC-AUC is 0.809 for Logistic Regression, 0.864 for Random Forest, 0.866 for MLP and 0.869 for TabNet. The best possible is 0.878. So the nonlinear models recover nearly all the planted signal. Over five newly generated datasets the result holds, with standard deviations under 0.01. Nonlinear models win partly because we built the data with interactions.</a:t>
             </a:r>
           </a:p>
         </p:txBody>
@@ -1562,7 +1434,7 @@
             <a:spLocks noGrp="1" noRot="1" noChangeAspect="1"/>
           </p:cNvSpPr>
           <p:nvPr>
-            <p:ph type="sldImg"/>
+            <p:ph type="sldImg" idx="2"/>
           </p:nvPr>
         </p:nvSpPr>
         <p:spPr/>
@@ -1574,7 +1446,7 @@
             <a:spLocks noGrp="1"/>
           </p:cNvSpPr>
           <p:nvPr>
-            <p:ph type="body" idx="1"/>
+            <p:ph type="body" sz="quarter" idx="3"/>
           </p:nvPr>
         </p:nvSpPr>
         <p:spPr/>
@@ -1583,7 +1455,7 @@
           <a:lstStyle/>
           <a:p>
             <a:r>
-              <a:t>On the simulated data, test ROC-AUC is 0.809 for Logistic Regression, 0.864 for Random Forest, 0.866 for MLP and 0.869 for TabNet. The best possible is 0.878. So the nonlinear models recover nearly all the planted signal. Over five newly generated datasets the result holds, with standard deviations under 0.01. Nonlinear models win partly because we built the data with interactions.</a:t>
+              <a:t>Both MLP and TabNet are neural networks, so this is the fairest deep-learning comparison. On the real data TabNet scores 0.507 and the MLP 0.495. But the 95 percent confidence interval for the difference goes from minus 0.030 to plus 0.054, so it is not a real win. On simulated data they are within 0.002 AUC: TabNet is ahead in four of five seeds with interactions, and three of five with smooth signals. TabNet is about 27 times slower to train here, and 35 times slower on 100,000 deals. What TabNet does give us is built-in attention, which shows the features each decision step used. The MLP needs a separate method for that.</a:t>
             </a:r>
           </a:p>
         </p:txBody>
@@ -1595,28 +1467,12 @@
             <a:spLocks noGrp="1"/>
           </p:cNvSpPr>
           <p:nvPr>
-            <p:ph type="sldNum" sz="quarter" idx="10"/>
+            <p:ph type="sldNum" sz="quarter" idx="5"/>
           </p:nvPr>
         </p:nvSpPr>
         <p:spPr/>
-        <p:txBody>
-          <a:bodyPr/>
-          <a:lstStyle/>
-          <a:p>
-            <a:fld id="{F7021451-1387-4CA6-816F-3879F97B5CBC}" type="slidenum">
-              <a:rPr lang="en-US"/>
-              <a:t>14</a:t>
-            </a:fld>
-            <a:endParaRPr lang="en-US"/>
-          </a:p>
-        </p:txBody>
       </p:sp>
     </p:spTree>
-    <p:extLst>
-      <p:ext uri="{BB962C8B-B14F-4D97-AF65-F5344CB8AC3E}">
-        <p14:creationId xmlns:p14="http://schemas.microsoft.com/office/powerpoint/2010/main" val="1024086991"/>
-      </p:ext>
-    </p:extLst>
   </p:cSld>
   <p:clrMapOvr>
     <a:masterClrMapping/>
@@ -1968,76 +1824,6 @@
 </p:notes>
 </file>
 
-<file path=ppt/notesSlides/notesSlide19.xml><?xml version="1.0" encoding="utf-8"?>
-<p:notes xmlns:a="http://schemas.openxmlformats.org/drawingml/2006/main" xmlns:p="http://schemas.openxmlformats.org/presentationml/2006/main" xmlns:r="http://schemas.openxmlformats.org/officeDocument/2006/relationships">
-  <p:cSld>
-    <p:spTree>
-      <p:nvGrpSpPr>
-        <p:cNvPr id="1" name=""/>
-        <p:cNvGrpSpPr/>
-        <p:nvPr/>
-      </p:nvGrpSpPr>
-      <p:grpSpPr>
-        <a:xfrm>
-          <a:off x="0" y="0"/>
-          <a:ext cx="0" cy="0"/>
-          <a:chOff x="0" y="0"/>
-          <a:chExt cx="0" cy="0"/>
-        </a:xfrm>
-      </p:grpSpPr>
-      <p:sp>
-        <p:nvSpPr>
-          <p:cNvPr id="2" name="Slide Image Placeholder 1"/>
-          <p:cNvSpPr>
-            <a:spLocks noGrp="1"/>
-          </p:cNvSpPr>
-          <p:nvPr>
-            <p:ph type="sldImg" idx="2"/>
-          </p:nvPr>
-        </p:nvSpPr>
-        <p:spPr/>
-      </p:sp>
-      <p:sp>
-        <p:nvSpPr>
-          <p:cNvPr id="3" name="Notes Placeholder 2"/>
-          <p:cNvSpPr>
-            <a:spLocks noGrp="1"/>
-          </p:cNvSpPr>
-          <p:nvPr>
-            <p:ph type="body" idx="3" sz="quarter"/>
-          </p:nvPr>
-        </p:nvSpPr>
-        <p:spPr/>
-        <p:txBody>
-          <a:bodyPr/>
-          <a:lstStyle/>
-          <a:p>
-            <a:r>
-              <a:t>Both MLP and TabNet are neural networks, so this is the fairest deep-learning comparison. On the real data TabNet scores 0.507 and the MLP 0.495. But the 95 percent confidence interval for the difference goes from minus 0.030 to plus 0.054, so it is not a real win. On simulated data they are within 0.002 AUC: TabNet is ahead in four of five seeds with interactions, and three of five with smooth signals. TabNet is about 27 times slower to train here, and 35 times slower on 100,000 deals. What TabNet does give us is built-in attention, which shows the features each decision step used. The MLP needs a separate method for that.</a:t>
-            </a:r>
-          </a:p>
-        </p:txBody>
-      </p:sp>
-      <p:sp>
-        <p:nvSpPr>
-          <p:cNvPr id="4" name="Slide Number Placeholder 3"/>
-          <p:cNvSpPr>
-            <a:spLocks noGrp="1"/>
-          </p:cNvSpPr>
-          <p:nvPr>
-            <p:ph type="sldNum" idx="5" sz="quarter"/>
-          </p:nvPr>
-        </p:nvSpPr>
-        <p:spPr/>
-      </p:sp>
-    </p:spTree>
-  </p:cSld>
-  <p:clrMapOvr>
-    <a:masterClrMapping/>
-  </p:clrMapOvr>
-</p:notes>
-</file>
-
 <file path=ppt/notesSlides/notesSlide2.xml><?xml version="1.0" encoding="utf-8"?>
 <p:notes xmlns:a="http://schemas.openxmlformats.org/drawingml/2006/main" xmlns:r="http://schemas.openxmlformats.org/officeDocument/2006/relationships" xmlns:p="http://schemas.openxmlformats.org/presentationml/2006/main">
   <p:cSld>
@@ -2083,7 +1869,58 @@
           <a:lstStyle/>
           <a:p>
             <a:r>
-              <a:t>The input is four CRM tables: pipeline, accounts, products and sales teams. We train five models, including a Dummy control. The output is a win probability for each open deal, plus the factors that move the score. We show two scenarios. Scenario A uses the original Maven CRM data and gives our reported results. Scenario B runs the same models on simulated data, to check that the pipeline finds signal when signal exists.</a:t>
+              <a:rPr dirty="0"/>
+              <a:t>The input is four CRM tables: pipeline, accounts, products and sales teams. </a:t>
+            </a:r>
+            <a:endParaRPr lang="en-US" dirty="0"/>
+          </a:p>
+          <a:p>
+            <a:r>
+              <a:rPr dirty="0"/>
+              <a:t>We train five models, including a Dummy control. </a:t>
+            </a:r>
+            <a:endParaRPr lang="en-US" dirty="0"/>
+          </a:p>
+          <a:p>
+            <a:r>
+              <a:rPr dirty="0"/>
+              <a:t>The output is a win probability for each open deal, plus the factors that move the score</a:t>
+            </a:r>
+            <a:r>
+              <a:rPr lang="en-US" dirty="0"/>
+              <a:t>.</a:t>
+            </a:r>
+          </a:p>
+          <a:p>
+            <a:r>
+              <a:rPr dirty="0"/>
+              <a:t>We show two scenarios. </a:t>
+            </a:r>
+            <a:endParaRPr lang="en-US" dirty="0"/>
+          </a:p>
+          <a:p>
+            <a:r>
+              <a:rPr dirty="0"/>
+              <a:t>Scenario A uses the original Maven CRM data and gives our reported results. </a:t>
+            </a:r>
+            <a:endParaRPr lang="en-US" dirty="0"/>
+          </a:p>
+          <a:p>
+            <a:r>
+              <a:rPr dirty="0"/>
+              <a:t>Scenario B runs the same models on</a:t>
+            </a:r>
+            <a:r>
+              <a:rPr lang="vi-VN" dirty="0"/>
+              <a:t> </a:t>
+            </a:r>
+            <a:r>
+              <a:rPr lang="en-US" dirty="0"/>
+              <a:t>Maven CRM plus</a:t>
+            </a:r>
+            <a:r>
+              <a:rPr dirty="0"/>
+              <a:t> simulated data, to check that the pipeline finds signal when signal exists.</a:t>
             </a:r>
           </a:p>
         </p:txBody>
@@ -2169,7 +2006,31 @@
           <a:lstStyle/>
           <a:p>
             <a:r>
-              <a:t>The data is the Maven Analytics CRM dataset: a fictitious company that sells computer hardware to businesses. It has 8,800 opportunities, 85 accounts, 7 products and 35 sales agents. We join the four tables and fix two spelling problems in the raw data. We train only on the 6,711 closed deals: 4,238 Won and 2,473 Lost. Open deals are scored, never treated as Lost.</a:t>
+              <a:rPr dirty="0"/>
+              <a:t>The data is the Maven Analytics CRM dataset: a fictitious company that sells computer hardware to businesses. </a:t>
+            </a:r>
+            <a:endParaRPr lang="vi-VN" dirty="0"/>
+          </a:p>
+          <a:p>
+            <a:r>
+              <a:rPr dirty="0"/>
+              <a:t>It has 88</a:t>
+            </a:r>
+            <a:r>
+              <a:rPr lang="vi-VN" dirty="0"/>
+              <a:t> hundreds (88</a:t>
+            </a:r>
+            <a:r>
+              <a:rPr dirty="0"/>
+              <a:t>00</a:t>
+            </a:r>
+            <a:r>
+              <a:rPr lang="vi-VN" dirty="0"/>
+              <a:t>)</a:t>
+            </a:r>
+            <a:r>
+              <a:rPr dirty="0"/>
+              <a:t> opportunities, 85 accounts, 7 products and 35 sales agents. We join the four tables and fix two spelling problems in the raw data. We train only on the 6,711 closed deals: 4,238 Won and 2,473 Lost. Open deals are scored, never treated as Lost.</a:t>
             </a:r>
           </a:p>
         </p:txBody>
@@ -2211,7 +2072,7 @@
 </file>
 
 <file path=ppt/notesSlides/notesSlide4.xml><?xml version="1.0" encoding="utf-8"?>
-<p:notes xmlns:a="http://schemas.openxmlformats.org/drawingml/2006/main" xmlns:p="http://schemas.openxmlformats.org/presentationml/2006/main" xmlns:r="http://schemas.openxmlformats.org/officeDocument/2006/relationships">
+<p:notes xmlns:a="http://schemas.openxmlformats.org/drawingml/2006/main" xmlns:r="http://schemas.openxmlformats.org/officeDocument/2006/relationships" xmlns:p="http://schemas.openxmlformats.org/presentationml/2006/main">
   <p:cSld>
     <p:spTree>
       <p:nvGrpSpPr>
@@ -2231,10 +2092,10 @@
         <p:nvSpPr>
           <p:cNvPr id="2" name="Slide Image Placeholder 1"/>
           <p:cNvSpPr>
-            <a:spLocks noGrp="1"/>
+            <a:spLocks noGrp="1" noRot="1" noChangeAspect="1"/>
           </p:cNvSpPr>
           <p:nvPr>
-            <p:ph type="sldImg" idx="2"/>
+            <p:ph type="sldImg"/>
           </p:nvPr>
         </p:nvSpPr>
         <p:spPr/>
@@ -2246,7 +2107,7 @@
             <a:spLocks noGrp="1"/>
           </p:cNvSpPr>
           <p:nvPr>
-            <p:ph type="body" idx="3" sz="quarter"/>
+            <p:ph type="body" idx="1"/>
           </p:nvPr>
         </p:nvSpPr>
         <p:spPr/>
@@ -2255,7 +2116,8 @@
           <a:lstStyle/>
           <a:p>
             <a:r>
-              <a:t>Now a short live demo. We run the three notebooks for the original data in order: 1_train fits the five models and selects one on validation, 2_evaluate computes the test metrics and figures from the saved models, and 3_predict scores the open deals and shows the factors behind one score. If time allows, we show the same three steps on the simulated data. After the demo we go through the results.</a:t>
+              <a:rPr dirty="0"/>
+              <a:t>We split by time, not at random. Train has 2,975 deals, validation 583 and test 1,361. Deals from the same date stay together. We purged 1,792 rows whose outcomes were not known at the cutoff, so the model never learns from the future. Preprocessing is fit on the training set only. We also checked whether this matters: a random split gives at most 0.04 higher AUC, and every protocol is still near chance. So the split is a safeguard, not the reason our scores are low.</a:t>
             </a:r>
           </a:p>
         </p:txBody>
@@ -2267,12 +2129,28 @@
             <a:spLocks noGrp="1"/>
           </p:cNvSpPr>
           <p:nvPr>
-            <p:ph type="sldNum" idx="5" sz="quarter"/>
+            <p:ph type="sldNum" sz="quarter" idx="10"/>
           </p:nvPr>
         </p:nvSpPr>
         <p:spPr/>
+        <p:txBody>
+          <a:bodyPr/>
+          <a:lstStyle/>
+          <a:p>
+            <a:fld id="{F7021451-1387-4CA6-816F-3879F97B5CBC}" type="slidenum">
+              <a:rPr lang="en-US"/>
+              <a:t>4</a:t>
+            </a:fld>
+            <a:endParaRPr lang="en-US"/>
+          </a:p>
+        </p:txBody>
       </p:sp>
     </p:spTree>
+    <p:extLst>
+      <p:ext uri="{BB962C8B-B14F-4D97-AF65-F5344CB8AC3E}">
+        <p14:creationId xmlns:p14="http://schemas.microsoft.com/office/powerpoint/2010/main" val="1024086991"/>
+      </p:ext>
+    </p:extLst>
   </p:cSld>
   <p:clrMapOvr>
     <a:masterClrMapping/>
@@ -2325,7 +2203,7 @@
           <a:lstStyle/>
           <a:p>
             <a:r>
-              <a:t>We split by time, not at random. Train has 2,975 deals, validation 583 and test 1,361. Deals from the same date stay together. We purged 1,792 rows whose outcomes were not known at the cutoff, so the model never learns from the future. Preprocessing is fit on the training set only. We also checked whether this matters: a random split gives at most 0.04 higher AUC, and every protocol is still near chance. So the split is a safeguard, not the reason our scores are low.</a:t>
+              <a:t>We trained a Dummy control, Logistic Regression, Random Forest, MLP and TabNet on the same rows and the same preprocessing. The model, the threshold and the calibration are all chosen on validation. Logistic Regression had the best validation ROC-AUC, 0.563, so it was selected before we looked at test. The threshold maximises macro-F1 on validation instead of using 0.5.</a:t>
             </a:r>
           </a:p>
         </p:txBody>
@@ -2390,7 +2268,7 @@
             <a:spLocks noGrp="1" noRot="1" noChangeAspect="1"/>
           </p:cNvSpPr>
           <p:nvPr>
-            <p:ph type="sldImg"/>
+            <p:ph type="sldImg" idx="2"/>
           </p:nvPr>
         </p:nvSpPr>
         <p:spPr/>
@@ -2402,7 +2280,7 @@
             <a:spLocks noGrp="1"/>
           </p:cNvSpPr>
           <p:nvPr>
-            <p:ph type="body" idx="1"/>
+            <p:ph type="body" sz="quarter" idx="3"/>
           </p:nvPr>
         </p:nvSpPr>
         <p:spPr/>
@@ -2411,7 +2289,48 @@
           <a:lstStyle/>
           <a:p>
             <a:r>
-              <a:t>We trained a Dummy control, Logistic Regression, Random Forest, MLP and TabNet on the same rows and the same preprocessing. The model, the threshold and the calibration are all chosen on validation. Logistic Regression had the best validation ROC-AUC, 0.563, so it was selected before we looked at test. The threshold maximises macro-F1 on validation instead of using 0.5.</a:t>
+              <a:rPr dirty="0"/>
+              <a:t>Before comparing results, here is how the two deep models differ. </a:t>
+            </a:r>
+            <a:endParaRPr lang="en-US" dirty="0"/>
+          </a:p>
+          <a:p>
+            <a:r>
+              <a:rPr dirty="0"/>
+              <a:t>An MLP is a stack of fully connected layers. </a:t>
+            </a:r>
+            <a:endParaRPr lang="en-US" dirty="0"/>
+          </a:p>
+          <a:p>
+            <a:r>
+              <a:rPr dirty="0"/>
+              <a:t>Every neuron looks at every input, and the network learns interactions inside its weighted sums.</a:t>
+            </a:r>
+            <a:endParaRPr lang="en-US" dirty="0"/>
+          </a:p>
+          <a:p>
+            <a:r>
+              <a:rPr dirty="0"/>
+              <a:t>Ours has two hidden layers, 64 and 32 units. It has no built-in idea of which inputs matter, so we explain it with methods like permutation importance or SHAP. </a:t>
+            </a:r>
+            <a:endParaRPr lang="en-US" dirty="0"/>
+          </a:p>
+          <a:p>
+            <a:r>
+              <a:rPr dirty="0" err="1"/>
+              <a:t>TabNet</a:t>
+            </a:r>
+            <a:r>
+              <a:rPr dirty="0"/>
+              <a:t> was designed for tabular data. It works in several steps. At each step, an attention module chooses a small set of inputs for that particular deal, using a sparse mask. Only those inputs are processed in that step, and the results of all steps are added together. This makes </a:t>
+            </a:r>
+            <a:r>
+              <a:rPr dirty="0" err="1"/>
+              <a:t>TabNet</a:t>
+            </a:r>
+            <a:r>
+              <a:rPr dirty="0"/>
+              <a:t> behave a bit like a sequence of decision-tree splits, and the masks show which inputs it used for each deal. The cost is more hyperparameters and slower training.</a:t>
             </a:r>
           </a:p>
         </p:txBody>
@@ -2423,28 +2342,12 @@
             <a:spLocks noGrp="1"/>
           </p:cNvSpPr>
           <p:nvPr>
-            <p:ph type="sldNum" sz="quarter" idx="10"/>
+            <p:ph type="sldNum" sz="quarter" idx="5"/>
           </p:nvPr>
         </p:nvSpPr>
         <p:spPr/>
-        <p:txBody>
-          <a:bodyPr/>
-          <a:lstStyle/>
-          <a:p>
-            <a:fld id="{F7021451-1387-4CA6-816F-3879F97B5CBC}" type="slidenum">
-              <a:rPr lang="en-US"/>
-              <a:t>6</a:t>
-            </a:fld>
-            <a:endParaRPr lang="en-US"/>
-          </a:p>
-        </p:txBody>
       </p:sp>
     </p:spTree>
-    <p:extLst>
-      <p:ext uri="{BB962C8B-B14F-4D97-AF65-F5344CB8AC3E}">
-        <p14:creationId xmlns:p14="http://schemas.microsoft.com/office/powerpoint/2010/main" val="1024086991"/>
-      </p:ext>
-    </p:extLst>
   </p:cSld>
   <p:clrMapOvr>
     <a:masterClrMapping/>
@@ -2453,7 +2356,7 @@
 </file>
 
 <file path=ppt/notesSlides/notesSlide7.xml><?xml version="1.0" encoding="utf-8"?>
-<p:notes xmlns:a="http://schemas.openxmlformats.org/drawingml/2006/main" xmlns:p="http://schemas.openxmlformats.org/presentationml/2006/main" xmlns:r="http://schemas.openxmlformats.org/officeDocument/2006/relationships">
+<p:notes xmlns:a="http://schemas.openxmlformats.org/drawingml/2006/main" xmlns:r="http://schemas.openxmlformats.org/officeDocument/2006/relationships" xmlns:p="http://schemas.openxmlformats.org/presentationml/2006/main">
   <p:cSld>
     <p:spTree>
       <p:nvGrpSpPr>
@@ -2473,7 +2376,7 @@
         <p:nvSpPr>
           <p:cNvPr id="2" name="Slide Image Placeholder 1"/>
           <p:cNvSpPr>
-            <a:spLocks noGrp="1"/>
+            <a:spLocks noGrp="1" noRot="1" noChangeAspect="1"/>
           </p:cNvSpPr>
           <p:nvPr>
             <p:ph type="sldImg" idx="2"/>
@@ -2488,7 +2391,7 @@
             <a:spLocks noGrp="1"/>
           </p:cNvSpPr>
           <p:nvPr>
-            <p:ph type="body" idx="3" sz="quarter"/>
+            <p:ph type="body" sz="quarter" idx="3"/>
           </p:nvPr>
         </p:nvSpPr>
         <p:spPr/>
@@ -2509,7 +2412,7 @@
             <a:spLocks noGrp="1"/>
           </p:cNvSpPr>
           <p:nvPr>
-            <p:ph type="sldNum" idx="5" sz="quarter"/>
+            <p:ph type="sldNum" sz="quarter" idx="5"/>
           </p:nvPr>
         </p:nvSpPr>
         <p:spPr/>
@@ -2567,7 +2470,7 @@
           <a:lstStyle/>
           <a:p>
             <a:r>
-              <a:t>Here is the main result on the original data. Test ROC-AUC is between 0.495 and 0.524 for all models, and 0.5 means random ranking. The selected Logistic Regression has 0.524. Its recall is low because its threshold, chosen on validation, is strict. The Dummy gets 60 percent accuracy only because about 60 percent of deals are Won and it always predicts Won, so accuracy alone is misleading. Calibration improved the Brier score of Logistic Regression from 0.2794 to 0.2443, but that is still slightly worse than the Dummy, and it does not change the ranking.</a:t>
+              <a:t>Low scores could mean the data has no signal, or that our pipeline is broken. To tell these apart, we ran the same pipeline on simulated data where we know the signal exists.</a:t>
             </a:r>
           </a:p>
         </p:txBody>
@@ -2590,6 +2493,122 @@
             <a:fld id="{F7021451-1387-4CA6-816F-3879F97B5CBC}" type="slidenum">
               <a:rPr lang="en-US"/>
               <a:t>8</a:t>
+            </a:fld>
+            <a:endParaRPr lang="en-US"/>
+          </a:p>
+        </p:txBody>
+      </p:sp>
+    </p:spTree>
+    <p:extLst>
+      <p:ext uri="{BB962C8B-B14F-4D97-AF65-F5344CB8AC3E}">
+        <p14:creationId xmlns:p14="http://schemas.microsoft.com/office/powerpoint/2010/main" val="1024086991"/>
+      </p:ext>
+    </p:extLst>
+  </p:cSld>
+  <p:clrMapOvr>
+    <a:masterClrMapping/>
+  </p:clrMapOvr>
+</p:notes>
+</file>
+
+<file path=ppt/notesSlides/notesSlide9.xml><?xml version="1.0" encoding="utf-8"?>
+<p:notes xmlns:a="http://schemas.openxmlformats.org/drawingml/2006/main" xmlns:r="http://schemas.openxmlformats.org/officeDocument/2006/relationships" xmlns:p="http://schemas.openxmlformats.org/presentationml/2006/main">
+  <p:cSld>
+    <p:spTree>
+      <p:nvGrpSpPr>
+        <p:cNvPr id="1" name=""/>
+        <p:cNvGrpSpPr/>
+        <p:nvPr/>
+      </p:nvGrpSpPr>
+      <p:grpSpPr>
+        <a:xfrm>
+          <a:off x="0" y="0"/>
+          <a:ext cx="0" cy="0"/>
+          <a:chOff x="0" y="0"/>
+          <a:chExt cx="0" cy="0"/>
+        </a:xfrm>
+      </p:grpSpPr>
+      <p:sp>
+        <p:nvSpPr>
+          <p:cNvPr id="2" name="Slide Image Placeholder 1"/>
+          <p:cNvSpPr>
+            <a:spLocks noGrp="1" noRot="1" noChangeAspect="1"/>
+          </p:cNvSpPr>
+          <p:nvPr>
+            <p:ph type="sldImg"/>
+          </p:nvPr>
+        </p:nvSpPr>
+        <p:spPr/>
+      </p:sp>
+      <p:sp>
+        <p:nvSpPr>
+          <p:cNvPr id="3" name="Notes Placeholder 2"/>
+          <p:cNvSpPr>
+            <a:spLocks noGrp="1"/>
+          </p:cNvSpPr>
+          <p:nvPr>
+            <p:ph type="body" idx="1"/>
+          </p:nvPr>
+        </p:nvSpPr>
+        <p:spPr/>
+        <p:txBody>
+          <a:bodyPr/>
+          <a:lstStyle/>
+          <a:p>
+            <a:r>
+              <a:rPr sz="1800" dirty="0"/>
+              <a:t>The simulated data </a:t>
+            </a:r>
+            <a:r>
+              <a:rPr sz="1200" dirty="0"/>
+              <a:t>reuses</a:t>
+            </a:r>
+            <a:r>
+              <a:rPr sz="1800" dirty="0"/>
+              <a:t> the real accounts, agents and products, and matches the real date range and win rate. </a:t>
+            </a:r>
+            <a:endParaRPr lang="vi-VN" sz="1800" dirty="0"/>
+          </a:p>
+          <a:p>
+            <a:r>
+              <a:rPr sz="1800" dirty="0"/>
+              <a:t>We added new products, competitor products and industry trends. </a:t>
+            </a:r>
+            <a:endParaRPr lang="vi-VN" sz="1800" dirty="0"/>
+          </a:p>
+          <a:p>
+            <a:r>
+              <a:rPr sz="1800" dirty="0"/>
+              <a:t>Each deal's win probability comes from a formula we wrote, including interaction effects such as an expensive product sold to a small account</a:t>
+            </a:r>
+            <a:endParaRPr lang="vi-VN" sz="1800" dirty="0"/>
+          </a:p>
+          <a:p>
+            <a:r>
+              <a:rPr sz="1800" dirty="0"/>
+              <a:t>Because we wrote the formula, we know the true probability, which gives us the oracle: the best possible score. It is never used as a feature.</a:t>
+            </a:r>
+          </a:p>
+        </p:txBody>
+      </p:sp>
+      <p:sp>
+        <p:nvSpPr>
+          <p:cNvPr id="4" name="Slide Number Placeholder 3"/>
+          <p:cNvSpPr>
+            <a:spLocks noGrp="1"/>
+          </p:cNvSpPr>
+          <p:nvPr>
+            <p:ph type="sldNum" sz="quarter" idx="10"/>
+          </p:nvPr>
+        </p:nvSpPr>
+        <p:spPr/>
+        <p:txBody>
+          <a:bodyPr/>
+          <a:lstStyle/>
+          <a:p>
+            <a:fld id="{F7021451-1387-4CA6-816F-3879F97B5CBC}" type="slidenum">
+              <a:rPr lang="en-US"/>
+              <a:t>9</a:t>
             </a:fld>
             <a:endParaRPr lang="en-US"/>
           </a:p>
@@ -2646,6 +2665,7 @@
         <a:solidFill>
           <a:schemeClr val="tx2"/>
         </a:solidFill>
+        <a:effectLst/>
       </p:bgPr>
     </p:bg>
     <p:spTree>
@@ -2665,9 +2685,11 @@
       <p:sp>
         <p:nvSpPr>
           <p:cNvPr id="2" name="Text 0"/>
-          <p:cNvSpPr/>
+          <p:cNvSpPr>
+            <a:spLocks noGrp="1"/>
+          </p:cNvSpPr>
           <p:nvPr>
-            <p:ph idx="100" type="title" hasCustomPrompt="1"/>
+            <p:ph type="title" idx="100" hasCustomPrompt="1"/>
           </p:nvPr>
         </p:nvSpPr>
         <p:spPr>
@@ -2684,7 +2706,7 @@
         <p:txBody>
           <a:bodyPr wrap="square" rtlCol="0"/>
           <a:lstStyle>
-            <a:lvl1pPr algn="l" indent="0" marL="0">
+            <a:lvl1pPr marL="0" indent="0" algn="l">
               <a:buNone/>
               <a:defRPr lang="en-US" sz="4200" b="1" dirty="0">
                 <a:solidFill>
@@ -2697,7 +2719,7 @@
             </a:lvl1pPr>
           </a:lstStyle>
           <a:p>
-            <a:pPr algn="l" indent="0" marL="0">
+            <a:pPr marL="0" indent="0" algn="l">
               <a:buNone/>
             </a:pPr>
             <a:endParaRPr lang="en-US" sz="4200" dirty="0"/>
@@ -2707,9 +2729,11 @@
       <p:sp>
         <p:nvSpPr>
           <p:cNvPr id="3" name="Text 0"/>
-          <p:cNvSpPr/>
+          <p:cNvSpPr>
+            <a:spLocks noGrp="1"/>
+          </p:cNvSpPr>
           <p:nvPr>
-            <p:ph idx="101" type="body" hasCustomPrompt="1"/>
+            <p:ph type="body" idx="101" hasCustomPrompt="1"/>
           </p:nvPr>
         </p:nvSpPr>
         <p:spPr>
@@ -2726,7 +2750,7 @@
         <p:txBody>
           <a:bodyPr wrap="square" rtlCol="0"/>
           <a:lstStyle>
-            <a:lvl1pPr indent="0" marL="0">
+            <a:lvl1pPr marL="0" indent="0">
               <a:buNone/>
               <a:defRPr lang="en-US" sz="1800" dirty="0">
                 <a:solidFill>
@@ -2736,7 +2760,7 @@
             </a:lvl1pPr>
           </a:lstStyle>
           <a:p>
-            <a:pPr indent="0" marL="0">
+            <a:pPr marL="0" indent="0">
               <a:buNone/>
             </a:pPr>
             <a:endParaRPr lang="en-US" sz="1800" dirty="0"/>
@@ -2759,6 +2783,7 @@
         <a:solidFill>
           <a:schemeClr val="tx2"/>
         </a:solidFill>
+        <a:effectLst/>
       </p:bgPr>
     </p:bg>
     <p:spTree>
@@ -2778,9 +2803,11 @@
       <p:sp>
         <p:nvSpPr>
           <p:cNvPr id="2" name="Text 0"/>
-          <p:cNvSpPr/>
+          <p:cNvSpPr>
+            <a:spLocks noGrp="1"/>
+          </p:cNvSpPr>
           <p:nvPr>
-            <p:ph idx="100" type="title" hasCustomPrompt="1"/>
+            <p:ph type="title" idx="100" hasCustomPrompt="1"/>
           </p:nvPr>
         </p:nvSpPr>
         <p:spPr>
@@ -2797,7 +2824,7 @@
         <p:txBody>
           <a:bodyPr wrap="square" rtlCol="0"/>
           <a:lstStyle>
-            <a:lvl1pPr algn="l" indent="0" marL="0">
+            <a:lvl1pPr marL="0" indent="0" algn="l">
               <a:buNone/>
               <a:defRPr lang="en-US" sz="4000" b="1" dirty="0">
                 <a:solidFill>
@@ -2810,7 +2837,7 @@
             </a:lvl1pPr>
           </a:lstStyle>
           <a:p>
-            <a:pPr algn="l" indent="0" marL="0">
+            <a:pPr marL="0" indent="0" algn="l">
               <a:buNone/>
             </a:pPr>
             <a:endParaRPr lang="en-US" sz="4000" dirty="0"/>
@@ -2820,9 +2847,11 @@
       <p:sp>
         <p:nvSpPr>
           <p:cNvPr id="3" name="Text 0"/>
-          <p:cNvSpPr/>
+          <p:cNvSpPr>
+            <a:spLocks noGrp="1"/>
+          </p:cNvSpPr>
           <p:nvPr>
-            <p:ph idx="101" type="body" hasCustomPrompt="1"/>
+            <p:ph type="body" idx="101" hasCustomPrompt="1"/>
           </p:nvPr>
         </p:nvSpPr>
         <p:spPr>
@@ -2839,7 +2868,7 @@
         <p:txBody>
           <a:bodyPr wrap="square" rtlCol="0"/>
           <a:lstStyle>
-            <a:lvl1pPr indent="0" marL="0">
+            <a:lvl1pPr marL="0" indent="0">
               <a:buNone/>
               <a:defRPr lang="en-US" sz="2000" dirty="0">
                 <a:solidFill>
@@ -2849,7 +2878,7 @@
             </a:lvl1pPr>
           </a:lstStyle>
           <a:p>
-            <a:pPr indent="0" marL="0">
+            <a:pPr marL="0" indent="0">
               <a:buNone/>
             </a:pPr>
             <a:endParaRPr lang="en-US" sz="2000" dirty="0"/>
@@ -2876,7 +2905,7 @@
           </a:prstGeom>
           <a:extLst>
             <a:ext uri="{C572A759-6A51-4108-AA02-DFA0A04FC94B}">
-              <ma14:wrappingTextBoxFlag xmlns:ma14="http://schemas.microsoft.com/office/mac/drawingml/2011/main" val="0"/>
+              <ma14:wrappingTextBoxFlag xmlns:ma14="http://schemas.microsoft.com/office/mac/drawingml/2011/main" xmlns="" val="0"/>
             </a:ext>
           </a:extLst>
         </p:spPr>
@@ -2894,8 +2923,8 @@
           <a:p>
             <a:pPr algn="r"/>
             <a:fld id="{F7021451-1387-4CA6-816F-3879F97B5CBC}" type="slidenum">
-              <a:rPr b="0" lang="en-US"/>
-              <a:t>1003</a:t>
+              <a:rPr lang="en-US" b="0"/>
+              <a:t>‹#›</a:t>
             </a:fld>
             <a:endParaRPr lang="en-US"/>
           </a:p>
@@ -2917,6 +2946,7 @@
         <a:solidFill>
           <a:schemeClr val="bg1"/>
         </a:solidFill>
+        <a:effectLst/>
       </p:bgPr>
     </p:bg>
     <p:spTree>
@@ -2936,9 +2966,11 @@
       <p:sp>
         <p:nvSpPr>
           <p:cNvPr id="2" name="Text 0"/>
-          <p:cNvSpPr/>
+          <p:cNvSpPr>
+            <a:spLocks noGrp="1"/>
+          </p:cNvSpPr>
           <p:nvPr>
-            <p:ph idx="100" type="title" hasCustomPrompt="1"/>
+            <p:ph type="title" idx="100" hasCustomPrompt="1"/>
           </p:nvPr>
         </p:nvSpPr>
         <p:spPr>
@@ -2955,7 +2987,7 @@
         <p:txBody>
           <a:bodyPr wrap="square" rtlCol="0"/>
           <a:lstStyle>
-            <a:lvl1pPr algn="l" indent="0" marL="0">
+            <a:lvl1pPr marL="0" indent="0" algn="l">
               <a:buNone/>
               <a:defRPr lang="en-US" sz="3400" b="1" dirty="0">
                 <a:solidFill>
@@ -2968,7 +3000,7 @@
             </a:lvl1pPr>
           </a:lstStyle>
           <a:p>
-            <a:pPr algn="l" indent="0" marL="0">
+            <a:pPr marL="0" indent="0" algn="l">
               <a:buNone/>
             </a:pPr>
             <a:endParaRPr lang="en-US" sz="3400" dirty="0"/>
@@ -2996,7 +3028,7 @@
           <a:bodyPr wrap="square" lIns="0" tIns="0" rIns="0" bIns="0" rtlCol="0" anchor="ctr"/>
           <a:lstStyle/>
           <a:p>
-            <a:pPr indent="0" marL="0">
+            <a:pPr marL="0" indent="0">
               <a:buNone/>
             </a:pPr>
             <a:r>
@@ -3031,7 +3063,7 @@
           </a:prstGeom>
           <a:extLst>
             <a:ext uri="{C572A759-6A51-4108-AA02-DFA0A04FC94B}">
-              <ma14:wrappingTextBoxFlag xmlns:ma14="http://schemas.microsoft.com/office/mac/drawingml/2011/main" val="0"/>
+              <ma14:wrappingTextBoxFlag xmlns:ma14="http://schemas.microsoft.com/office/mac/drawingml/2011/main" xmlns="" val="0"/>
             </a:ext>
           </a:extLst>
         </p:spPr>
@@ -3049,8 +3081,8 @@
           <a:p>
             <a:pPr algn="r"/>
             <a:fld id="{F7021451-1387-4CA6-816F-3879F97B5CBC}" type="slidenum">
-              <a:rPr b="0" lang="en-US"/>
-              <a:t>1004</a:t>
+              <a:rPr lang="en-US" b="0"/>
+              <a:t>‹#›</a:t>
             </a:fld>
             <a:endParaRPr lang="en-US"/>
           </a:p>
@@ -3067,6 +3099,11 @@
 <file path=ppt/slideMasters/slideMaster1.xml><?xml version="1.0" encoding="utf-8"?>
 <p:sldMaster xmlns:a="http://schemas.openxmlformats.org/drawingml/2006/main" xmlns:r="http://schemas.openxmlformats.org/officeDocument/2006/relationships" xmlns:p="http://schemas.openxmlformats.org/presentationml/2006/main">
   <p:cSld>
+    <p:bg>
+      <p:bgRef idx="1001">
+        <a:schemeClr val="bg1"/>
+      </p:bgRef>
+    </p:bg>
     <p:spTree>
       <p:nvGrpSpPr>
         <p:cNvPr id="1" name=""/>
@@ -3101,7 +3138,7 @@
           </a:prstGeom>
           <a:extLst>
             <a:ext uri="{C572A759-6A51-4108-AA02-DFA0A04FC94B}">
-              <ma14:wrappingTextBoxFlag xmlns:ma14="http://schemas.microsoft.com/office/mac/drawingml/2011/main" val="0"/>
+              <ma14:wrappingTextBoxFlag xmlns:ma14="http://schemas.microsoft.com/office/mac/drawingml/2011/main" xmlns="" val="0"/>
             </a:ext>
           </a:extLst>
         </p:spPr>
@@ -3119,8 +3156,8 @@
           <a:p>
             <a:pPr algn="r"/>
             <a:fld id="{F7021451-1387-4CA6-816F-3879F97B5CBC}" type="slidenum">
-              <a:rPr b="0" lang="en-US"/>
-              <a:t>null</a:t>
+              <a:rPr lang="en-US" b="0"/>
+              <a:t>‹#›</a:t>
             </a:fld>
             <a:endParaRPr lang="en-US"/>
           </a:p>
@@ -3409,9 +3446,11 @@
       <p:sp>
         <p:nvSpPr>
           <p:cNvPr id="2" name="Text 0"/>
-          <p:cNvSpPr/>
+          <p:cNvSpPr>
+            <a:spLocks noGrp="1"/>
+          </p:cNvSpPr>
           <p:nvPr>
-            <p:ph idx="100" type="title" hasCustomPrompt="1"/>
+            <p:ph type="title" idx="100" hasCustomPrompt="1"/>
           </p:nvPr>
         </p:nvSpPr>
         <p:spPr>
@@ -3429,7 +3468,7 @@
           <a:bodyPr wrap="square" lIns="0" tIns="0" rIns="0" bIns="0" rtlCol="0" anchor="b"/>
           <a:lstStyle/>
           <a:p>
-            <a:pPr algn="l" indent="0" marL="0">
+            <a:pPr marL="0" indent="0" algn="l">
               <a:buNone/>
             </a:pPr>
             <a:r>
@@ -3450,9 +3489,11 @@
       <p:sp>
         <p:nvSpPr>
           <p:cNvPr id="3" name="Text 0"/>
-          <p:cNvSpPr/>
+          <p:cNvSpPr>
+            <a:spLocks noGrp="1"/>
+          </p:cNvSpPr>
           <p:nvPr>
-            <p:ph idx="101" type="body" hasCustomPrompt="1"/>
+            <p:ph type="body" idx="101" hasCustomPrompt="1"/>
           </p:nvPr>
         </p:nvSpPr>
         <p:spPr>
@@ -3470,7 +3511,7 @@
           <a:bodyPr wrap="square" lIns="0" tIns="0" rIns="0" bIns="0" rtlCol="0" anchor="t"/>
           <a:lstStyle/>
           <a:p>
-            <a:pPr indent="0" marL="0">
+            <a:pPr marL="0" indent="0">
               <a:buNone/>
             </a:pPr>
             <a:r>
@@ -3484,7 +3525,7 @@
             <a:endParaRPr lang="en-US" sz="1800" dirty="0"/>
           </a:p>
           <a:p>
-            <a:pPr indent="0" marL="0">
+            <a:pPr marL="0" indent="0">
               <a:buNone/>
             </a:pPr>
             <a:r>
@@ -3527,9 +3568,11 @@
       <p:sp>
         <p:nvSpPr>
           <p:cNvPr id="2" name="Text 0"/>
-          <p:cNvSpPr/>
+          <p:cNvSpPr>
+            <a:spLocks noGrp="1"/>
+          </p:cNvSpPr>
           <p:nvPr>
-            <p:ph idx="100" type="title" hasCustomPrompt="1"/>
+            <p:ph type="title" idx="100" hasCustomPrompt="1"/>
           </p:nvPr>
         </p:nvSpPr>
         <p:spPr>
@@ -3547,7 +3590,7 @@
           <a:bodyPr wrap="square" lIns="0" tIns="0" rIns="0" bIns="0" rtlCol="0" anchor="b"/>
           <a:lstStyle/>
           <a:p>
-            <a:pPr algn="l" indent="0" marL="0">
+            <a:pPr marL="0" indent="0" algn="l">
               <a:buNone/>
             </a:pPr>
             <a:r>
@@ -3585,7 +3628,7 @@
           </a:prstGeom>
           <a:extLst>
             <a:ext uri="{C572A759-6A51-4108-AA02-DFA0A04FC94B}">
-              <ma14:wrappingTextBoxFlag xmlns:ma14="http://schemas.microsoft.com/office/mac/drawingml/2011/main" val="0"/>
+              <ma14:wrappingTextBoxFlag xmlns:ma14="http://schemas.microsoft.com/office/mac/drawingml/2011/main" xmlns="" val="0"/>
             </a:ext>
           </a:extLst>
         </p:spPr>
@@ -3603,7 +3646,7 @@
           <a:p>
             <a:pPr algn="r"/>
             <a:fld id="{F7021451-1387-4CA6-816F-3879F97B5CBC}" type="slidenum">
-              <a:rPr b="0" lang="en-US"/>
+              <a:rPr lang="en-US" b="0"/>
               <a:t>10</a:t>
             </a:fld>
             <a:endParaRPr lang="en-US"/>
@@ -3638,9 +3681,11 @@
       <p:sp>
         <p:nvSpPr>
           <p:cNvPr id="2" name="Text 0"/>
-          <p:cNvSpPr/>
+          <p:cNvSpPr>
+            <a:spLocks noGrp="1"/>
+          </p:cNvSpPr>
           <p:nvPr>
-            <p:ph idx="100" type="title" hasCustomPrompt="1"/>
+            <p:ph type="title" idx="100" hasCustomPrompt="1"/>
           </p:nvPr>
         </p:nvSpPr>
         <p:spPr>
@@ -3658,7 +3703,7 @@
           <a:bodyPr wrap="square" lIns="0" tIns="0" rIns="0" bIns="0" rtlCol="0" anchor="ctr"/>
           <a:lstStyle/>
           <a:p>
-            <a:pPr algn="l" indent="0" marL="0">
+            <a:pPr marL="0" indent="0" algn="l">
               <a:buNone/>
             </a:pPr>
             <a:r>
@@ -3692,20 +3737,62 @@
         </p:nvGraphicFramePr>
         <p:xfrm>
           <a:off x="548640" y="1371600"/>
-          <a:ext cx="11094415" cy="914400"/>
+          <a:ext cx="11091672" cy="2468880"/>
         </p:xfrm>
         <a:graphic>
           <a:graphicData uri="http://schemas.openxmlformats.org/drawingml/2006/table">
             <a:tbl>
               <a:tblPr/>
               <a:tblGrid>
-                <a:gridCol w="3044952"/>
-                <a:gridCol w="1325880"/>
-                <a:gridCol w="1325880"/>
-                <a:gridCol w="1325880"/>
-                <a:gridCol w="1325880"/>
-                <a:gridCol w="1325880"/>
-                <a:gridCol w="1417320"/>
+                <a:gridCol w="3044952">
+                  <a:extLst>
+                    <a:ext uri="{9D8B030D-6E8A-4147-A177-3AD203B41FA5}">
+                      <a16:colId xmlns:a16="http://schemas.microsoft.com/office/drawing/2014/main" val="20000"/>
+                    </a:ext>
+                  </a:extLst>
+                </a:gridCol>
+                <a:gridCol w="1325880">
+                  <a:extLst>
+                    <a:ext uri="{9D8B030D-6E8A-4147-A177-3AD203B41FA5}">
+                      <a16:colId xmlns:a16="http://schemas.microsoft.com/office/drawing/2014/main" val="20001"/>
+                    </a:ext>
+                  </a:extLst>
+                </a:gridCol>
+                <a:gridCol w="1325880">
+                  <a:extLst>
+                    <a:ext uri="{9D8B030D-6E8A-4147-A177-3AD203B41FA5}">
+                      <a16:colId xmlns:a16="http://schemas.microsoft.com/office/drawing/2014/main" val="20002"/>
+                    </a:ext>
+                  </a:extLst>
+                </a:gridCol>
+                <a:gridCol w="1325880">
+                  <a:extLst>
+                    <a:ext uri="{9D8B030D-6E8A-4147-A177-3AD203B41FA5}">
+                      <a16:colId xmlns:a16="http://schemas.microsoft.com/office/drawing/2014/main" val="20003"/>
+                    </a:ext>
+                  </a:extLst>
+                </a:gridCol>
+                <a:gridCol w="1325880">
+                  <a:extLst>
+                    <a:ext uri="{9D8B030D-6E8A-4147-A177-3AD203B41FA5}">
+                      <a16:colId xmlns:a16="http://schemas.microsoft.com/office/drawing/2014/main" val="20004"/>
+                    </a:ext>
+                  </a:extLst>
+                </a:gridCol>
+                <a:gridCol w="1325880">
+                  <a:extLst>
+                    <a:ext uri="{9D8B030D-6E8A-4147-A177-3AD203B41FA5}">
+                      <a16:colId xmlns:a16="http://schemas.microsoft.com/office/drawing/2014/main" val="20005"/>
+                    </a:ext>
+                  </a:extLst>
+                </a:gridCol>
+                <a:gridCol w="1417320">
+                  <a:extLst>
+                    <a:ext uri="{9D8B030D-6E8A-4147-A177-3AD203B41FA5}">
+                      <a16:colId xmlns:a16="http://schemas.microsoft.com/office/drawing/2014/main" val="20006"/>
+                    </a:ext>
+                  </a:extLst>
+                </a:gridCol>
               </a:tblGrid>
               <a:tr h="411480">
                 <a:tc>
@@ -3713,7 +3800,7 @@
                     <a:bodyPr/>
                     <a:lstStyle/>
                     <a:p>
-                      <a:pPr algn="l" indent="0" marL="0">
+                      <a:pPr marL="0" indent="0" algn="l">
                         <a:buNone/>
                       </a:pPr>
                       <a:r>
@@ -3727,7 +3814,7 @@
                       <a:endParaRPr lang="en-US" sz="1400" dirty="0"/>
                     </a:p>
                   </a:txBody>
-                  <a:tcPr marL="91440" marR="91440" marT="45720" marB="45720" anchor="ctr">
+                  <a:tcPr anchor="ctr">
                     <a:lnL w="6350" cap="flat" cmpd="sng" algn="ctr">
                       <a:solidFill>
                         <a:srgbClr val="DCE5E3"/>
@@ -3774,7 +3861,7 @@
                     <a:bodyPr/>
                     <a:lstStyle/>
                     <a:p>
-                      <a:pPr algn="r" indent="0" marL="0">
+                      <a:pPr marL="0" indent="0" algn="r">
                         <a:buNone/>
                       </a:pPr>
                       <a:r>
@@ -3788,7 +3875,7 @@
                       <a:endParaRPr lang="en-US" sz="1400" dirty="0"/>
                     </a:p>
                   </a:txBody>
-                  <a:tcPr marL="91440" marR="91440" marT="45720" marB="45720" anchor="ctr">
+                  <a:tcPr anchor="ctr">
                     <a:lnL w="6350" cap="flat" cmpd="sng" algn="ctr">
                       <a:solidFill>
                         <a:srgbClr val="DCE5E3"/>
@@ -3835,7 +3922,7 @@
                     <a:bodyPr/>
                     <a:lstStyle/>
                     <a:p>
-                      <a:pPr algn="r" indent="0" marL="0">
+                      <a:pPr marL="0" indent="0" algn="r">
                         <a:buNone/>
                       </a:pPr>
                       <a:r>
@@ -3849,7 +3936,7 @@
                       <a:endParaRPr lang="en-US" sz="1400" dirty="0"/>
                     </a:p>
                   </a:txBody>
-                  <a:tcPr marL="91440" marR="91440" marT="45720" marB="45720" anchor="ctr">
+                  <a:tcPr anchor="ctr">
                     <a:lnL w="6350" cap="flat" cmpd="sng" algn="ctr">
                       <a:solidFill>
                         <a:srgbClr val="DCE5E3"/>
@@ -3896,7 +3983,7 @@
                     <a:bodyPr/>
                     <a:lstStyle/>
                     <a:p>
-                      <a:pPr algn="r" indent="0" marL="0">
+                      <a:pPr marL="0" indent="0" algn="r">
                         <a:buNone/>
                       </a:pPr>
                       <a:r>
@@ -3910,7 +3997,7 @@
                       <a:endParaRPr lang="en-US" sz="1400" dirty="0"/>
                     </a:p>
                   </a:txBody>
-                  <a:tcPr marL="91440" marR="91440" marT="45720" marB="45720" anchor="ctr">
+                  <a:tcPr anchor="ctr">
                     <a:lnL w="6350" cap="flat" cmpd="sng" algn="ctr">
                       <a:solidFill>
                         <a:srgbClr val="DCE5E3"/>
@@ -3957,7 +4044,7 @@
                     <a:bodyPr/>
                     <a:lstStyle/>
                     <a:p>
-                      <a:pPr algn="r" indent="0" marL="0">
+                      <a:pPr marL="0" indent="0" algn="r">
                         <a:buNone/>
                       </a:pPr>
                       <a:r>
@@ -3971,7 +4058,7 @@
                       <a:endParaRPr lang="en-US" sz="1400" dirty="0"/>
                     </a:p>
                   </a:txBody>
-                  <a:tcPr marL="91440" marR="91440" marT="45720" marB="45720" anchor="ctr">
+                  <a:tcPr anchor="ctr">
                     <a:lnL w="6350" cap="flat" cmpd="sng" algn="ctr">
                       <a:solidFill>
                         <a:srgbClr val="DCE5E3"/>
@@ -4018,7 +4105,7 @@
                     <a:bodyPr/>
                     <a:lstStyle/>
                     <a:p>
-                      <a:pPr algn="r" indent="0" marL="0">
+                      <a:pPr marL="0" indent="0" algn="r">
                         <a:buNone/>
                       </a:pPr>
                       <a:r>
@@ -4032,7 +4119,7 @@
                       <a:endParaRPr lang="en-US" sz="1400" dirty="0"/>
                     </a:p>
                   </a:txBody>
-                  <a:tcPr marL="91440" marR="91440" marT="45720" marB="45720" anchor="ctr">
+                  <a:tcPr anchor="ctr">
                     <a:lnL w="6350" cap="flat" cmpd="sng" algn="ctr">
                       <a:solidFill>
                         <a:srgbClr val="DCE5E3"/>
@@ -4079,7 +4166,7 @@
                     <a:bodyPr/>
                     <a:lstStyle/>
                     <a:p>
-                      <a:pPr algn="r" indent="0" marL="0">
+                      <a:pPr marL="0" indent="0" algn="r">
                         <a:buNone/>
                       </a:pPr>
                       <a:r>
@@ -4093,7 +4180,7 @@
                       <a:endParaRPr lang="en-US" sz="1400" dirty="0"/>
                     </a:p>
                   </a:txBody>
-                  <a:tcPr marL="91440" marR="91440" marT="45720" marB="45720" anchor="ctr">
+                  <a:tcPr anchor="ctr">
                     <a:lnL w="6350" cap="flat" cmpd="sng" algn="ctr">
                       <a:solidFill>
                         <a:srgbClr val="DCE5E3"/>
@@ -4135,6 +4222,11 @@
                     </a:solidFill>
                   </a:tcPr>
                 </a:tc>
+                <a:extLst>
+                  <a:ext uri="{0D108BD9-81ED-4DB2-BD59-A6C34878D82A}">
+                    <a16:rowId xmlns:a16="http://schemas.microsoft.com/office/drawing/2014/main" val="10000"/>
+                  </a:ext>
+                </a:extLst>
               </a:tr>
               <a:tr h="411480">
                 <a:tc>
@@ -4142,7 +4234,7 @@
                     <a:bodyPr/>
                     <a:lstStyle/>
                     <a:p>
-                      <a:pPr algn="l" indent="0" marL="0">
+                      <a:pPr marL="0" indent="0" algn="l">
                         <a:buNone/>
                       </a:pPr>
                       <a:r>
@@ -4156,7 +4248,7 @@
                       <a:endParaRPr lang="en-US" sz="1400" dirty="0"/>
                     </a:p>
                   </a:txBody>
-                  <a:tcPr marL="91440" marR="91440" marT="45720" marB="45720" anchor="ctr">
+                  <a:tcPr anchor="ctr">
                     <a:lnL w="6350" cap="flat" cmpd="sng" algn="ctr">
                       <a:solidFill>
                         <a:srgbClr val="DCE5E3"/>
@@ -4203,7 +4295,7 @@
                     <a:bodyPr/>
                     <a:lstStyle/>
                     <a:p>
-                      <a:pPr algn="r" indent="0" marL="0">
+                      <a:pPr marL="0" indent="0" algn="r">
                         <a:buNone/>
                       </a:pPr>
                       <a:r>
@@ -4217,7 +4309,7 @@
                       <a:endParaRPr lang="en-US" sz="1400" dirty="0"/>
                     </a:p>
                   </a:txBody>
-                  <a:tcPr marL="91440" marR="91440" marT="45720" marB="45720" anchor="ctr">
+                  <a:tcPr anchor="ctr">
                     <a:lnL w="6350" cap="flat" cmpd="sng" algn="ctr">
                       <a:solidFill>
                         <a:srgbClr val="DCE5E3"/>
@@ -4264,7 +4356,7 @@
                     <a:bodyPr/>
                     <a:lstStyle/>
                     <a:p>
-                      <a:pPr algn="r" indent="0" marL="0">
+                      <a:pPr marL="0" indent="0" algn="r">
                         <a:buNone/>
                       </a:pPr>
                       <a:r>
@@ -4278,7 +4370,7 @@
                       <a:endParaRPr lang="en-US" sz="1400" dirty="0"/>
                     </a:p>
                   </a:txBody>
-                  <a:tcPr marL="91440" marR="91440" marT="45720" marB="45720" anchor="ctr">
+                  <a:tcPr anchor="ctr">
                     <a:lnL w="6350" cap="flat" cmpd="sng" algn="ctr">
                       <a:solidFill>
                         <a:srgbClr val="DCE5E3"/>
@@ -4325,7 +4417,7 @@
                     <a:bodyPr/>
                     <a:lstStyle/>
                     <a:p>
-                      <a:pPr algn="r" indent="0" marL="0">
+                      <a:pPr marL="0" indent="0" algn="r">
                         <a:buNone/>
                       </a:pPr>
                       <a:r>
@@ -4339,7 +4431,7 @@
                       <a:endParaRPr lang="en-US" sz="1400" dirty="0"/>
                     </a:p>
                   </a:txBody>
-                  <a:tcPr marL="91440" marR="91440" marT="45720" marB="45720" anchor="ctr">
+                  <a:tcPr anchor="ctr">
                     <a:lnL w="6350" cap="flat" cmpd="sng" algn="ctr">
                       <a:solidFill>
                         <a:srgbClr val="DCE5E3"/>
@@ -4386,7 +4478,7 @@
                     <a:bodyPr/>
                     <a:lstStyle/>
                     <a:p>
-                      <a:pPr algn="r" indent="0" marL="0">
+                      <a:pPr marL="0" indent="0" algn="r">
                         <a:buNone/>
                       </a:pPr>
                       <a:r>
@@ -4400,7 +4492,7 @@
                       <a:endParaRPr lang="en-US" sz="1400" dirty="0"/>
                     </a:p>
                   </a:txBody>
-                  <a:tcPr marL="91440" marR="91440" marT="45720" marB="45720" anchor="ctr">
+                  <a:tcPr anchor="ctr">
                     <a:lnL w="6350" cap="flat" cmpd="sng" algn="ctr">
                       <a:solidFill>
                         <a:srgbClr val="DCE5E3"/>
@@ -4447,7 +4539,7 @@
                     <a:bodyPr/>
                     <a:lstStyle/>
                     <a:p>
-                      <a:pPr algn="r" indent="0" marL="0">
+                      <a:pPr marL="0" indent="0" algn="r">
                         <a:buNone/>
                       </a:pPr>
                       <a:r>
@@ -4461,7 +4553,7 @@
                       <a:endParaRPr lang="en-US" sz="1400" dirty="0"/>
                     </a:p>
                   </a:txBody>
-                  <a:tcPr marL="91440" marR="91440" marT="45720" marB="45720" anchor="ctr">
+                  <a:tcPr anchor="ctr">
                     <a:lnL w="6350" cap="flat" cmpd="sng" algn="ctr">
                       <a:solidFill>
                         <a:srgbClr val="DCE5E3"/>
@@ -4508,7 +4600,7 @@
                     <a:bodyPr/>
                     <a:lstStyle/>
                     <a:p>
-                      <a:pPr algn="r" indent="0" marL="0">
+                      <a:pPr marL="0" indent="0" algn="r">
                         <a:buNone/>
                       </a:pPr>
                       <a:r>
@@ -4522,7 +4614,7 @@
                       <a:endParaRPr lang="en-US" sz="1400" dirty="0"/>
                     </a:p>
                   </a:txBody>
-                  <a:tcPr marL="91440" marR="91440" marT="45720" marB="45720" anchor="ctr">
+                  <a:tcPr anchor="ctr">
                     <a:lnL w="6350" cap="flat" cmpd="sng" algn="ctr">
                       <a:solidFill>
                         <a:srgbClr val="DCE5E3"/>
@@ -4564,6 +4656,11 @@
                     </a:solidFill>
                   </a:tcPr>
                 </a:tc>
+                <a:extLst>
+                  <a:ext uri="{0D108BD9-81ED-4DB2-BD59-A6C34878D82A}">
+                    <a16:rowId xmlns:a16="http://schemas.microsoft.com/office/drawing/2014/main" val="10001"/>
+                  </a:ext>
+                </a:extLst>
               </a:tr>
               <a:tr h="411480">
                 <a:tc>
@@ -4571,7 +4668,7 @@
                     <a:bodyPr/>
                     <a:lstStyle/>
                     <a:p>
-                      <a:pPr algn="l" indent="0" marL="0">
+                      <a:pPr marL="0" indent="0" algn="l">
                         <a:buNone/>
                       </a:pPr>
                       <a:r>
@@ -4585,7 +4682,7 @@
                       <a:endParaRPr lang="en-US" sz="1400" dirty="0"/>
                     </a:p>
                   </a:txBody>
-                  <a:tcPr marL="91440" marR="91440" marT="45720" marB="45720" anchor="ctr">
+                  <a:tcPr anchor="ctr">
                     <a:lnL w="6350" cap="flat" cmpd="sng" algn="ctr">
                       <a:solidFill>
                         <a:srgbClr val="DCE5E3"/>
@@ -4632,7 +4729,7 @@
                     <a:bodyPr/>
                     <a:lstStyle/>
                     <a:p>
-                      <a:pPr algn="r" indent="0" marL="0">
+                      <a:pPr marL="0" indent="0" algn="r">
                         <a:buNone/>
                       </a:pPr>
                       <a:r>
@@ -4646,7 +4743,7 @@
                       <a:endParaRPr lang="en-US" sz="1400" dirty="0"/>
                     </a:p>
                   </a:txBody>
-                  <a:tcPr marL="91440" marR="91440" marT="45720" marB="45720" anchor="ctr">
+                  <a:tcPr anchor="ctr">
                     <a:lnL w="6350" cap="flat" cmpd="sng" algn="ctr">
                       <a:solidFill>
                         <a:srgbClr val="DCE5E3"/>
@@ -4693,7 +4790,7 @@
                     <a:bodyPr/>
                     <a:lstStyle/>
                     <a:p>
-                      <a:pPr algn="r" indent="0" marL="0">
+                      <a:pPr marL="0" indent="0" algn="r">
                         <a:buNone/>
                       </a:pPr>
                       <a:r>
@@ -4707,7 +4804,7 @@
                       <a:endParaRPr lang="en-US" sz="1400" dirty="0"/>
                     </a:p>
                   </a:txBody>
-                  <a:tcPr marL="91440" marR="91440" marT="45720" marB="45720" anchor="ctr">
+                  <a:tcPr anchor="ctr">
                     <a:lnL w="6350" cap="flat" cmpd="sng" algn="ctr">
                       <a:solidFill>
                         <a:srgbClr val="DCE5E3"/>
@@ -4754,7 +4851,7 @@
                     <a:bodyPr/>
                     <a:lstStyle/>
                     <a:p>
-                      <a:pPr algn="r" indent="0" marL="0">
+                      <a:pPr marL="0" indent="0" algn="r">
                         <a:buNone/>
                       </a:pPr>
                       <a:r>
@@ -4768,7 +4865,7 @@
                       <a:endParaRPr lang="en-US" sz="1400" dirty="0"/>
                     </a:p>
                   </a:txBody>
-                  <a:tcPr marL="91440" marR="91440" marT="45720" marB="45720" anchor="ctr">
+                  <a:tcPr anchor="ctr">
                     <a:lnL w="6350" cap="flat" cmpd="sng" algn="ctr">
                       <a:solidFill>
                         <a:srgbClr val="DCE5E3"/>
@@ -4815,7 +4912,7 @@
                     <a:bodyPr/>
                     <a:lstStyle/>
                     <a:p>
-                      <a:pPr algn="r" indent="0" marL="0">
+                      <a:pPr marL="0" indent="0" algn="r">
                         <a:buNone/>
                       </a:pPr>
                       <a:r>
@@ -4829,7 +4926,7 @@
                       <a:endParaRPr lang="en-US" sz="1400" dirty="0"/>
                     </a:p>
                   </a:txBody>
-                  <a:tcPr marL="91440" marR="91440" marT="45720" marB="45720" anchor="ctr">
+                  <a:tcPr anchor="ctr">
                     <a:lnL w="6350" cap="flat" cmpd="sng" algn="ctr">
                       <a:solidFill>
                         <a:srgbClr val="DCE5E3"/>
@@ -4876,7 +4973,7 @@
                     <a:bodyPr/>
                     <a:lstStyle/>
                     <a:p>
-                      <a:pPr algn="r" indent="0" marL="0">
+                      <a:pPr marL="0" indent="0" algn="r">
                         <a:buNone/>
                       </a:pPr>
                       <a:r>
@@ -4890,7 +4987,7 @@
                       <a:endParaRPr lang="en-US" sz="1400" dirty="0"/>
                     </a:p>
                   </a:txBody>
-                  <a:tcPr marL="91440" marR="91440" marT="45720" marB="45720" anchor="ctr">
+                  <a:tcPr anchor="ctr">
                     <a:lnL w="6350" cap="flat" cmpd="sng" algn="ctr">
                       <a:solidFill>
                         <a:srgbClr val="DCE5E3"/>
@@ -4937,7 +5034,7 @@
                     <a:bodyPr/>
                     <a:lstStyle/>
                     <a:p>
-                      <a:pPr algn="r" indent="0" marL="0">
+                      <a:pPr marL="0" indent="0" algn="r">
                         <a:buNone/>
                       </a:pPr>
                       <a:r>
@@ -4951,7 +5048,7 @@
                       <a:endParaRPr lang="en-US" sz="1400" dirty="0"/>
                     </a:p>
                   </a:txBody>
-                  <a:tcPr marL="91440" marR="91440" marT="45720" marB="45720" anchor="ctr">
+                  <a:tcPr anchor="ctr">
                     <a:lnL w="6350" cap="flat" cmpd="sng" algn="ctr">
                       <a:solidFill>
                         <a:srgbClr val="DCE5E3"/>
@@ -4993,6 +5090,11 @@
                     </a:solidFill>
                   </a:tcPr>
                 </a:tc>
+                <a:extLst>
+                  <a:ext uri="{0D108BD9-81ED-4DB2-BD59-A6C34878D82A}">
+                    <a16:rowId xmlns:a16="http://schemas.microsoft.com/office/drawing/2014/main" val="10002"/>
+                  </a:ext>
+                </a:extLst>
               </a:tr>
               <a:tr h="411480">
                 <a:tc>
@@ -5000,7 +5102,7 @@
                     <a:bodyPr/>
                     <a:lstStyle/>
                     <a:p>
-                      <a:pPr algn="l" indent="0" marL="0">
+                      <a:pPr marL="0" indent="0" algn="l">
                         <a:buNone/>
                       </a:pPr>
                       <a:r>
@@ -5014,7 +5116,7 @@
                       <a:endParaRPr lang="en-US" sz="1400" dirty="0"/>
                     </a:p>
                   </a:txBody>
-                  <a:tcPr marL="91440" marR="91440" marT="45720" marB="45720" anchor="ctr">
+                  <a:tcPr anchor="ctr">
                     <a:lnL w="6350" cap="flat" cmpd="sng" algn="ctr">
                       <a:solidFill>
                         <a:srgbClr val="DCE5E3"/>
@@ -5061,7 +5163,7 @@
                     <a:bodyPr/>
                     <a:lstStyle/>
                     <a:p>
-                      <a:pPr algn="r" indent="0" marL="0">
+                      <a:pPr marL="0" indent="0" algn="r">
                         <a:buNone/>
                       </a:pPr>
                       <a:r>
@@ -5075,7 +5177,7 @@
                       <a:endParaRPr lang="en-US" sz="1400" dirty="0"/>
                     </a:p>
                   </a:txBody>
-                  <a:tcPr marL="91440" marR="91440" marT="45720" marB="45720" anchor="ctr">
+                  <a:tcPr anchor="ctr">
                     <a:lnL w="6350" cap="flat" cmpd="sng" algn="ctr">
                       <a:solidFill>
                         <a:srgbClr val="DCE5E3"/>
@@ -5122,7 +5224,7 @@
                     <a:bodyPr/>
                     <a:lstStyle/>
                     <a:p>
-                      <a:pPr algn="r" indent="0" marL="0">
+                      <a:pPr marL="0" indent="0" algn="r">
                         <a:buNone/>
                       </a:pPr>
                       <a:r>
@@ -5136,7 +5238,7 @@
                       <a:endParaRPr lang="en-US" sz="1400" dirty="0"/>
                     </a:p>
                   </a:txBody>
-                  <a:tcPr marL="91440" marR="91440" marT="45720" marB="45720" anchor="ctr">
+                  <a:tcPr anchor="ctr">
                     <a:lnL w="6350" cap="flat" cmpd="sng" algn="ctr">
                       <a:solidFill>
                         <a:srgbClr val="DCE5E3"/>
@@ -5183,7 +5285,7 @@
                     <a:bodyPr/>
                     <a:lstStyle/>
                     <a:p>
-                      <a:pPr algn="r" indent="0" marL="0">
+                      <a:pPr marL="0" indent="0" algn="r">
                         <a:buNone/>
                       </a:pPr>
                       <a:r>
@@ -5197,7 +5299,7 @@
                       <a:endParaRPr lang="en-US" sz="1400" dirty="0"/>
                     </a:p>
                   </a:txBody>
-                  <a:tcPr marL="91440" marR="91440" marT="45720" marB="45720" anchor="ctr">
+                  <a:tcPr anchor="ctr">
                     <a:lnL w="6350" cap="flat" cmpd="sng" algn="ctr">
                       <a:solidFill>
                         <a:srgbClr val="DCE5E3"/>
@@ -5244,7 +5346,7 @@
                     <a:bodyPr/>
                     <a:lstStyle/>
                     <a:p>
-                      <a:pPr algn="r" indent="0" marL="0">
+                      <a:pPr marL="0" indent="0" algn="r">
                         <a:buNone/>
                       </a:pPr>
                       <a:r>
@@ -5258,7 +5360,7 @@
                       <a:endParaRPr lang="en-US" sz="1400" dirty="0"/>
                     </a:p>
                   </a:txBody>
-                  <a:tcPr marL="91440" marR="91440" marT="45720" marB="45720" anchor="ctr">
+                  <a:tcPr anchor="ctr">
                     <a:lnL w="6350" cap="flat" cmpd="sng" algn="ctr">
                       <a:solidFill>
                         <a:srgbClr val="DCE5E3"/>
@@ -5305,7 +5407,7 @@
                     <a:bodyPr/>
                     <a:lstStyle/>
                     <a:p>
-                      <a:pPr algn="r" indent="0" marL="0">
+                      <a:pPr marL="0" indent="0" algn="r">
                         <a:buNone/>
                       </a:pPr>
                       <a:r>
@@ -5319,7 +5421,7 @@
                       <a:endParaRPr lang="en-US" sz="1400" dirty="0"/>
                     </a:p>
                   </a:txBody>
-                  <a:tcPr marL="91440" marR="91440" marT="45720" marB="45720" anchor="ctr">
+                  <a:tcPr anchor="ctr">
                     <a:lnL w="6350" cap="flat" cmpd="sng" algn="ctr">
                       <a:solidFill>
                         <a:srgbClr val="DCE5E3"/>
@@ -5366,7 +5468,7 @@
                     <a:bodyPr/>
                     <a:lstStyle/>
                     <a:p>
-                      <a:pPr algn="r" indent="0" marL="0">
+                      <a:pPr marL="0" indent="0" algn="r">
                         <a:buNone/>
                       </a:pPr>
                       <a:r>
@@ -5380,7 +5482,7 @@
                       <a:endParaRPr lang="en-US" sz="1400" dirty="0"/>
                     </a:p>
                   </a:txBody>
-                  <a:tcPr marL="91440" marR="91440" marT="45720" marB="45720" anchor="ctr">
+                  <a:tcPr anchor="ctr">
                     <a:lnL w="6350" cap="flat" cmpd="sng" algn="ctr">
                       <a:solidFill>
                         <a:srgbClr val="DCE5E3"/>
@@ -5422,6 +5524,11 @@
                     </a:solidFill>
                   </a:tcPr>
                 </a:tc>
+                <a:extLst>
+                  <a:ext uri="{0D108BD9-81ED-4DB2-BD59-A6C34878D82A}">
+                    <a16:rowId xmlns:a16="http://schemas.microsoft.com/office/drawing/2014/main" val="10003"/>
+                  </a:ext>
+                </a:extLst>
               </a:tr>
               <a:tr h="411480">
                 <a:tc>
@@ -5429,7 +5536,7 @@
                     <a:bodyPr/>
                     <a:lstStyle/>
                     <a:p>
-                      <a:pPr algn="l" indent="0" marL="0">
+                      <a:pPr marL="0" indent="0" algn="l">
                         <a:buNone/>
                       </a:pPr>
                       <a:r>
@@ -5443,7 +5550,7 @@
                       <a:endParaRPr lang="en-US" sz="1400" dirty="0"/>
                     </a:p>
                   </a:txBody>
-                  <a:tcPr marL="91440" marR="91440" marT="45720" marB="45720" anchor="ctr">
+                  <a:tcPr anchor="ctr">
                     <a:lnL w="6350" cap="flat" cmpd="sng" algn="ctr">
                       <a:solidFill>
                         <a:srgbClr val="DCE5E3"/>
@@ -5490,7 +5597,7 @@
                     <a:bodyPr/>
                     <a:lstStyle/>
                     <a:p>
-                      <a:pPr algn="r" indent="0" marL="0">
+                      <a:pPr marL="0" indent="0" algn="r">
                         <a:buNone/>
                       </a:pPr>
                       <a:r>
@@ -5504,7 +5611,7 @@
                       <a:endParaRPr lang="en-US" sz="1400" dirty="0"/>
                     </a:p>
                   </a:txBody>
-                  <a:tcPr marL="91440" marR="91440" marT="45720" marB="45720" anchor="ctr">
+                  <a:tcPr anchor="ctr">
                     <a:lnL w="6350" cap="flat" cmpd="sng" algn="ctr">
                       <a:solidFill>
                         <a:srgbClr val="DCE5E3"/>
@@ -5551,7 +5658,7 @@
                     <a:bodyPr/>
                     <a:lstStyle/>
                     <a:p>
-                      <a:pPr algn="r" indent="0" marL="0">
+                      <a:pPr marL="0" indent="0" algn="r">
                         <a:buNone/>
                       </a:pPr>
                       <a:r>
@@ -5565,7 +5672,7 @@
                       <a:endParaRPr lang="en-US" sz="1400" dirty="0"/>
                     </a:p>
                   </a:txBody>
-                  <a:tcPr marL="91440" marR="91440" marT="45720" marB="45720" anchor="ctr">
+                  <a:tcPr anchor="ctr">
                     <a:lnL w="6350" cap="flat" cmpd="sng" algn="ctr">
                       <a:solidFill>
                         <a:srgbClr val="DCE5E3"/>
@@ -5612,7 +5719,7 @@
                     <a:bodyPr/>
                     <a:lstStyle/>
                     <a:p>
-                      <a:pPr algn="r" indent="0" marL="0">
+                      <a:pPr marL="0" indent="0" algn="r">
                         <a:buNone/>
                       </a:pPr>
                       <a:r>
@@ -5626,7 +5733,7 @@
                       <a:endParaRPr lang="en-US" sz="1400" dirty="0"/>
                     </a:p>
                   </a:txBody>
-                  <a:tcPr marL="91440" marR="91440" marT="45720" marB="45720" anchor="ctr">
+                  <a:tcPr anchor="ctr">
                     <a:lnL w="6350" cap="flat" cmpd="sng" algn="ctr">
                       <a:solidFill>
                         <a:srgbClr val="DCE5E3"/>
@@ -5673,7 +5780,7 @@
                     <a:bodyPr/>
                     <a:lstStyle/>
                     <a:p>
-                      <a:pPr algn="r" indent="0" marL="0">
+                      <a:pPr marL="0" indent="0" algn="r">
                         <a:buNone/>
                       </a:pPr>
                       <a:r>
@@ -5687,7 +5794,7 @@
                       <a:endParaRPr lang="en-US" sz="1400" dirty="0"/>
                     </a:p>
                   </a:txBody>
-                  <a:tcPr marL="91440" marR="91440" marT="45720" marB="45720" anchor="ctr">
+                  <a:tcPr anchor="ctr">
                     <a:lnL w="6350" cap="flat" cmpd="sng" algn="ctr">
                       <a:solidFill>
                         <a:srgbClr val="DCE5E3"/>
@@ -5734,7 +5841,7 @@
                     <a:bodyPr/>
                     <a:lstStyle/>
                     <a:p>
-                      <a:pPr algn="r" indent="0" marL="0">
+                      <a:pPr marL="0" indent="0" algn="r">
                         <a:buNone/>
                       </a:pPr>
                       <a:r>
@@ -5748,7 +5855,7 @@
                       <a:endParaRPr lang="en-US" sz="1400" dirty="0"/>
                     </a:p>
                   </a:txBody>
-                  <a:tcPr marL="91440" marR="91440" marT="45720" marB="45720" anchor="ctr">
+                  <a:tcPr anchor="ctr">
                     <a:lnL w="6350" cap="flat" cmpd="sng" algn="ctr">
                       <a:solidFill>
                         <a:srgbClr val="DCE5E3"/>
@@ -5795,7 +5902,7 @@
                     <a:bodyPr/>
                     <a:lstStyle/>
                     <a:p>
-                      <a:pPr algn="r" indent="0" marL="0">
+                      <a:pPr marL="0" indent="0" algn="r">
                         <a:buNone/>
                       </a:pPr>
                       <a:r>
@@ -5809,7 +5916,7 @@
                       <a:endParaRPr lang="en-US" sz="1400" dirty="0"/>
                     </a:p>
                   </a:txBody>
-                  <a:tcPr marL="91440" marR="91440" marT="45720" marB="45720" anchor="ctr">
+                  <a:tcPr anchor="ctr">
                     <a:lnL w="6350" cap="flat" cmpd="sng" algn="ctr">
                       <a:solidFill>
                         <a:srgbClr val="DCE5E3"/>
@@ -5851,6 +5958,11 @@
                     </a:solidFill>
                   </a:tcPr>
                 </a:tc>
+                <a:extLst>
+                  <a:ext uri="{0D108BD9-81ED-4DB2-BD59-A6C34878D82A}">
+                    <a16:rowId xmlns:a16="http://schemas.microsoft.com/office/drawing/2014/main" val="10004"/>
+                  </a:ext>
+                </a:extLst>
               </a:tr>
               <a:tr h="411480">
                 <a:tc>
@@ -5858,7 +5970,7 @@
                     <a:bodyPr/>
                     <a:lstStyle/>
                     <a:p>
-                      <a:pPr algn="l" indent="0" marL="0">
+                      <a:pPr marL="0" indent="0" algn="l">
                         <a:buNone/>
                       </a:pPr>
                       <a:r>
@@ -5872,7 +5984,7 @@
                       <a:endParaRPr lang="en-US" sz="1400" dirty="0"/>
                     </a:p>
                   </a:txBody>
-                  <a:tcPr marL="91440" marR="91440" marT="45720" marB="45720" anchor="ctr">
+                  <a:tcPr anchor="ctr">
                     <a:lnL w="6350" cap="flat" cmpd="sng" algn="ctr">
                       <a:solidFill>
                         <a:srgbClr val="DCE5E3"/>
@@ -5919,7 +6031,7 @@
                     <a:bodyPr/>
                     <a:lstStyle/>
                     <a:p>
-                      <a:pPr algn="r" indent="0" marL="0">
+                      <a:pPr marL="0" indent="0" algn="r">
                         <a:buNone/>
                       </a:pPr>
                       <a:r>
@@ -5933,7 +6045,7 @@
                       <a:endParaRPr lang="en-US" sz="1400" dirty="0"/>
                     </a:p>
                   </a:txBody>
-                  <a:tcPr marL="91440" marR="91440" marT="45720" marB="45720" anchor="ctr">
+                  <a:tcPr anchor="ctr">
                     <a:lnL w="6350" cap="flat" cmpd="sng" algn="ctr">
                       <a:solidFill>
                         <a:srgbClr val="DCE5E3"/>
@@ -5980,7 +6092,7 @@
                     <a:bodyPr/>
                     <a:lstStyle/>
                     <a:p>
-                      <a:pPr algn="r" indent="0" marL="0">
+                      <a:pPr marL="0" indent="0" algn="r">
                         <a:buNone/>
                       </a:pPr>
                       <a:r>
@@ -5994,7 +6106,7 @@
                       <a:endParaRPr lang="en-US" sz="1400" dirty="0"/>
                     </a:p>
                   </a:txBody>
-                  <a:tcPr marL="91440" marR="91440" marT="45720" marB="45720" anchor="ctr">
+                  <a:tcPr anchor="ctr">
                     <a:lnL w="6350" cap="flat" cmpd="sng" algn="ctr">
                       <a:solidFill>
                         <a:srgbClr val="DCE5E3"/>
@@ -6041,7 +6153,7 @@
                     <a:bodyPr/>
                     <a:lstStyle/>
                     <a:p>
-                      <a:pPr algn="r" indent="0" marL="0">
+                      <a:pPr marL="0" indent="0" algn="r">
                         <a:buNone/>
                       </a:pPr>
                       <a:r>
@@ -6055,7 +6167,7 @@
                       <a:endParaRPr lang="en-US" sz="1400" dirty="0"/>
                     </a:p>
                   </a:txBody>
-                  <a:tcPr marL="91440" marR="91440" marT="45720" marB="45720" anchor="ctr">
+                  <a:tcPr anchor="ctr">
                     <a:lnL w="6350" cap="flat" cmpd="sng" algn="ctr">
                       <a:solidFill>
                         <a:srgbClr val="DCE5E3"/>
@@ -6102,7 +6214,7 @@
                     <a:bodyPr/>
                     <a:lstStyle/>
                     <a:p>
-                      <a:pPr algn="r" indent="0" marL="0">
+                      <a:pPr marL="0" indent="0" algn="r">
                         <a:buNone/>
                       </a:pPr>
                       <a:r>
@@ -6116,7 +6228,7 @@
                       <a:endParaRPr lang="en-US" sz="1400" dirty="0"/>
                     </a:p>
                   </a:txBody>
-                  <a:tcPr marL="91440" marR="91440" marT="45720" marB="45720" anchor="ctr">
+                  <a:tcPr anchor="ctr">
                     <a:lnL w="6350" cap="flat" cmpd="sng" algn="ctr">
                       <a:solidFill>
                         <a:srgbClr val="DCE5E3"/>
@@ -6163,7 +6275,7 @@
                     <a:bodyPr/>
                     <a:lstStyle/>
                     <a:p>
-                      <a:pPr algn="r" indent="0" marL="0">
+                      <a:pPr marL="0" indent="0" algn="r">
                         <a:buNone/>
                       </a:pPr>
                       <a:r>
@@ -6177,7 +6289,7 @@
                       <a:endParaRPr lang="en-US" sz="1400" dirty="0"/>
                     </a:p>
                   </a:txBody>
-                  <a:tcPr marL="91440" marR="91440" marT="45720" marB="45720" anchor="ctr">
+                  <a:tcPr anchor="ctr">
                     <a:lnL w="6350" cap="flat" cmpd="sng" algn="ctr">
                       <a:solidFill>
                         <a:srgbClr val="DCE5E3"/>
@@ -6224,7 +6336,7 @@
                     <a:bodyPr/>
                     <a:lstStyle/>
                     <a:p>
-                      <a:pPr algn="r" indent="0" marL="0">
+                      <a:pPr marL="0" indent="0" algn="r">
                         <a:buNone/>
                       </a:pPr>
                       <a:r>
@@ -6238,7 +6350,7 @@
                       <a:endParaRPr lang="en-US" sz="1400" dirty="0"/>
                     </a:p>
                   </a:txBody>
-                  <a:tcPr marL="91440" marR="91440" marT="45720" marB="45720" anchor="ctr">
+                  <a:tcPr anchor="ctr">
                     <a:lnL w="6350" cap="flat" cmpd="sng" algn="ctr">
                       <a:solidFill>
                         <a:srgbClr val="DCE5E3"/>
@@ -6280,6 +6392,11 @@
                     </a:solidFill>
                   </a:tcPr>
                 </a:tc>
+                <a:extLst>
+                  <a:ext uri="{0D108BD9-81ED-4DB2-BD59-A6C34878D82A}">
+                    <a16:rowId xmlns:a16="http://schemas.microsoft.com/office/drawing/2014/main" val="10005"/>
+                  </a:ext>
+                </a:extLst>
               </a:tr>
             </a:tbl>
           </a:graphicData>
@@ -6306,7 +6423,7 @@
           <a:bodyPr wrap="square" lIns="0" tIns="0" rIns="0" bIns="0" rtlCol="0" anchor="b"/>
           <a:lstStyle/>
           <a:p>
-            <a:pPr indent="0" marL="0">
+            <a:pPr marL="0" indent="0">
               <a:buNone/>
             </a:pPr>
             <a:r>
@@ -6345,7 +6462,7 @@
           <a:bodyPr wrap="square" lIns="0" tIns="0" rIns="0" bIns="0" rtlCol="0" anchor="t"/>
           <a:lstStyle/>
           <a:p>
-            <a:pPr indent="0" marL="0">
+            <a:pPr marL="0" indent="0">
               <a:buNone/>
             </a:pPr>
             <a:r>
@@ -6381,7 +6498,7 @@
           <a:bodyPr wrap="square" lIns="0" tIns="0" rIns="0" bIns="0" rtlCol="0" anchor="b"/>
           <a:lstStyle/>
           <a:p>
-            <a:pPr indent="0" marL="0">
+            <a:pPr marL="0" indent="0">
               <a:buNone/>
             </a:pPr>
             <a:r>
@@ -6420,7 +6537,7 @@
           <a:bodyPr wrap="square" lIns="0" tIns="0" rIns="0" bIns="0" rtlCol="0" anchor="t"/>
           <a:lstStyle/>
           <a:p>
-            <a:pPr indent="0" marL="0">
+            <a:pPr marL="0" indent="0">
               <a:buNone/>
             </a:pPr>
             <a:r>
@@ -6437,7 +6554,7 @@
       </p:sp>
       <p:sp>
         <p:nvSpPr>
-          <p:cNvPr id="9" name="Text 6"/>
+          <p:cNvPr id="3" name="Text 6"/>
           <p:cNvSpPr txBox="1"/>
           <p:nvPr/>
         </p:nvSpPr>
@@ -6456,7 +6573,7 @@
           <a:bodyPr wrap="square" lIns="0" tIns="0" rIns="0" bIns="0" rtlCol="0" anchor="b"/>
           <a:lstStyle/>
           <a:p>
-            <a:pPr indent="0" marL="0">
+            <a:pPr marL="0" indent="0">
               <a:buNone/>
             </a:pPr>
             <a:r>
@@ -6495,7 +6612,7 @@
           <a:bodyPr wrap="square" lIns="0" tIns="0" rIns="0" bIns="0" rtlCol="0" anchor="t"/>
           <a:lstStyle/>
           <a:p>
-            <a:pPr indent="0" marL="0">
+            <a:pPr marL="0" indent="0">
               <a:buNone/>
             </a:pPr>
             <a:r>
@@ -6530,7 +6647,7 @@
           </a:prstGeom>
           <a:extLst>
             <a:ext uri="{C572A759-6A51-4108-AA02-DFA0A04FC94B}">
-              <ma14:wrappingTextBoxFlag xmlns:ma14="http://schemas.microsoft.com/office/mac/drawingml/2011/main" val="0"/>
+              <ma14:wrappingTextBoxFlag xmlns:ma14="http://schemas.microsoft.com/office/mac/drawingml/2011/main" xmlns="" val="0"/>
             </a:ext>
           </a:extLst>
         </p:spPr>
@@ -6548,7 +6665,7 @@
           <a:p>
             <a:pPr algn="r"/>
             <a:fld id="{F7021451-1387-4CA6-816F-3879F97B5CBC}" type="slidenum">
-              <a:rPr b="0" lang="en-US"/>
+              <a:rPr lang="en-US" b="0"/>
               <a:t>11</a:t>
             </a:fld>
             <a:endParaRPr lang="en-US"/>
@@ -6583,9 +6700,11 @@
       <p:sp>
         <p:nvSpPr>
           <p:cNvPr id="2" name="Text 0"/>
-          <p:cNvSpPr/>
+          <p:cNvSpPr>
+            <a:spLocks noGrp="1"/>
+          </p:cNvSpPr>
           <p:nvPr>
-            <p:ph idx="100" type="title" hasCustomPrompt="1"/>
+            <p:ph type="title" idx="100" hasCustomPrompt="1"/>
           </p:nvPr>
         </p:nvSpPr>
         <p:spPr>
@@ -6603,7 +6722,7 @@
           <a:bodyPr wrap="square" lIns="0" tIns="0" rIns="0" bIns="0" rtlCol="0" anchor="ctr"/>
           <a:lstStyle/>
           <a:p>
-            <a:pPr algn="l" indent="0" marL="0">
+            <a:pPr marL="0" indent="0" algn="l">
               <a:buNone/>
             </a:pPr>
             <a:r>
@@ -6642,7 +6761,7 @@
           <a:bodyPr wrap="square" lIns="0" tIns="0" rIns="0" bIns="0" rtlCol="0" anchor="b"/>
           <a:lstStyle/>
           <a:p>
-            <a:pPr indent="0" marL="0">
+            <a:pPr marL="0" indent="0">
               <a:buNone/>
             </a:pPr>
             <a:r>
@@ -6681,7 +6800,7 @@
           <a:bodyPr wrap="square" lIns="0" tIns="0" rIns="0" bIns="0" rtlCol="0" anchor="t"/>
           <a:lstStyle/>
           <a:p>
-            <a:pPr indent="0" marL="0">
+            <a:pPr marL="0" indent="0">
               <a:buNone/>
             </a:pPr>
             <a:r>
@@ -6717,7 +6836,7 @@
           <a:bodyPr wrap="square" lIns="0" tIns="0" rIns="0" bIns="0" rtlCol="0" anchor="b"/>
           <a:lstStyle/>
           <a:p>
-            <a:pPr indent="0" marL="0">
+            <a:pPr marL="0" indent="0">
               <a:buNone/>
             </a:pPr>
             <a:r>
@@ -6756,7 +6875,7 @@
           <a:bodyPr wrap="square" lIns="0" tIns="0" rIns="0" bIns="0" rtlCol="0" anchor="t"/>
           <a:lstStyle/>
           <a:p>
-            <a:pPr indent="0" marL="0">
+            <a:pPr marL="0" indent="0">
               <a:buNone/>
             </a:pPr>
             <a:r>
@@ -6792,7 +6911,7 @@
           <a:bodyPr wrap="square" lIns="0" tIns="0" rIns="0" bIns="0" rtlCol="0" anchor="b"/>
           <a:lstStyle/>
           <a:p>
-            <a:pPr indent="0" marL="0">
+            <a:pPr marL="0" indent="0">
               <a:buNone/>
             </a:pPr>
             <a:r>
@@ -6831,7 +6950,7 @@
           <a:bodyPr wrap="square" lIns="0" tIns="0" rIns="0" bIns="0" rtlCol="0" anchor="t"/>
           <a:lstStyle/>
           <a:p>
-            <a:pPr indent="0" marL="0">
+            <a:pPr marL="0" indent="0">
               <a:buNone/>
             </a:pPr>
             <a:r>
@@ -6872,7 +6991,7 @@
             <a:prstDash val="solid"/>
           </a:ln>
           <a:effectLst>
-            <a:outerShdw sx="100000" sy="100000" kx="0" ky="0" algn="bl" rotWithShape="0" blurRad="101600" dist="25400" dir="5400000">
+            <a:outerShdw blurRad="101600" dist="25400" dir="5400000" algn="bl" rotWithShape="0">
               <a:srgbClr val="16232E">
                 <a:alpha val="12000"/>
               </a:srgbClr>
@@ -6881,7 +7000,10 @@
         </p:spPr>
         <p:txBody>
           <a:bodyPr/>
-          <a:p/>
+          <a:lstStyle/>
+          <a:p>
+            <a:endParaRPr/>
+          </a:p>
         </p:txBody>
       </p:sp>
       <p:sp>
@@ -6905,19 +7027,22 @@
         </p:spPr>
         <p:txBody>
           <a:bodyPr/>
-          <a:p/>
+          <a:lstStyle/>
+          <a:p>
+            <a:endParaRPr/>
+          </a:p>
         </p:txBody>
       </p:sp>
       <p:pic>
         <p:nvPicPr>
-          <p:cNvPr id="11" name="icon-tag" descr="preencoded.png">    </p:cNvPr>
+          <p:cNvPr id="11" name="icon-tag" descr="preencoded.png"/>
           <p:cNvPicPr>
             <a:picLocks noChangeAspect="1"/>
           </p:cNvPicPr>
           <p:nvPr/>
         </p:nvPicPr>
         <p:blipFill>
-          <a:blip r:embed="rId1"/>
+          <a:blip r:embed="rId3"/>
           <a:stretch>
             <a:fillRect/>
           </a:stretch>
@@ -6953,7 +7078,7 @@
           <a:bodyPr wrap="square" lIns="0" tIns="0" rIns="0" bIns="0" rtlCol="0" anchor="t"/>
           <a:lstStyle/>
           <a:p>
-            <a:pPr indent="0" marL="0">
+            <a:pPr marL="0" indent="0">
               <a:buNone/>
             </a:pPr>
             <a:r>
@@ -6989,7 +7114,7 @@
           <a:bodyPr wrap="square" lIns="0" tIns="0" rIns="0" bIns="0" rtlCol="0" anchor="t"/>
           <a:lstStyle/>
           <a:p>
-            <a:pPr indent="0" marL="0">
+            <a:pPr marL="0" indent="0">
               <a:buNone/>
             </a:pPr>
             <a:r>
@@ -7025,7 +7150,7 @@
           <a:bodyPr wrap="square" lIns="0" tIns="0" rIns="0" bIns="0" rtlCol="0" anchor="t"/>
           <a:lstStyle/>
           <a:p>
-            <a:pPr algn="r" indent="0" marL="0">
+            <a:pPr marL="0" indent="0" algn="r">
               <a:buNone/>
             </a:pPr>
             <a:r>
@@ -7064,7 +7189,7 @@
           <a:bodyPr wrap="square" lIns="0" tIns="0" rIns="0" bIns="0" rtlCol="0" anchor="t"/>
           <a:lstStyle/>
           <a:p>
-            <a:pPr algn="r" indent="0" marL="0">
+            <a:pPr marL="0" indent="0" algn="r">
               <a:buNone/>
             </a:pPr>
             <a:r>
@@ -7100,7 +7225,7 @@
           <a:bodyPr wrap="square" lIns="0" tIns="0" rIns="0" bIns="0" rtlCol="0" anchor="t"/>
           <a:lstStyle/>
           <a:p>
-            <a:pPr indent="0" marL="0">
+            <a:pPr marL="0" indent="0">
               <a:buNone/>
             </a:pPr>
             <a:r>
@@ -7212,7 +7337,7 @@
           <a:bodyPr wrap="square" lIns="0" tIns="0" rIns="0" bIns="0" rtlCol="0" anchor="t"/>
           <a:lstStyle/>
           <a:p>
-            <a:pPr indent="0" marL="0">
+            <a:pPr marL="0" indent="0">
               <a:buNone/>
             </a:pPr>
             <a:r>
@@ -7324,7 +7449,7 @@
           <a:bodyPr wrap="square" lIns="0" tIns="0" rIns="0" bIns="0" rtlCol="0" anchor="t"/>
           <a:lstStyle/>
           <a:p>
-            <a:pPr indent="0" marL="0">
+            <a:pPr marL="0" indent="0">
               <a:buNone/>
             </a:pPr>
             <a:r>
@@ -7360,19 +7485,22 @@
         </p:spPr>
         <p:txBody>
           <a:bodyPr/>
-          <a:p/>
+          <a:lstStyle/>
+          <a:p>
+            <a:endParaRPr/>
+          </a:p>
         </p:txBody>
       </p:sp>
       <p:pic>
         <p:nvPicPr>
-          <p:cNvPr id="22" name="icon-warn" descr="preencoded.png">    </p:cNvPr>
+          <p:cNvPr id="22" name="icon-warn" descr="preencoded.png"/>
           <p:cNvPicPr>
             <a:picLocks noChangeAspect="1"/>
           </p:cNvPicPr>
           <p:nvPr/>
         </p:nvPicPr>
         <p:blipFill>
-          <a:blip r:embed="rId2"/>
+          <a:blip r:embed="rId4"/>
           <a:stretch>
             <a:fillRect/>
           </a:stretch>
@@ -7408,7 +7536,7 @@
           <a:bodyPr wrap="square" lIns="0" tIns="0" rIns="0" bIns="0" rtlCol="0" anchor="ctr"/>
           <a:lstStyle/>
           <a:p>
-            <a:pPr indent="0" marL="0">
+            <a:pPr marL="0" indent="0">
               <a:buNone/>
             </a:pPr>
             <a:r>
@@ -7443,7 +7571,7 @@
           </a:prstGeom>
           <a:extLst>
             <a:ext uri="{C572A759-6A51-4108-AA02-DFA0A04FC94B}">
-              <ma14:wrappingTextBoxFlag xmlns:ma14="http://schemas.microsoft.com/office/mac/drawingml/2011/main" val="0"/>
+              <ma14:wrappingTextBoxFlag xmlns:ma14="http://schemas.microsoft.com/office/mac/drawingml/2011/main" xmlns="" val="0"/>
             </a:ext>
           </a:extLst>
         </p:spPr>
@@ -7461,7 +7589,7 @@
           <a:p>
             <a:pPr algn="r"/>
             <a:fld id="{F7021451-1387-4CA6-816F-3879F97B5CBC}" type="slidenum">
-              <a:rPr b="0" lang="en-US"/>
+              <a:rPr lang="en-US" b="0"/>
               <a:t>12</a:t>
             </a:fld>
             <a:endParaRPr lang="en-US"/>
@@ -7489,12 +7617,15 @@
         </p:spPr>
         <p:txBody>
           <a:bodyPr/>
-          <a:p/>
+          <a:lstStyle/>
+          <a:p>
+            <a:endParaRPr/>
+          </a:p>
         </p:txBody>
       </p:sp>
       <p:pic>
         <p:nvPicPr>
-          <p:cNvPr id="27" name="icon-check" descr="preencoded.png">    </p:cNvPr>
+          <p:cNvPr id="27" name="icon-check" descr="preencoded.png"/>
           <p:cNvPicPr>
             <a:picLocks noChangeAspect="1"/>
           </p:cNvPicPr>
@@ -7537,7 +7668,7 @@
           <a:bodyPr wrap="square" lIns="0" tIns="0" rIns="0" bIns="0" rtlCol="0" anchor="ctr"/>
           <a:lstStyle/>
           <a:p>
-            <a:pPr indent="0" marL="0">
+            <a:pPr marL="0" indent="0">
               <a:buNone/>
             </a:pPr>
             <a:r>
@@ -7580,9 +7711,11 @@
       <p:sp>
         <p:nvSpPr>
           <p:cNvPr id="2" name="Text 0"/>
-          <p:cNvSpPr/>
+          <p:cNvSpPr>
+            <a:spLocks noGrp="1"/>
+          </p:cNvSpPr>
           <p:nvPr>
-            <p:ph idx="100" type="title" hasCustomPrompt="1"/>
+            <p:ph type="title" idx="100" hasCustomPrompt="1"/>
           </p:nvPr>
         </p:nvSpPr>
         <p:spPr>
@@ -7600,7 +7733,7 @@
           <a:bodyPr wrap="square" lIns="0" tIns="0" rIns="0" bIns="0" rtlCol="0" anchor="ctr"/>
           <a:lstStyle/>
           <a:p>
-            <a:pPr algn="l" indent="0" marL="0">
+            <a:pPr marL="0" indent="0" algn="l">
               <a:buNone/>
             </a:pPr>
             <a:r>
@@ -7620,7 +7753,7 @@
       </p:sp>
       <p:graphicFrame>
         <p:nvGraphicFramePr>
-          <p:cNvPr id="3" name="auc-chart-b" descr=""/>
+          <p:cNvPr id="3" name="auc-chart-b"/>
           <p:cNvGraphicFramePr/>
           <p:nvPr/>
         </p:nvGraphicFramePr>
@@ -7628,9 +7761,9 @@
           <a:off x="548640" y="1325880"/>
           <a:ext cx="6949440" cy="4754880"/>
         </p:xfrm>
-        <a:graphic xmlns:a="http://schemas.openxmlformats.org/drawingml/2006/main">
+        <a:graphic>
           <a:graphicData uri="http://schemas.openxmlformats.org/drawingml/2006/chart">
-            <c:chart xmlns:c="http://schemas.openxmlformats.org/drawingml/2006/chart" r:id="rId1"/>
+            <c:chart xmlns:c="http://schemas.openxmlformats.org/drawingml/2006/chart" xmlns:r="http://schemas.openxmlformats.org/officeDocument/2006/relationships" r:id="rId3"/>
           </a:graphicData>
         </a:graphic>
       </p:graphicFrame>
@@ -7655,7 +7788,7 @@
           <a:bodyPr wrap="square" lIns="0" tIns="0" rIns="0" bIns="0" rtlCol="0" anchor="b"/>
           <a:lstStyle/>
           <a:p>
-            <a:pPr indent="0" marL="0">
+            <a:pPr marL="0" indent="0">
               <a:buNone/>
             </a:pPr>
             <a:r>
@@ -7694,7 +7827,7 @@
           <a:bodyPr wrap="square" lIns="0" tIns="0" rIns="0" bIns="0" rtlCol="0" anchor="t"/>
           <a:lstStyle/>
           <a:p>
-            <a:pPr indent="0" marL="0">
+            <a:pPr marL="0" indent="0">
               <a:buNone/>
             </a:pPr>
             <a:r>
@@ -7730,7 +7863,7 @@
           <a:bodyPr wrap="square" lIns="0" tIns="0" rIns="0" bIns="0" rtlCol="0" anchor="t"/>
           <a:lstStyle/>
           <a:p>
-            <a:pPr indent="0" marL="0">
+            <a:pPr marL="0" indent="0">
               <a:buNone/>
             </a:pPr>
             <a:r>
@@ -7768,7 +7901,10 @@
         </p:spPr>
         <p:txBody>
           <a:bodyPr/>
-          <a:p/>
+          <a:lstStyle/>
+          <a:p>
+            <a:endParaRPr/>
+          </a:p>
         </p:txBody>
       </p:sp>
       <p:sp>
@@ -7792,7 +7928,7 @@
           <a:bodyPr wrap="square" lIns="0" tIns="0" rIns="0" bIns="0" rtlCol="0" anchor="t"/>
           <a:lstStyle/>
           <a:p>
-            <a:pPr indent="0" marL="0">
+            <a:pPr marL="0" indent="0">
               <a:buNone/>
             </a:pPr>
             <a:r>
@@ -7828,7 +7964,7 @@
           <a:bodyPr wrap="square" lIns="0" tIns="0" rIns="0" bIns="0" rtlCol="0" anchor="t"/>
           <a:lstStyle/>
           <a:p>
-            <a:pPr indent="0" marL="0">
+            <a:pPr marL="0" indent="0">
               <a:spcAft>
                 <a:spcPts val="300"/>
               </a:spcAft>
@@ -7845,7 +7981,7 @@
             <a:endParaRPr lang="en-US" sz="1500" dirty="0"/>
           </a:p>
           <a:p>
-            <a:pPr indent="0" marL="0">
+            <a:pPr marL="0" indent="0">
               <a:spcAft>
                 <a:spcPts val="300"/>
               </a:spcAft>
@@ -7862,7 +7998,7 @@
             <a:endParaRPr lang="en-US" sz="1500" dirty="0"/>
           </a:p>
           <a:p>
-            <a:pPr indent="0" marL="0">
+            <a:pPr marL="0" indent="0">
               <a:spcAft>
                 <a:spcPts val="300"/>
               </a:spcAft>
@@ -7879,7 +8015,7 @@
             <a:endParaRPr lang="en-US" sz="1500" dirty="0"/>
           </a:p>
           <a:p>
-            <a:pPr indent="0" marL="0">
+            <a:pPr marL="0" indent="0">
               <a:spcAft>
                 <a:spcPts val="300"/>
               </a:spcAft>
@@ -7896,7 +8032,7 @@
             <a:endParaRPr lang="en-US" sz="1500" dirty="0"/>
           </a:p>
           <a:p>
-            <a:pPr indent="0" marL="0">
+            <a:pPr marL="0" indent="0">
               <a:spcAft>
                 <a:spcPts val="300"/>
               </a:spcAft>
@@ -7934,7 +8070,7 @@
           </a:prstGeom>
           <a:extLst>
             <a:ext uri="{C572A759-6A51-4108-AA02-DFA0A04FC94B}">
-              <ma14:wrappingTextBoxFlag xmlns:ma14="http://schemas.microsoft.com/office/mac/drawingml/2011/main" val="0"/>
+              <ma14:wrappingTextBoxFlag xmlns:ma14="http://schemas.microsoft.com/office/mac/drawingml/2011/main" xmlns="" val="0"/>
             </a:ext>
           </a:extLst>
         </p:spPr>
@@ -7952,7 +8088,7 @@
           <a:p>
             <a:pPr algn="r"/>
             <a:fld id="{F7021451-1387-4CA6-816F-3879F97B5CBC}" type="slidenum">
-              <a:rPr b="0" lang="en-US"/>
+              <a:rPr lang="en-US" b="0"/>
               <a:t>13</a:t>
             </a:fld>
             <a:endParaRPr lang="en-US"/>
@@ -7987,9 +8123,11 @@
       <p:sp>
         <p:nvSpPr>
           <p:cNvPr id="2" name="Text 0"/>
-          <p:cNvSpPr/>
+          <p:cNvSpPr>
+            <a:spLocks noGrp="1"/>
+          </p:cNvSpPr>
           <p:nvPr>
-            <p:ph idx="100" type="title" hasCustomPrompt="1"/>
+            <p:ph type="title" idx="100" hasCustomPrompt="1"/>
           </p:nvPr>
         </p:nvSpPr>
         <p:spPr>
@@ -8007,7 +8145,7 @@
           <a:bodyPr wrap="square" lIns="0" tIns="0" rIns="0" bIns="0" rtlCol="0" anchor="ctr"/>
           <a:lstStyle/>
           <a:p>
-            <a:pPr algn="l" indent="0" marL="0">
+            <a:pPr marL="0" indent="0" algn="l">
               <a:buNone/>
             </a:pPr>
             <a:r>
@@ -8048,9 +8186,27 @@
             <a:tbl>
               <a:tblPr/>
               <a:tblGrid>
-                <a:gridCol w="3200400"/>
-                <a:gridCol w="1874519"/>
-                <a:gridCol w="1874519"/>
+                <a:gridCol w="3200400">
+                  <a:extLst>
+                    <a:ext uri="{9D8B030D-6E8A-4147-A177-3AD203B41FA5}">
+                      <a16:colId xmlns:a16="http://schemas.microsoft.com/office/drawing/2014/main" val="20000"/>
+                    </a:ext>
+                  </a:extLst>
+                </a:gridCol>
+                <a:gridCol w="1874519">
+                  <a:extLst>
+                    <a:ext uri="{9D8B030D-6E8A-4147-A177-3AD203B41FA5}">
+                      <a16:colId xmlns:a16="http://schemas.microsoft.com/office/drawing/2014/main" val="20001"/>
+                    </a:ext>
+                  </a:extLst>
+                </a:gridCol>
+                <a:gridCol w="1874519">
+                  <a:extLst>
+                    <a:ext uri="{9D8B030D-6E8A-4147-A177-3AD203B41FA5}">
+                      <a16:colId xmlns:a16="http://schemas.microsoft.com/office/drawing/2014/main" val="20002"/>
+                    </a:ext>
+                  </a:extLst>
+                </a:gridCol>
               </a:tblGrid>
               <a:tr h="411480">
                 <a:tc>
@@ -8058,7 +8214,7 @@
                     <a:bodyPr/>
                     <a:lstStyle/>
                     <a:p>
-                      <a:pPr algn="l" indent="0" marL="0">
+                      <a:pPr marL="0" indent="0" algn="l">
                         <a:buNone/>
                       </a:pPr>
                       <a:r>
@@ -8072,7 +8228,7 @@
                       <a:endParaRPr lang="en-US" sz="1400" dirty="0"/>
                     </a:p>
                   </a:txBody>
-                  <a:tcPr marL="91440" marR="91440" marT="45720" marB="45720" anchor="ctr">
+                  <a:tcPr anchor="ctr">
                     <a:lnL w="6350" cap="flat" cmpd="sng" algn="ctr">
                       <a:solidFill>
                         <a:srgbClr val="DCE5E3"/>
@@ -8119,7 +8275,7 @@
                     <a:bodyPr/>
                     <a:lstStyle/>
                     <a:p>
-                      <a:pPr algn="r" indent="0" marL="0">
+                      <a:pPr marL="0" indent="0" algn="r">
                         <a:buNone/>
                       </a:pPr>
                       <a:r>
@@ -8133,7 +8289,7 @@
                       <a:endParaRPr lang="en-US" sz="1400" dirty="0"/>
                     </a:p>
                   </a:txBody>
-                  <a:tcPr marL="91440" marR="91440" marT="45720" marB="45720" anchor="ctr">
+                  <a:tcPr anchor="ctr">
                     <a:lnL w="6350" cap="flat" cmpd="sng" algn="ctr">
                       <a:solidFill>
                         <a:srgbClr val="DCE5E3"/>
@@ -8180,7 +8336,7 @@
                     <a:bodyPr/>
                     <a:lstStyle/>
                     <a:p>
-                      <a:pPr algn="r" indent="0" marL="0">
+                      <a:pPr marL="0" indent="0" algn="r">
                         <a:buNone/>
                       </a:pPr>
                       <a:r>
@@ -8194,7 +8350,7 @@
                       <a:endParaRPr lang="en-US" sz="1400" dirty="0"/>
                     </a:p>
                   </a:txBody>
-                  <a:tcPr marL="91440" marR="91440" marT="45720" marB="45720" anchor="ctr">
+                  <a:tcPr anchor="ctr">
                     <a:lnL w="6350" cap="flat" cmpd="sng" algn="ctr">
                       <a:solidFill>
                         <a:srgbClr val="DCE5E3"/>
@@ -8236,6 +8392,11 @@
                     </a:solidFill>
                   </a:tcPr>
                 </a:tc>
+                <a:extLst>
+                  <a:ext uri="{0D108BD9-81ED-4DB2-BD59-A6C34878D82A}">
+                    <a16:rowId xmlns:a16="http://schemas.microsoft.com/office/drawing/2014/main" val="10000"/>
+                  </a:ext>
+                </a:extLst>
               </a:tr>
               <a:tr h="411480">
                 <a:tc>
@@ -8243,7 +8404,7 @@
                     <a:bodyPr/>
                     <a:lstStyle/>
                     <a:p>
-                      <a:pPr algn="l" indent="0" marL="0">
+                      <a:pPr marL="0" indent="0" algn="l">
                         <a:buNone/>
                       </a:pPr>
                       <a:r>
@@ -8257,7 +8418,7 @@
                       <a:endParaRPr lang="en-US" sz="1400" dirty="0"/>
                     </a:p>
                   </a:txBody>
-                  <a:tcPr marL="91440" marR="91440" marT="45720" marB="45720" anchor="ctr">
+                  <a:tcPr anchor="ctr">
                     <a:lnL w="6350" cap="flat" cmpd="sng" algn="ctr">
                       <a:solidFill>
                         <a:srgbClr val="DCE5E3"/>
@@ -8304,7 +8465,7 @@
                     <a:bodyPr/>
                     <a:lstStyle/>
                     <a:p>
-                      <a:pPr algn="r" indent="0" marL="0">
+                      <a:pPr marL="0" indent="0" algn="r">
                         <a:buNone/>
                       </a:pPr>
                       <a:r>
@@ -8318,7 +8479,7 @@
                       <a:endParaRPr lang="en-US" sz="1400" dirty="0"/>
                     </a:p>
                   </a:txBody>
-                  <a:tcPr marL="91440" marR="91440" marT="45720" marB="45720" anchor="ctr">
+                  <a:tcPr anchor="ctr">
                     <a:lnL w="6350" cap="flat" cmpd="sng" algn="ctr">
                       <a:solidFill>
                         <a:srgbClr val="DCE5E3"/>
@@ -8365,7 +8526,7 @@
                     <a:bodyPr/>
                     <a:lstStyle/>
                     <a:p>
-                      <a:pPr algn="r" indent="0" marL="0">
+                      <a:pPr marL="0" indent="0" algn="r">
                         <a:buNone/>
                       </a:pPr>
                       <a:r>
@@ -8379,7 +8540,7 @@
                       <a:endParaRPr lang="en-US" sz="1400" dirty="0"/>
                     </a:p>
                   </a:txBody>
-                  <a:tcPr marL="91440" marR="91440" marT="45720" marB="45720" anchor="ctr">
+                  <a:tcPr anchor="ctr">
                     <a:lnL w="6350" cap="flat" cmpd="sng" algn="ctr">
                       <a:solidFill>
                         <a:srgbClr val="DCE5E3"/>
@@ -8421,6 +8582,11 @@
                     </a:solidFill>
                   </a:tcPr>
                 </a:tc>
+                <a:extLst>
+                  <a:ext uri="{0D108BD9-81ED-4DB2-BD59-A6C34878D82A}">
+                    <a16:rowId xmlns:a16="http://schemas.microsoft.com/office/drawing/2014/main" val="10001"/>
+                  </a:ext>
+                </a:extLst>
               </a:tr>
               <a:tr h="411480">
                 <a:tc>
@@ -8428,7 +8594,7 @@
                     <a:bodyPr/>
                     <a:lstStyle/>
                     <a:p>
-                      <a:pPr algn="l" indent="0" marL="0">
+                      <a:pPr marL="0" indent="0" algn="l">
                         <a:buNone/>
                       </a:pPr>
                       <a:r>
@@ -8442,7 +8608,7 @@
                       <a:endParaRPr lang="en-US" sz="1400" dirty="0"/>
                     </a:p>
                   </a:txBody>
-                  <a:tcPr marL="91440" marR="91440" marT="45720" marB="45720" anchor="ctr">
+                  <a:tcPr anchor="ctr">
                     <a:lnL w="6350" cap="flat" cmpd="sng" algn="ctr">
                       <a:solidFill>
                         <a:srgbClr val="DCE5E3"/>
@@ -8489,7 +8655,7 @@
                     <a:bodyPr/>
                     <a:lstStyle/>
                     <a:p>
-                      <a:pPr algn="r" indent="0" marL="0">
+                      <a:pPr marL="0" indent="0" algn="r">
                         <a:buNone/>
                       </a:pPr>
                       <a:r>
@@ -8503,7 +8669,7 @@
                       <a:endParaRPr lang="en-US" sz="1400" dirty="0"/>
                     </a:p>
                   </a:txBody>
-                  <a:tcPr marL="91440" marR="91440" marT="45720" marB="45720" anchor="ctr">
+                  <a:tcPr anchor="ctr">
                     <a:lnL w="6350" cap="flat" cmpd="sng" algn="ctr">
                       <a:solidFill>
                         <a:srgbClr val="DCE5E3"/>
@@ -8550,7 +8716,7 @@
                     <a:bodyPr/>
                     <a:lstStyle/>
                     <a:p>
-                      <a:pPr algn="r" indent="0" marL="0">
+                      <a:pPr marL="0" indent="0" algn="r">
                         <a:buNone/>
                       </a:pPr>
                       <a:r>
@@ -8564,7 +8730,7 @@
                       <a:endParaRPr lang="en-US" sz="1400" dirty="0"/>
                     </a:p>
                   </a:txBody>
-                  <a:tcPr marL="91440" marR="91440" marT="45720" marB="45720" anchor="ctr">
+                  <a:tcPr anchor="ctr">
                     <a:lnL w="6350" cap="flat" cmpd="sng" algn="ctr">
                       <a:solidFill>
                         <a:srgbClr val="DCE5E3"/>
@@ -8606,6 +8772,11 @@
                     </a:solidFill>
                   </a:tcPr>
                 </a:tc>
+                <a:extLst>
+                  <a:ext uri="{0D108BD9-81ED-4DB2-BD59-A6C34878D82A}">
+                    <a16:rowId xmlns:a16="http://schemas.microsoft.com/office/drawing/2014/main" val="10002"/>
+                  </a:ext>
+                </a:extLst>
               </a:tr>
               <a:tr h="411480">
                 <a:tc>
@@ -8613,7 +8784,7 @@
                     <a:bodyPr/>
                     <a:lstStyle/>
                     <a:p>
-                      <a:pPr algn="l" indent="0" marL="0">
+                      <a:pPr marL="0" indent="0" algn="l">
                         <a:buNone/>
                       </a:pPr>
                       <a:r>
@@ -8627,7 +8798,7 @@
                       <a:endParaRPr lang="en-US" sz="1400" dirty="0"/>
                     </a:p>
                   </a:txBody>
-                  <a:tcPr marL="91440" marR="91440" marT="45720" marB="45720" anchor="ctr">
+                  <a:tcPr anchor="ctr">
                     <a:lnL w="6350" cap="flat" cmpd="sng" algn="ctr">
                       <a:solidFill>
                         <a:srgbClr val="DCE5E3"/>
@@ -8674,7 +8845,7 @@
                     <a:bodyPr/>
                     <a:lstStyle/>
                     <a:p>
-                      <a:pPr algn="r" indent="0" marL="0">
+                      <a:pPr marL="0" indent="0" algn="r">
                         <a:buNone/>
                       </a:pPr>
                       <a:r>
@@ -8688,7 +8859,7 @@
                       <a:endParaRPr lang="en-US" sz="1400" dirty="0"/>
                     </a:p>
                   </a:txBody>
-                  <a:tcPr marL="91440" marR="91440" marT="45720" marB="45720" anchor="ctr">
+                  <a:tcPr anchor="ctr">
                     <a:lnL w="6350" cap="flat" cmpd="sng" algn="ctr">
                       <a:solidFill>
                         <a:srgbClr val="DCE5E3"/>
@@ -8735,7 +8906,7 @@
                     <a:bodyPr/>
                     <a:lstStyle/>
                     <a:p>
-                      <a:pPr algn="r" indent="0" marL="0">
+                      <a:pPr marL="0" indent="0" algn="r">
                         <a:buNone/>
                       </a:pPr>
                       <a:r>
@@ -8749,7 +8920,7 @@
                       <a:endParaRPr lang="en-US" sz="1400" dirty="0"/>
                     </a:p>
                   </a:txBody>
-                  <a:tcPr marL="91440" marR="91440" marT="45720" marB="45720" anchor="ctr">
+                  <a:tcPr anchor="ctr">
                     <a:lnL w="6350" cap="flat" cmpd="sng" algn="ctr">
                       <a:solidFill>
                         <a:srgbClr val="DCE5E3"/>
@@ -8791,6 +8962,11 @@
                     </a:solidFill>
                   </a:tcPr>
                 </a:tc>
+                <a:extLst>
+                  <a:ext uri="{0D108BD9-81ED-4DB2-BD59-A6C34878D82A}">
+                    <a16:rowId xmlns:a16="http://schemas.microsoft.com/office/drawing/2014/main" val="10003"/>
+                  </a:ext>
+                </a:extLst>
               </a:tr>
               <a:tr h="411480">
                 <a:tc>
@@ -8798,7 +8974,7 @@
                     <a:bodyPr/>
                     <a:lstStyle/>
                     <a:p>
-                      <a:pPr algn="l" indent="0" marL="0">
+                      <a:pPr marL="0" indent="0" algn="l">
                         <a:buNone/>
                       </a:pPr>
                       <a:r>
@@ -8812,7 +8988,7 @@
                       <a:endParaRPr lang="en-US" sz="1400" dirty="0"/>
                     </a:p>
                   </a:txBody>
-                  <a:tcPr marL="91440" marR="91440" marT="45720" marB="45720" anchor="ctr">
+                  <a:tcPr anchor="ctr">
                     <a:lnL w="6350" cap="flat" cmpd="sng" algn="ctr">
                       <a:solidFill>
                         <a:srgbClr val="DCE5E3"/>
@@ -8859,7 +9035,7 @@
                     <a:bodyPr/>
                     <a:lstStyle/>
                     <a:p>
-                      <a:pPr algn="r" indent="0" marL="0">
+                      <a:pPr marL="0" indent="0" algn="r">
                         <a:buNone/>
                       </a:pPr>
                       <a:r>
@@ -8873,7 +9049,7 @@
                       <a:endParaRPr lang="en-US" sz="1400" dirty="0"/>
                     </a:p>
                   </a:txBody>
-                  <a:tcPr marL="91440" marR="91440" marT="45720" marB="45720" anchor="ctr">
+                  <a:tcPr anchor="ctr">
                     <a:lnL w="6350" cap="flat" cmpd="sng" algn="ctr">
                       <a:solidFill>
                         <a:srgbClr val="DCE5E3"/>
@@ -8920,7 +9096,7 @@
                     <a:bodyPr/>
                     <a:lstStyle/>
                     <a:p>
-                      <a:pPr algn="r" indent="0" marL="0">
+                      <a:pPr marL="0" indent="0" algn="r">
                         <a:buNone/>
                       </a:pPr>
                       <a:r>
@@ -8934,7 +9110,7 @@
                       <a:endParaRPr lang="en-US" sz="1400" dirty="0"/>
                     </a:p>
                   </a:txBody>
-                  <a:tcPr marL="91440" marR="91440" marT="45720" marB="45720" anchor="ctr">
+                  <a:tcPr anchor="ctr">
                     <a:lnL w="6350" cap="flat" cmpd="sng" algn="ctr">
                       <a:solidFill>
                         <a:srgbClr val="DCE5E3"/>
@@ -8976,6 +9152,11 @@
                     </a:solidFill>
                   </a:tcPr>
                 </a:tc>
+                <a:extLst>
+                  <a:ext uri="{0D108BD9-81ED-4DB2-BD59-A6C34878D82A}">
+                    <a16:rowId xmlns:a16="http://schemas.microsoft.com/office/drawing/2014/main" val="10004"/>
+                  </a:ext>
+                </a:extLst>
               </a:tr>
               <a:tr h="411480">
                 <a:tc>
@@ -8983,7 +9164,7 @@
                     <a:bodyPr/>
                     <a:lstStyle/>
                     <a:p>
-                      <a:pPr algn="l" indent="0" marL="0">
+                      <a:pPr marL="0" indent="0" algn="l">
                         <a:buNone/>
                       </a:pPr>
                       <a:r>
@@ -8997,7 +9178,7 @@
                       <a:endParaRPr lang="en-US" sz="1400" dirty="0"/>
                     </a:p>
                   </a:txBody>
-                  <a:tcPr marL="91440" marR="91440" marT="45720" marB="45720" anchor="ctr">
+                  <a:tcPr anchor="ctr">
                     <a:lnL w="6350" cap="flat" cmpd="sng" algn="ctr">
                       <a:solidFill>
                         <a:srgbClr val="DCE5E3"/>
@@ -9044,7 +9225,7 @@
                     <a:bodyPr/>
                     <a:lstStyle/>
                     <a:p>
-                      <a:pPr algn="r" indent="0" marL="0">
+                      <a:pPr marL="0" indent="0" algn="r">
                         <a:buNone/>
                       </a:pPr>
                       <a:r>
@@ -9058,7 +9239,7 @@
                       <a:endParaRPr lang="en-US" sz="1400" dirty="0"/>
                     </a:p>
                   </a:txBody>
-                  <a:tcPr marL="91440" marR="91440" marT="45720" marB="45720" anchor="ctr">
+                  <a:tcPr anchor="ctr">
                     <a:lnL w="6350" cap="flat" cmpd="sng" algn="ctr">
                       <a:solidFill>
                         <a:srgbClr val="DCE5E3"/>
@@ -9105,7 +9286,7 @@
                     <a:bodyPr/>
                     <a:lstStyle/>
                     <a:p>
-                      <a:pPr algn="r" indent="0" marL="0">
+                      <a:pPr marL="0" indent="0" algn="r">
                         <a:buNone/>
                       </a:pPr>
                       <a:r>
@@ -9119,7 +9300,7 @@
                       <a:endParaRPr lang="en-US" sz="1400" dirty="0"/>
                     </a:p>
                   </a:txBody>
-                  <a:tcPr marL="91440" marR="91440" marT="45720" marB="45720" anchor="ctr">
+                  <a:tcPr anchor="ctr">
                     <a:lnL w="6350" cap="flat" cmpd="sng" algn="ctr">
                       <a:solidFill>
                         <a:srgbClr val="DCE5E3"/>
@@ -9161,6 +9342,11 @@
                     </a:solidFill>
                   </a:tcPr>
                 </a:tc>
+                <a:extLst>
+                  <a:ext uri="{0D108BD9-81ED-4DB2-BD59-A6C34878D82A}">
+                    <a16:rowId xmlns:a16="http://schemas.microsoft.com/office/drawing/2014/main" val="10005"/>
+                  </a:ext>
+                </a:extLst>
               </a:tr>
               <a:tr h="411480">
                 <a:tc>
@@ -9168,7 +9354,7 @@
                     <a:bodyPr/>
                     <a:lstStyle/>
                     <a:p>
-                      <a:pPr algn="l" indent="0" marL="0">
+                      <a:pPr marL="0" indent="0" algn="l">
                         <a:buNone/>
                       </a:pPr>
                       <a:r>
@@ -9182,7 +9368,7 @@
                       <a:endParaRPr lang="en-US" sz="1400" dirty="0"/>
                     </a:p>
                   </a:txBody>
-                  <a:tcPr marL="91440" marR="91440" marT="45720" marB="45720" anchor="ctr">
+                  <a:tcPr anchor="ctr">
                     <a:lnL w="6350" cap="flat" cmpd="sng" algn="ctr">
                       <a:solidFill>
                         <a:srgbClr val="DCE5E3"/>
@@ -9229,7 +9415,7 @@
                     <a:bodyPr/>
                     <a:lstStyle/>
                     <a:p>
-                      <a:pPr algn="r" indent="0" marL="0">
+                      <a:pPr marL="0" indent="0" algn="r">
                         <a:buNone/>
                       </a:pPr>
                       <a:r>
@@ -9243,7 +9429,7 @@
                       <a:endParaRPr lang="en-US" sz="1400" dirty="0"/>
                     </a:p>
                   </a:txBody>
-                  <a:tcPr marL="91440" marR="91440" marT="45720" marB="45720" anchor="ctr">
+                  <a:tcPr anchor="ctr">
                     <a:lnL w="6350" cap="flat" cmpd="sng" algn="ctr">
                       <a:solidFill>
                         <a:srgbClr val="DCE5E3"/>
@@ -9290,7 +9476,7 @@
                     <a:bodyPr/>
                     <a:lstStyle/>
                     <a:p>
-                      <a:pPr algn="r" indent="0" marL="0">
+                      <a:pPr marL="0" indent="0" algn="r">
                         <a:buNone/>
                       </a:pPr>
                       <a:r>
@@ -9304,7 +9490,7 @@
                       <a:endParaRPr lang="en-US" sz="1400" dirty="0"/>
                     </a:p>
                   </a:txBody>
-                  <a:tcPr marL="91440" marR="91440" marT="45720" marB="45720" anchor="ctr">
+                  <a:tcPr anchor="ctr">
                     <a:lnL w="6350" cap="flat" cmpd="sng" algn="ctr">
                       <a:solidFill>
                         <a:srgbClr val="DCE5E3"/>
@@ -9346,6 +9532,11 @@
                     </a:solidFill>
                   </a:tcPr>
                 </a:tc>
+                <a:extLst>
+                  <a:ext uri="{0D108BD9-81ED-4DB2-BD59-A6C34878D82A}">
+                    <a16:rowId xmlns:a16="http://schemas.microsoft.com/office/drawing/2014/main" val="10006"/>
+                  </a:ext>
+                </a:extLst>
               </a:tr>
               <a:tr h="411480">
                 <a:tc>
@@ -9353,7 +9544,7 @@
                     <a:bodyPr/>
                     <a:lstStyle/>
                     <a:p>
-                      <a:pPr algn="l" indent="0" marL="0">
+                      <a:pPr marL="0" indent="0" algn="l">
                         <a:buNone/>
                       </a:pPr>
                       <a:r>
@@ -9367,7 +9558,7 @@
                       <a:endParaRPr lang="en-US" sz="1400" dirty="0"/>
                     </a:p>
                   </a:txBody>
-                  <a:tcPr marL="91440" marR="91440" marT="45720" marB="45720" anchor="ctr">
+                  <a:tcPr anchor="ctr">
                     <a:lnL w="6350" cap="flat" cmpd="sng" algn="ctr">
                       <a:solidFill>
                         <a:srgbClr val="DCE5E3"/>
@@ -9414,7 +9605,7 @@
                     <a:bodyPr/>
                     <a:lstStyle/>
                     <a:p>
-                      <a:pPr algn="r" indent="0" marL="0">
+                      <a:pPr marL="0" indent="0" algn="r">
                         <a:buNone/>
                       </a:pPr>
                       <a:r>
@@ -9428,7 +9619,7 @@
                       <a:endParaRPr lang="en-US" sz="1400" dirty="0"/>
                     </a:p>
                   </a:txBody>
-                  <a:tcPr marL="91440" marR="91440" marT="45720" marB="45720" anchor="ctr">
+                  <a:tcPr anchor="ctr">
                     <a:lnL w="6350" cap="flat" cmpd="sng" algn="ctr">
                       <a:solidFill>
                         <a:srgbClr val="DCE5E3"/>
@@ -9475,7 +9666,7 @@
                     <a:bodyPr/>
                     <a:lstStyle/>
                     <a:p>
-                      <a:pPr algn="r" indent="0" marL="0">
+                      <a:pPr marL="0" indent="0" algn="r">
                         <a:buNone/>
                       </a:pPr>
                       <a:r>
@@ -9489,7 +9680,7 @@
                       <a:endParaRPr lang="en-US" sz="1400" dirty="0"/>
                     </a:p>
                   </a:txBody>
-                  <a:tcPr marL="91440" marR="91440" marT="45720" marB="45720" anchor="ctr">
+                  <a:tcPr anchor="ctr">
                     <a:lnL w="6350" cap="flat" cmpd="sng" algn="ctr">
                       <a:solidFill>
                         <a:srgbClr val="DCE5E3"/>
@@ -9531,6 +9722,11 @@
                     </a:solidFill>
                   </a:tcPr>
                 </a:tc>
+                <a:extLst>
+                  <a:ext uri="{0D108BD9-81ED-4DB2-BD59-A6C34878D82A}">
+                    <a16:rowId xmlns:a16="http://schemas.microsoft.com/office/drawing/2014/main" val="10007"/>
+                  </a:ext>
+                </a:extLst>
               </a:tr>
             </a:tbl>
           </a:graphicData>
@@ -9557,7 +9753,7 @@
           <a:bodyPr wrap="square" lIns="0" tIns="0" rIns="0" bIns="0" rtlCol="0" anchor="b"/>
           <a:lstStyle/>
           <a:p>
-            <a:pPr indent="0" marL="0">
+            <a:pPr marL="0" indent="0">
               <a:buNone/>
             </a:pPr>
             <a:r>
@@ -9596,7 +9792,7 @@
           <a:bodyPr wrap="square" lIns="0" tIns="0" rIns="0" bIns="0" rtlCol="0" anchor="t"/>
           <a:lstStyle/>
           <a:p>
-            <a:pPr indent="0" marL="0">
+            <a:pPr marL="0" indent="0">
               <a:buNone/>
             </a:pPr>
             <a:r>
@@ -9632,7 +9828,7 @@
           <a:bodyPr wrap="square" lIns="0" tIns="0" rIns="0" bIns="0" rtlCol="0" anchor="b"/>
           <a:lstStyle/>
           <a:p>
-            <a:pPr indent="0" marL="0">
+            <a:pPr marL="0" indent="0">
               <a:buNone/>
             </a:pPr>
             <a:r>
@@ -9671,7 +9867,7 @@
           <a:bodyPr wrap="square" lIns="0" tIns="0" rIns="0" bIns="0" rtlCol="0" anchor="t"/>
           <a:lstStyle/>
           <a:p>
-            <a:pPr indent="0" marL="0">
+            <a:pPr marL="0" indent="0">
               <a:buNone/>
             </a:pPr>
             <a:r>
@@ -9707,7 +9903,7 @@
           <a:bodyPr wrap="square" lIns="0" tIns="0" rIns="0" bIns="0" rtlCol="0" anchor="t"/>
           <a:lstStyle/>
           <a:p>
-            <a:pPr indent="0" marL="0">
+            <a:pPr marL="0" indent="0">
               <a:buNone/>
             </a:pPr>
             <a:r>
@@ -9742,7 +9938,7 @@
           </a:prstGeom>
           <a:extLst>
             <a:ext uri="{C572A759-6A51-4108-AA02-DFA0A04FC94B}">
-              <ma14:wrappingTextBoxFlag xmlns:ma14="http://schemas.microsoft.com/office/mac/drawingml/2011/main" val="0"/>
+              <ma14:wrappingTextBoxFlag xmlns:ma14="http://schemas.microsoft.com/office/mac/drawingml/2011/main" xmlns="" val="0"/>
             </a:ext>
           </a:extLst>
         </p:spPr>
@@ -9760,7 +9956,7 @@
           <a:p>
             <a:pPr algn="r"/>
             <a:fld id="{F7021451-1387-4CA6-816F-3879F97B5CBC}" type="slidenum">
-              <a:rPr b="0" lang="en-US"/>
+              <a:rPr lang="en-US" b="0"/>
               <a:t>14</a:t>
             </a:fld>
             <a:endParaRPr lang="en-US"/>
@@ -9795,9 +9991,11 @@
       <p:sp>
         <p:nvSpPr>
           <p:cNvPr id="2" name="Text 0"/>
-          <p:cNvSpPr/>
+          <p:cNvSpPr>
+            <a:spLocks noGrp="1"/>
+          </p:cNvSpPr>
           <p:nvPr>
-            <p:ph idx="100" type="title" hasCustomPrompt="1"/>
+            <p:ph type="title" idx="100" hasCustomPrompt="1"/>
           </p:nvPr>
         </p:nvSpPr>
         <p:spPr>
@@ -9815,7 +10013,7 @@
           <a:bodyPr wrap="square" lIns="0" tIns="0" rIns="0" bIns="0" rtlCol="0" anchor="ctr"/>
           <a:lstStyle/>
           <a:p>
-            <a:pPr algn="l" indent="0" marL="0">
+            <a:pPr marL="0" indent="0" algn="l">
               <a:buNone/>
             </a:pPr>
             <a:r>
@@ -9856,7 +10054,10 @@
         </p:spPr>
         <p:txBody>
           <a:bodyPr/>
-          <a:p/>
+          <a:lstStyle/>
+          <a:p>
+            <a:endParaRPr/>
+          </a:p>
         </p:txBody>
       </p:sp>
       <p:sp>
@@ -9880,7 +10081,7 @@
           <a:bodyPr wrap="square" lIns="0" tIns="0" rIns="0" bIns="0" rtlCol="0" anchor="t"/>
           <a:lstStyle/>
           <a:p>
-            <a:pPr indent="0" marL="0">
+            <a:pPr marL="0" indent="0">
               <a:buNone/>
             </a:pPr>
             <a:r>
@@ -9916,7 +10117,7 @@
           <a:bodyPr wrap="square" lIns="0" tIns="0" rIns="0" bIns="0" rtlCol="0" anchor="ctr"/>
           <a:lstStyle/>
           <a:p>
-            <a:pPr indent="0" marL="0">
+            <a:pPr marL="0" indent="0">
               <a:buNone/>
             </a:pPr>
             <a:r>
@@ -9955,7 +10156,7 @@
           <a:bodyPr wrap="square" lIns="0" tIns="0" rIns="0" bIns="0" rtlCol="0" anchor="t"/>
           <a:lstStyle/>
           <a:p>
-            <a:pPr indent="0" marL="0">
+            <a:pPr marL="0" indent="0">
               <a:buNone/>
             </a:pPr>
             <a:r>
@@ -9991,7 +10192,7 @@
           <a:bodyPr wrap="square" lIns="0" tIns="0" rIns="0" bIns="0" rtlCol="0" anchor="t"/>
           <a:lstStyle/>
           <a:p>
-            <a:pPr indent="0" marL="0">
+            <a:pPr marL="0" indent="0">
               <a:buNone/>
             </a:pPr>
             <a:r>
@@ -10029,7 +10230,10 @@
         </p:spPr>
         <p:txBody>
           <a:bodyPr/>
-          <a:p/>
+          <a:lstStyle/>
+          <a:p>
+            <a:endParaRPr/>
+          </a:p>
         </p:txBody>
       </p:sp>
       <p:sp>
@@ -10053,7 +10257,7 @@
           <a:bodyPr wrap="square" lIns="0" tIns="0" rIns="0" bIns="0" rtlCol="0" anchor="t"/>
           <a:lstStyle/>
           <a:p>
-            <a:pPr indent="0" marL="0">
+            <a:pPr marL="0" indent="0">
               <a:buNone/>
             </a:pPr>
             <a:r>
@@ -10089,7 +10293,7 @@
           <a:bodyPr wrap="square" lIns="0" tIns="0" rIns="0" bIns="0" rtlCol="0" anchor="ctr"/>
           <a:lstStyle/>
           <a:p>
-            <a:pPr indent="0" marL="0">
+            <a:pPr marL="0" indent="0">
               <a:buNone/>
             </a:pPr>
             <a:r>
@@ -10128,7 +10332,7 @@
           <a:bodyPr wrap="square" lIns="0" tIns="0" rIns="0" bIns="0" rtlCol="0" anchor="t"/>
           <a:lstStyle/>
           <a:p>
-            <a:pPr indent="0" marL="0">
+            <a:pPr marL="0" indent="0">
               <a:buNone/>
             </a:pPr>
             <a:r>
@@ -10164,7 +10368,7 @@
           <a:bodyPr wrap="square" lIns="0" tIns="0" rIns="0" bIns="0" rtlCol="0" anchor="t"/>
           <a:lstStyle/>
           <a:p>
-            <a:pPr indent="0" marL="0">
+            <a:pPr marL="0" indent="0">
               <a:buNone/>
             </a:pPr>
             <a:r>
@@ -10200,19 +10404,22 @@
         </p:spPr>
         <p:txBody>
           <a:bodyPr/>
-          <a:p/>
+          <a:lstStyle/>
+          <a:p>
+            <a:endParaRPr/>
+          </a:p>
         </p:txBody>
       </p:sp>
       <p:pic>
         <p:nvPicPr>
-          <p:cNvPr id="14" name="icon-check" descr="preencoded.png">    </p:cNvPr>
+          <p:cNvPr id="14" name="icon-check" descr="preencoded.png"/>
           <p:cNvPicPr>
             <a:picLocks noChangeAspect="1"/>
           </p:cNvPicPr>
           <p:nvPr/>
         </p:nvPicPr>
         <p:blipFill>
-          <a:blip r:embed="rId1"/>
+          <a:blip r:embed="rId3"/>
           <a:stretch>
             <a:fillRect/>
           </a:stretch>
@@ -10248,7 +10455,7 @@
           <a:bodyPr wrap="square" lIns="0" tIns="0" rIns="0" bIns="0" rtlCol="0" anchor="ctr"/>
           <a:lstStyle/>
           <a:p>
-            <a:pPr indent="0" marL="0">
+            <a:pPr marL="0" indent="0">
               <a:buNone/>
             </a:pPr>
             <a:r>
@@ -10259,9 +10466,6 @@
               </a:rPr>
               <a:t>The low scores come from the data, not from the pipeline. </a:t>
             </a:r>
-            <a:pPr indent="0" marL="0">
-              <a:buNone/>
-            </a:pPr>
             <a:r>
               <a:rPr lang="en-US" sz="1600" dirty="0">
                 <a:solidFill>
@@ -10294,7 +10498,7 @@
           </a:prstGeom>
           <a:extLst>
             <a:ext uri="{C572A759-6A51-4108-AA02-DFA0A04FC94B}">
-              <ma14:wrappingTextBoxFlag xmlns:ma14="http://schemas.microsoft.com/office/mac/drawingml/2011/main" val="0"/>
+              <ma14:wrappingTextBoxFlag xmlns:ma14="http://schemas.microsoft.com/office/mac/drawingml/2011/main" xmlns="" val="0"/>
             </a:ext>
           </a:extLst>
         </p:spPr>
@@ -10312,7 +10516,7 @@
           <a:p>
             <a:pPr algn="r"/>
             <a:fld id="{F7021451-1387-4CA6-816F-3879F97B5CBC}" type="slidenum">
-              <a:rPr b="0" lang="en-US"/>
+              <a:rPr lang="en-US" b="0"/>
               <a:t>15</a:t>
             </a:fld>
             <a:endParaRPr lang="en-US"/>
@@ -10347,9 +10551,11 @@
       <p:sp>
         <p:nvSpPr>
           <p:cNvPr id="2" name="Text 0"/>
-          <p:cNvSpPr/>
+          <p:cNvSpPr>
+            <a:spLocks noGrp="1"/>
+          </p:cNvSpPr>
           <p:nvPr>
-            <p:ph idx="100" type="title" hasCustomPrompt="1"/>
+            <p:ph type="title" idx="100" hasCustomPrompt="1"/>
           </p:nvPr>
         </p:nvSpPr>
         <p:spPr>
@@ -10367,7 +10573,7 @@
           <a:bodyPr wrap="square" lIns="0" tIns="0" rIns="0" bIns="0" rtlCol="0" anchor="ctr"/>
           <a:lstStyle/>
           <a:p>
-            <a:pPr algn="l" indent="0" marL="0">
+            <a:pPr marL="0" indent="0" algn="l">
               <a:buNone/>
             </a:pPr>
             <a:r>
@@ -10408,7 +10614,10 @@
         </p:spPr>
         <p:txBody>
           <a:bodyPr/>
-          <a:p/>
+          <a:lstStyle/>
+          <a:p>
+            <a:endParaRPr/>
+          </a:p>
         </p:txBody>
       </p:sp>
       <p:sp>
@@ -10432,158 +10641,15 @@
         </p:spPr>
         <p:txBody>
           <a:bodyPr/>
-          <a:p/>
+          <a:lstStyle/>
+          <a:p>
+            <a:endParaRPr/>
+          </a:p>
         </p:txBody>
       </p:sp>
       <p:pic>
         <p:nvPicPr>
-          <p:cNvPr id="5" name="icon-eye" descr="preencoded.png">    </p:cNvPr>
-          <p:cNvPicPr>
-            <a:picLocks noChangeAspect="1"/>
-          </p:cNvPicPr>
-          <p:nvPr/>
-        </p:nvPicPr>
-        <p:blipFill>
-          <a:blip r:embed="rId1"/>
-          <a:stretch>
-            <a:fillRect/>
-          </a:stretch>
-        </p:blipFill>
-        <p:spPr>
-          <a:xfrm>
-            <a:off x="960120" y="1828800"/>
-            <a:ext cx="274320" cy="274320"/>
-          </a:xfrm>
-          <a:prstGeom prst="rect">
-            <a:avLst/>
-          </a:prstGeom>
-        </p:spPr>
-      </p:pic>
-      <p:sp>
-        <p:nvSpPr>
-          <p:cNvPr id="6" name="Text 3"/>
-          <p:cNvSpPr txBox="1"/>
-          <p:nvPr/>
-        </p:nvSpPr>
-        <p:spPr>
-          <a:xfrm>
-            <a:off x="1508760" y="1691640"/>
-            <a:ext cx="2286000" cy="548640"/>
-          </a:xfrm>
-          <a:prstGeom prst="rect">
-            <a:avLst/>
-          </a:prstGeom>
-          <a:noFill/>
-          <a:ln/>
-        </p:spPr>
-        <p:txBody>
-          <a:bodyPr wrap="square" lIns="0" tIns="0" rIns="0" bIns="0" rtlCol="0" anchor="ctr"/>
-          <a:lstStyle/>
-          <a:p>
-            <a:pPr indent="0" marL="0">
-              <a:buNone/>
-            </a:pPr>
-            <a:r>
-              <a:rPr lang="en-US" sz="1700" b="1" dirty="0">
-                <a:solidFill>
-                  <a:schemeClr val="tx2"/>
-                </a:solidFill>
-              </a:rPr>
-              <a:t>Prediction plus explanation</a:t>
-            </a:r>
-            <a:endParaRPr lang="en-US" sz="1700" dirty="0"/>
-          </a:p>
-        </p:txBody>
-      </p:sp>
-      <p:sp>
-        <p:nvSpPr>
-          <p:cNvPr id="7" name="Text 4"/>
-          <p:cNvSpPr txBox="1"/>
-          <p:nvPr/>
-        </p:nvSpPr>
-        <p:spPr>
-          <a:xfrm>
-            <a:off x="822960" y="2423160"/>
-            <a:ext cx="2880360" cy="868680"/>
-          </a:xfrm>
-          <a:prstGeom prst="rect">
-            <a:avLst/>
-          </a:prstGeom>
-          <a:noFill/>
-          <a:ln/>
-        </p:spPr>
-        <p:txBody>
-          <a:bodyPr wrap="square" lIns="0" tIns="0" rIns="0" bIns="0" rtlCol="0" anchor="t"/>
-          <a:lstStyle/>
-          <a:p>
-            <a:pPr indent="0" marL="0">
-              <a:buNone/>
-            </a:pPr>
-            <a:r>
-              <a:rPr lang="en-US" sz="1400" dirty="0">
-                <a:solidFill>
-                  <a:schemeClr val="tx1"/>
-                </a:solidFill>
-              </a:rPr>
-              <a:t>P(Won) per deal; its top factors move the score 3.1× more than random ones</a:t>
-            </a:r>
-            <a:endParaRPr lang="en-US" sz="1400" dirty="0"/>
-          </a:p>
-        </p:txBody>
-      </p:sp>
-      <p:sp>
-        <p:nvSpPr>
-          <p:cNvPr id="13" name="novelty-2"/>
-          <p:cNvSpPr/>
-          <p:nvPr/>
-        </p:nvSpPr>
-        <p:spPr>
-          <a:xfrm>
-            <a:off x="4379976" y="1417320"/>
-            <a:ext cx="3429000" cy="2011680"/>
-          </a:xfrm>
-          <a:prstGeom prst="roundRect">
-            <a:avLst>
-              <a:gd name="adj" fmla="val 3636"/>
-            </a:avLst>
-          </a:prstGeom>
-          <a:solidFill>
-            <a:schemeClr val="bg2"/>
-          </a:solidFill>
-          <a:ln/>
-        </p:spPr>
-        <p:txBody>
-          <a:bodyPr/>
-          <a:p/>
-        </p:txBody>
-      </p:sp>
-      <p:sp>
-        <p:nvSpPr>
-          <p:cNvPr id="14" name="icon-bg-clock"/>
-          <p:cNvSpPr/>
-          <p:nvPr/>
-        </p:nvSpPr>
-        <p:spPr>
-          <a:xfrm>
-            <a:off x="4654296" y="1691640"/>
-            <a:ext cx="548640" cy="548640"/>
-          </a:xfrm>
-          <a:prstGeom prst="ellipse">
-            <a:avLst/>
-          </a:prstGeom>
-          <a:solidFill>
-            <a:schemeClr val="accent1"/>
-          </a:solidFill>
-          <a:ln/>
-        </p:spPr>
-        <p:txBody>
-          <a:bodyPr/>
-          <a:p/>
-        </p:txBody>
-      </p:sp>
-      <p:pic>
-        <p:nvPicPr>
-          <p:cNvPr id="15" name="icon-clock" descr="preencoded.png">    </p:cNvPr>
+          <p:cNvPr id="5" name="icon-eye" descr="preencoded.png"/>
           <p:cNvPicPr>
             <a:picLocks noChangeAspect="1"/>
           </p:cNvPicPr>
@@ -10597,7 +10663,7 @@
         </p:blipFill>
         <p:spPr>
           <a:xfrm>
-            <a:off x="4791456" y="1828800"/>
+            <a:off x="960120" y="1828800"/>
             <a:ext cx="274320" cy="274320"/>
           </a:xfrm>
           <a:prstGeom prst="rect">
@@ -10607,13 +10673,13 @@
       </p:pic>
       <p:sp>
         <p:nvSpPr>
-          <p:cNvPr id="16" name="Text 11"/>
+          <p:cNvPr id="6" name="Text 3"/>
           <p:cNvSpPr txBox="1"/>
           <p:nvPr/>
         </p:nvSpPr>
         <p:spPr>
           <a:xfrm>
-            <a:off x="5340096" y="1691640"/>
+            <a:off x="1508760" y="1691640"/>
             <a:ext cx="2286000" cy="548640"/>
           </a:xfrm>
           <a:prstGeom prst="rect">
@@ -10626,7 +10692,7 @@
           <a:bodyPr wrap="square" lIns="0" tIns="0" rIns="0" bIns="0" rtlCol="0" anchor="ctr"/>
           <a:lstStyle/>
           <a:p>
-            <a:pPr indent="0" marL="0">
+            <a:pPr marL="0" indent="0">
               <a:buNone/>
             </a:pPr>
             <a:r>
@@ -10635,7 +10701,7 @@
                   <a:schemeClr val="tx2"/>
                 </a:solidFill>
               </a:rPr>
-              <a:t>Label-availability split</a:t>
+              <a:t>Prediction plus explanation</a:t>
             </a:r>
             <a:endParaRPr lang="en-US" sz="1700" dirty="0"/>
           </a:p>
@@ -10643,13 +10709,13 @@
       </p:sp>
       <p:sp>
         <p:nvSpPr>
-          <p:cNvPr id="17" name="Text 12"/>
+          <p:cNvPr id="7" name="Text 4"/>
           <p:cNvSpPr txBox="1"/>
           <p:nvPr/>
         </p:nvSpPr>
         <p:spPr>
           <a:xfrm>
-            <a:off x="4654296" y="2423160"/>
+            <a:off x="822960" y="2423160"/>
             <a:ext cx="2880360" cy="868680"/>
           </a:xfrm>
           <a:prstGeom prst="rect">
@@ -10662,7 +10728,7 @@
           <a:bodyPr wrap="square" lIns="0" tIns="0" rIns="0" bIns="0" rtlCol="0" anchor="t"/>
           <a:lstStyle/>
           <a:p>
-            <a:pPr indent="0" marL="0">
+            <a:pPr marL="0" indent="0">
               <a:buNone/>
             </a:pPr>
             <a:r>
@@ -10671,7 +10737,7 @@
                   <a:schemeClr val="tx1"/>
                 </a:solidFill>
               </a:rPr>
-              <a:t>Train only on known outcomes; a random split adds at most 0.04 AUC</a:t>
+              <a:t>P(Won) per deal; its top factors move the score 3.1× more than random ones</a:t>
             </a:r>
             <a:endParaRPr lang="en-US" sz="1400" dirty="0"/>
           </a:p>
@@ -10679,13 +10745,13 @@
       </p:sp>
       <p:sp>
         <p:nvSpPr>
-          <p:cNvPr id="18" name="novelty-3"/>
+          <p:cNvPr id="13" name="novelty-2"/>
           <p:cNvSpPr/>
           <p:nvPr/>
         </p:nvSpPr>
         <p:spPr>
           <a:xfrm>
-            <a:off x="8211312" y="1417320"/>
+            <a:off x="4379976" y="1417320"/>
             <a:ext cx="3429000" cy="2011680"/>
           </a:xfrm>
           <a:prstGeom prst="roundRect">
@@ -10700,18 +10766,21 @@
         </p:spPr>
         <p:txBody>
           <a:bodyPr/>
-          <a:p/>
-        </p:txBody>
-      </p:sp>
-      <p:sp>
-        <p:nvSpPr>
-          <p:cNvPr id="19" name="icon-bg-warn"/>
+          <a:lstStyle/>
+          <a:p>
+            <a:endParaRPr/>
+          </a:p>
+        </p:txBody>
+      </p:sp>
+      <p:sp>
+        <p:nvSpPr>
+          <p:cNvPr id="14" name="icon-bg-clock"/>
           <p:cNvSpPr/>
           <p:nvPr/>
         </p:nvSpPr>
         <p:spPr>
           <a:xfrm>
-            <a:off x="8485632" y="1691640"/>
+            <a:off x="4654296" y="1691640"/>
             <a:ext cx="548640" cy="548640"/>
           </a:xfrm>
           <a:prstGeom prst="ellipse">
@@ -10724,12 +10793,15 @@
         </p:spPr>
         <p:txBody>
           <a:bodyPr/>
-          <a:p/>
+          <a:lstStyle/>
+          <a:p>
+            <a:endParaRPr/>
+          </a:p>
         </p:txBody>
       </p:sp>
       <p:pic>
         <p:nvPicPr>
-          <p:cNvPr id="20" name="icon-warn" descr="preencoded.png">    </p:cNvPr>
+          <p:cNvPr id="15" name="icon-clock" descr="preencoded.png"/>
           <p:cNvPicPr>
             <a:picLocks noChangeAspect="1"/>
           </p:cNvPicPr>
@@ -10743,7 +10815,7 @@
         </p:blipFill>
         <p:spPr>
           <a:xfrm>
-            <a:off x="8622792" y="1828800"/>
+            <a:off x="4791456" y="1828800"/>
             <a:ext cx="274320" cy="274320"/>
           </a:xfrm>
           <a:prstGeom prst="rect">
@@ -10753,13 +10825,13 @@
       </p:pic>
       <p:sp>
         <p:nvSpPr>
-          <p:cNvPr id="21" name="Text 15"/>
+          <p:cNvPr id="16" name="Text 11"/>
           <p:cNvSpPr txBox="1"/>
           <p:nvPr/>
         </p:nvSpPr>
         <p:spPr>
           <a:xfrm>
-            <a:off x="9171432" y="1691640"/>
+            <a:off x="5340096" y="1691640"/>
             <a:ext cx="2286000" cy="548640"/>
           </a:xfrm>
           <a:prstGeom prst="rect">
@@ -10772,7 +10844,7 @@
           <a:bodyPr wrap="square" lIns="0" tIns="0" rIns="0" bIns="0" rtlCol="0" anchor="ctr"/>
           <a:lstStyle/>
           <a:p>
-            <a:pPr indent="0" marL="0">
+            <a:pPr marL="0" indent="0">
               <a:buNone/>
             </a:pPr>
             <a:r>
@@ -10781,7 +10853,7 @@
                   <a:schemeClr val="tx2"/>
                 </a:solidFill>
               </a:rPr>
-              <a:t>Input warnings</a:t>
+              <a:t>Label-availability split</a:t>
             </a:r>
             <a:endParaRPr lang="en-US" sz="1700" dirty="0"/>
           </a:p>
@@ -10789,13 +10861,13 @@
       </p:sp>
       <p:sp>
         <p:nvSpPr>
-          <p:cNvPr id="22" name="Text 16"/>
+          <p:cNvPr id="17" name="Text 12"/>
           <p:cNvSpPr txBox="1"/>
           <p:nvPr/>
         </p:nvSpPr>
         <p:spPr>
           <a:xfrm>
-            <a:off x="8485632" y="2423160"/>
+            <a:off x="4654296" y="2423160"/>
             <a:ext cx="2880360" cy="868680"/>
           </a:xfrm>
           <a:prstGeom prst="rect">
@@ -10808,7 +10880,7 @@
           <a:bodyPr wrap="square" lIns="0" tIns="0" rIns="0" bIns="0" rtlCol="0" anchor="t"/>
           <a:lstStyle/>
           <a:p>
-            <a:pPr indent="0" marL="0">
+            <a:pPr marL="0" indent="0">
               <a:buNone/>
             </a:pPr>
             <a:r>
@@ -10817,7 +10889,7 @@
                   <a:schemeClr val="tx1"/>
                 </a:solidFill>
               </a:rPr>
-              <a:t>1,088 of 1,589 open-deal scores flagged for a missing account</a:t>
+              <a:t>Train only on known outcomes; a random split adds at most 0.04 AUC</a:t>
             </a:r>
             <a:endParaRPr lang="en-US" sz="1400" dirty="0"/>
           </a:p>
@@ -10825,13 +10897,13 @@
       </p:sp>
       <p:sp>
         <p:nvSpPr>
-          <p:cNvPr id="23" name="novelty-4"/>
+          <p:cNvPr id="18" name="novelty-3"/>
           <p:cNvSpPr/>
           <p:nvPr/>
         </p:nvSpPr>
         <p:spPr>
           <a:xfrm>
-            <a:off x="2468880" y="3703320"/>
+            <a:off x="8211312" y="1417320"/>
             <a:ext cx="3429000" cy="2011680"/>
           </a:xfrm>
           <a:prstGeom prst="roundRect">
@@ -10846,18 +10918,21 @@
         </p:spPr>
         <p:txBody>
           <a:bodyPr/>
-          <a:p/>
-        </p:txBody>
-      </p:sp>
-      <p:sp>
-        <p:nvSpPr>
-          <p:cNvPr id="24" name="icon-bg-flask"/>
+          <a:lstStyle/>
+          <a:p>
+            <a:endParaRPr/>
+          </a:p>
+        </p:txBody>
+      </p:sp>
+      <p:sp>
+        <p:nvSpPr>
+          <p:cNvPr id="19" name="icon-bg-warn"/>
           <p:cNvSpPr/>
           <p:nvPr/>
         </p:nvSpPr>
         <p:spPr>
           <a:xfrm>
-            <a:off x="2743200" y="3977640"/>
+            <a:off x="8485632" y="1691640"/>
             <a:ext cx="548640" cy="548640"/>
           </a:xfrm>
           <a:prstGeom prst="ellipse">
@@ -10870,12 +10945,15 @@
         </p:spPr>
         <p:txBody>
           <a:bodyPr/>
-          <a:p/>
+          <a:lstStyle/>
+          <a:p>
+            <a:endParaRPr/>
+          </a:p>
         </p:txBody>
       </p:sp>
       <p:pic>
         <p:nvPicPr>
-          <p:cNvPr id="25" name="icon-flask" descr="preencoded.png">    </p:cNvPr>
+          <p:cNvPr id="20" name="icon-warn" descr="preencoded.png"/>
           <p:cNvPicPr>
             <a:picLocks noChangeAspect="1"/>
           </p:cNvPicPr>
@@ -10889,7 +10967,7 @@
         </p:blipFill>
         <p:spPr>
           <a:xfrm>
-            <a:off x="2880360" y="4114800"/>
+            <a:off x="8622792" y="1828800"/>
             <a:ext cx="274320" cy="274320"/>
           </a:xfrm>
           <a:prstGeom prst="rect">
@@ -10899,13 +10977,13 @@
       </p:pic>
       <p:sp>
         <p:nvSpPr>
-          <p:cNvPr id="26" name="Text 19"/>
+          <p:cNvPr id="21" name="Text 15"/>
           <p:cNvSpPr txBox="1"/>
           <p:nvPr/>
         </p:nvSpPr>
         <p:spPr>
           <a:xfrm>
-            <a:off x="3429000" y="3977640"/>
+            <a:off x="9171432" y="1691640"/>
             <a:ext cx="2286000" cy="548640"/>
           </a:xfrm>
           <a:prstGeom prst="rect">
@@ -10918,7 +10996,7 @@
           <a:bodyPr wrap="square" lIns="0" tIns="0" rIns="0" bIns="0" rtlCol="0" anchor="ctr"/>
           <a:lstStyle/>
           <a:p>
-            <a:pPr indent="0" marL="0">
+            <a:pPr marL="0" indent="0">
               <a:buNone/>
             </a:pPr>
             <a:r>
@@ -10927,7 +11005,7 @@
                   <a:schemeClr val="tx2"/>
                 </a:solidFill>
               </a:rPr>
-              <a:t>Known-truth simulation</a:t>
+              <a:t>Input warnings</a:t>
             </a:r>
             <a:endParaRPr lang="en-US" sz="1700" dirty="0"/>
           </a:p>
@@ -10935,13 +11013,13 @@
       </p:sp>
       <p:sp>
         <p:nvSpPr>
-          <p:cNvPr id="27" name="Text 20"/>
+          <p:cNvPr id="22" name="Text 16"/>
           <p:cNvSpPr txBox="1"/>
           <p:nvPr/>
         </p:nvSpPr>
         <p:spPr>
           <a:xfrm>
-            <a:off x="2743200" y="4709160"/>
+            <a:off x="8485632" y="2423160"/>
             <a:ext cx="2880360" cy="868680"/>
           </a:xfrm>
           <a:prstGeom prst="rect">
@@ -10954,7 +11032,7 @@
           <a:bodyPr wrap="square" lIns="0" tIns="0" rIns="0" bIns="0" rtlCol="0" anchor="t"/>
           <a:lstStyle/>
           <a:p>
-            <a:pPr indent="0" marL="0">
+            <a:pPr marL="0" indent="0">
               <a:buNone/>
             </a:pPr>
             <a:r>
@@ -10963,7 +11041,7 @@
                   <a:schemeClr val="tx1"/>
                 </a:solidFill>
               </a:rPr>
-              <a:t>Pipeline reaches 0.869 vs an oracle of 0.878 when signal exists</a:t>
+              <a:t>1,088 of 1,589 open-deal scores flagged for a missing account</a:t>
             </a:r>
             <a:endParaRPr lang="en-US" sz="1400" dirty="0"/>
           </a:p>
@@ -10971,13 +11049,13 @@
       </p:sp>
       <p:sp>
         <p:nvSpPr>
-          <p:cNvPr id="28" name="novelty-5"/>
+          <p:cNvPr id="23" name="novelty-4"/>
           <p:cNvSpPr/>
           <p:nvPr/>
         </p:nvSpPr>
         <p:spPr>
           <a:xfrm>
-            <a:off x="6300216" y="3703320"/>
+            <a:off x="2468880" y="3703320"/>
             <a:ext cx="3429000" cy="2011680"/>
           </a:xfrm>
           <a:prstGeom prst="roundRect">
@@ -10992,18 +11070,21 @@
         </p:spPr>
         <p:txBody>
           <a:bodyPr/>
-          <a:p/>
-        </p:txBody>
-      </p:sp>
-      <p:sp>
-        <p:nvSpPr>
-          <p:cNvPr id="29" name="icon-bg-cogs"/>
+          <a:lstStyle/>
+          <a:p>
+            <a:endParaRPr/>
+          </a:p>
+        </p:txBody>
+      </p:sp>
+      <p:sp>
+        <p:nvSpPr>
+          <p:cNvPr id="24" name="icon-bg-flask"/>
           <p:cNvSpPr/>
           <p:nvPr/>
         </p:nvSpPr>
         <p:spPr>
           <a:xfrm>
-            <a:off x="6574536" y="3977640"/>
+            <a:off x="2743200" y="3977640"/>
             <a:ext cx="548640" cy="548640"/>
           </a:xfrm>
           <a:prstGeom prst="ellipse">
@@ -11016,12 +11097,15 @@
         </p:spPr>
         <p:txBody>
           <a:bodyPr/>
-          <a:p/>
+          <a:lstStyle/>
+          <a:p>
+            <a:endParaRPr/>
+          </a:p>
         </p:txBody>
       </p:sp>
       <p:pic>
         <p:nvPicPr>
-          <p:cNvPr id="30" name="icon-cogs" descr="preencoded.png">    </p:cNvPr>
+          <p:cNvPr id="25" name="icon-flask" descr="preencoded.png"/>
           <p:cNvPicPr>
             <a:picLocks noChangeAspect="1"/>
           </p:cNvPicPr>
@@ -11035,6 +11119,158 @@
         </p:blipFill>
         <p:spPr>
           <a:xfrm>
+            <a:off x="2880360" y="4114800"/>
+            <a:ext cx="274320" cy="274320"/>
+          </a:xfrm>
+          <a:prstGeom prst="rect">
+            <a:avLst/>
+          </a:prstGeom>
+        </p:spPr>
+      </p:pic>
+      <p:sp>
+        <p:nvSpPr>
+          <p:cNvPr id="26" name="Text 19"/>
+          <p:cNvSpPr txBox="1"/>
+          <p:nvPr/>
+        </p:nvSpPr>
+        <p:spPr>
+          <a:xfrm>
+            <a:off x="3429000" y="3977640"/>
+            <a:ext cx="2286000" cy="548640"/>
+          </a:xfrm>
+          <a:prstGeom prst="rect">
+            <a:avLst/>
+          </a:prstGeom>
+          <a:noFill/>
+          <a:ln/>
+        </p:spPr>
+        <p:txBody>
+          <a:bodyPr wrap="square" lIns="0" tIns="0" rIns="0" bIns="0" rtlCol="0" anchor="ctr"/>
+          <a:lstStyle/>
+          <a:p>
+            <a:pPr marL="0" indent="0">
+              <a:buNone/>
+            </a:pPr>
+            <a:r>
+              <a:rPr lang="en-US" sz="1700" b="1" dirty="0">
+                <a:solidFill>
+                  <a:schemeClr val="tx2"/>
+                </a:solidFill>
+              </a:rPr>
+              <a:t>Known-truth simulation</a:t>
+            </a:r>
+            <a:endParaRPr lang="en-US" sz="1700" dirty="0"/>
+          </a:p>
+        </p:txBody>
+      </p:sp>
+      <p:sp>
+        <p:nvSpPr>
+          <p:cNvPr id="27" name="Text 20"/>
+          <p:cNvSpPr txBox="1"/>
+          <p:nvPr/>
+        </p:nvSpPr>
+        <p:spPr>
+          <a:xfrm>
+            <a:off x="2743200" y="4709160"/>
+            <a:ext cx="2880360" cy="868680"/>
+          </a:xfrm>
+          <a:prstGeom prst="rect">
+            <a:avLst/>
+          </a:prstGeom>
+          <a:noFill/>
+          <a:ln/>
+        </p:spPr>
+        <p:txBody>
+          <a:bodyPr wrap="square" lIns="0" tIns="0" rIns="0" bIns="0" rtlCol="0" anchor="t"/>
+          <a:lstStyle/>
+          <a:p>
+            <a:pPr marL="0" indent="0">
+              <a:buNone/>
+            </a:pPr>
+            <a:r>
+              <a:rPr lang="en-US" sz="1400" dirty="0">
+                <a:solidFill>
+                  <a:schemeClr val="tx1"/>
+                </a:solidFill>
+              </a:rPr>
+              <a:t>Pipeline reaches 0.869 vs an oracle of 0.878 when signal exists</a:t>
+            </a:r>
+            <a:endParaRPr lang="en-US" sz="1400" dirty="0"/>
+          </a:p>
+        </p:txBody>
+      </p:sp>
+      <p:sp>
+        <p:nvSpPr>
+          <p:cNvPr id="28" name="novelty-5"/>
+          <p:cNvSpPr/>
+          <p:nvPr/>
+        </p:nvSpPr>
+        <p:spPr>
+          <a:xfrm>
+            <a:off x="6300216" y="3703320"/>
+            <a:ext cx="3429000" cy="2011680"/>
+          </a:xfrm>
+          <a:prstGeom prst="roundRect">
+            <a:avLst>
+              <a:gd name="adj" fmla="val 3636"/>
+            </a:avLst>
+          </a:prstGeom>
+          <a:solidFill>
+            <a:schemeClr val="bg2"/>
+          </a:solidFill>
+          <a:ln/>
+        </p:spPr>
+        <p:txBody>
+          <a:bodyPr/>
+          <a:lstStyle/>
+          <a:p>
+            <a:endParaRPr/>
+          </a:p>
+        </p:txBody>
+      </p:sp>
+      <p:sp>
+        <p:nvSpPr>
+          <p:cNvPr id="29" name="icon-bg-cogs"/>
+          <p:cNvSpPr/>
+          <p:nvPr/>
+        </p:nvSpPr>
+        <p:spPr>
+          <a:xfrm>
+            <a:off x="6574536" y="3977640"/>
+            <a:ext cx="548640" cy="548640"/>
+          </a:xfrm>
+          <a:prstGeom prst="ellipse">
+            <a:avLst/>
+          </a:prstGeom>
+          <a:solidFill>
+            <a:schemeClr val="accent1"/>
+          </a:solidFill>
+          <a:ln/>
+        </p:spPr>
+        <p:txBody>
+          <a:bodyPr/>
+          <a:lstStyle/>
+          <a:p>
+            <a:endParaRPr/>
+          </a:p>
+        </p:txBody>
+      </p:sp>
+      <p:pic>
+        <p:nvPicPr>
+          <p:cNvPr id="30" name="icon-cogs" descr="preencoded.png"/>
+          <p:cNvPicPr>
+            <a:picLocks noChangeAspect="1"/>
+          </p:cNvPicPr>
+          <p:nvPr/>
+        </p:nvPicPr>
+        <p:blipFill>
+          <a:blip r:embed="rId7"/>
+          <a:stretch>
+            <a:fillRect/>
+          </a:stretch>
+        </p:blipFill>
+        <p:spPr>
+          <a:xfrm>
             <a:off x="6711696" y="4114800"/>
             <a:ext cx="274320" cy="274320"/>
           </a:xfrm>
@@ -11064,7 +11300,7 @@
           <a:bodyPr wrap="square" lIns="0" tIns="0" rIns="0" bIns="0" rtlCol="0" anchor="ctr"/>
           <a:lstStyle/>
           <a:p>
-            <a:pPr indent="0" marL="0">
+            <a:pPr marL="0" indent="0">
               <a:buNone/>
             </a:pPr>
             <a:r>
@@ -11100,7 +11336,7 @@
           <a:bodyPr wrap="square" lIns="0" tIns="0" rIns="0" bIns="0" rtlCol="0" anchor="t"/>
           <a:lstStyle/>
           <a:p>
-            <a:pPr indent="0" marL="0">
+            <a:pPr marL="0" indent="0">
               <a:buNone/>
             </a:pPr>
             <a:r>
@@ -11117,7 +11353,7 @@
       </p:sp>
       <p:sp>
         <p:nvSpPr>
-          <p:cNvPr id="25" name="Slide Number Placeholder 0"/>
+          <p:cNvPr id="8" name="Slide Number Placeholder 0"/>
           <p:cNvSpPr>
             <a:spLocks noGrp="1"/>
           </p:cNvSpPr>
@@ -11135,7 +11371,7 @@
           </a:prstGeom>
           <a:extLst>
             <a:ext uri="{C572A759-6A51-4108-AA02-DFA0A04FC94B}">
-              <ma14:wrappingTextBoxFlag xmlns:ma14="http://schemas.microsoft.com/office/mac/drawingml/2011/main" val="0"/>
+              <ma14:wrappingTextBoxFlag xmlns:ma14="http://schemas.microsoft.com/office/mac/drawingml/2011/main" xmlns="" val="0"/>
             </a:ext>
           </a:extLst>
         </p:spPr>
@@ -11153,7 +11389,7 @@
           <a:p>
             <a:pPr algn="r"/>
             <a:fld id="{F7021451-1387-4CA6-816F-3879F97B5CBC}" type="slidenum">
-              <a:rPr b="0" lang="en-US"/>
+              <a:rPr lang="en-US" b="0"/>
               <a:t>16</a:t>
             </a:fld>
             <a:endParaRPr lang="en-US"/>
@@ -11188,9 +11424,11 @@
       <p:sp>
         <p:nvSpPr>
           <p:cNvPr id="2" name="Text 0"/>
-          <p:cNvSpPr/>
+          <p:cNvSpPr>
+            <a:spLocks noGrp="1"/>
+          </p:cNvSpPr>
           <p:nvPr>
-            <p:ph idx="100" type="title" hasCustomPrompt="1"/>
+            <p:ph type="title" idx="100" hasCustomPrompt="1"/>
           </p:nvPr>
         </p:nvSpPr>
         <p:spPr>
@@ -11208,7 +11446,7 @@
           <a:bodyPr wrap="square" lIns="0" tIns="0" rIns="0" bIns="0" rtlCol="0" anchor="ctr"/>
           <a:lstStyle/>
           <a:p>
-            <a:pPr algn="l" indent="0" marL="0">
+            <a:pPr marL="0" indent="0" algn="l">
               <a:buNone/>
             </a:pPr>
             <a:r>
@@ -11247,19 +11485,22 @@
         </p:spPr>
         <p:txBody>
           <a:bodyPr/>
-          <a:p/>
+          <a:lstStyle/>
+          <a:p>
+            <a:endParaRPr/>
+          </a:p>
         </p:txBody>
       </p:sp>
       <p:pic>
         <p:nvPicPr>
-          <p:cNvPr id="4" name="icon-warn" descr="preencoded.png">    </p:cNvPr>
+          <p:cNvPr id="4" name="icon-warn" descr="preencoded.png"/>
           <p:cNvPicPr>
             <a:picLocks noChangeAspect="1"/>
           </p:cNvPicPr>
           <p:nvPr/>
         </p:nvPicPr>
         <p:blipFill>
-          <a:blip r:embed="rId1"/>
+          <a:blip r:embed="rId3"/>
           <a:stretch>
             <a:fillRect/>
           </a:stretch>
@@ -11295,7 +11536,7 @@
           <a:bodyPr wrap="square" lIns="0" tIns="0" rIns="0" bIns="0" rtlCol="0" anchor="ctr"/>
           <a:lstStyle/>
           <a:p>
-            <a:pPr indent="0" marL="0">
+            <a:pPr marL="0" indent="0">
               <a:buNone/>
             </a:pPr>
             <a:r>
@@ -11461,19 +11702,22 @@
         </p:spPr>
         <p:txBody>
           <a:bodyPr/>
-          <a:p/>
+          <a:lstStyle/>
+          <a:p>
+            <a:endParaRPr/>
+          </a:p>
         </p:txBody>
       </p:sp>
       <p:pic>
         <p:nvPicPr>
-          <p:cNvPr id="8" name="icon-search" descr="preencoded.png">    </p:cNvPr>
+          <p:cNvPr id="8" name="icon-search" descr="preencoded.png"/>
           <p:cNvPicPr>
             <a:picLocks noChangeAspect="1"/>
           </p:cNvPicPr>
           <p:nvPr/>
         </p:nvPicPr>
         <p:blipFill>
-          <a:blip r:embed="rId2"/>
+          <a:blip r:embed="rId4"/>
           <a:stretch>
             <a:fillRect/>
           </a:stretch>
@@ -11509,7 +11753,7 @@
           <a:bodyPr wrap="square" lIns="0" tIns="0" rIns="0" bIns="0" rtlCol="0" anchor="ctr"/>
           <a:lstStyle/>
           <a:p>
-            <a:pPr indent="0" marL="0">
+            <a:pPr marL="0" indent="0">
               <a:buNone/>
             </a:pPr>
             <a:r>
@@ -11659,7 +11903,10 @@
         </p:spPr>
         <p:txBody>
           <a:bodyPr/>
-          <a:p/>
+          <a:lstStyle/>
+          <a:p>
+            <a:endParaRPr/>
+          </a:p>
         </p:txBody>
       </p:sp>
       <p:sp>
@@ -11683,19 +11930,22 @@
         </p:spPr>
         <p:txBody>
           <a:bodyPr/>
-          <a:p/>
+          <a:lstStyle/>
+          <a:p>
+            <a:endParaRPr/>
+          </a:p>
         </p:txBody>
       </p:sp>
       <p:pic>
         <p:nvPicPr>
-          <p:cNvPr id="13" name="icon-check" descr="preencoded.png">    </p:cNvPr>
+          <p:cNvPr id="13" name="icon-check" descr="preencoded.png"/>
           <p:cNvPicPr>
             <a:picLocks noChangeAspect="1"/>
           </p:cNvPicPr>
           <p:nvPr/>
         </p:nvPicPr>
         <p:blipFill>
-          <a:blip r:embed="rId3"/>
+          <a:blip r:embed="rId5"/>
           <a:stretch>
             <a:fillRect/>
           </a:stretch>
@@ -11731,7 +11981,7 @@
           <a:bodyPr wrap="square" lIns="0" tIns="0" rIns="0" bIns="0" rtlCol="0" anchor="ctr"/>
           <a:lstStyle/>
           <a:p>
-            <a:pPr indent="0" marL="0">
+            <a:pPr marL="0" indent="0">
               <a:buNone/>
             </a:pPr>
             <a:r>
@@ -11741,17 +11991,6 @@
                 </a:solidFill>
               </a:rPr>
               <a:t>Takeaway: a rigorous, time-aware pipeline that works; the current CRM fields are not enough to rank deals.</a:t>
-            </a:r>
-            <a:pPr indent="0" marL="0">
-              <a:buNone/>
-            </a:pPr>
-            <a:r>
-              <a:rPr lang="en-US" sz="1700" dirty="0">
-                <a:solidFill>
-                  <a:schemeClr val="tx1"/>
-                </a:solidFill>
-              </a:rPr>
-              <a:t/>
             </a:r>
             <a:endParaRPr lang="en-US" sz="1700" dirty="0"/>
           </a:p>
@@ -11777,7 +12016,7 @@
           </a:prstGeom>
           <a:extLst>
             <a:ext uri="{C572A759-6A51-4108-AA02-DFA0A04FC94B}">
-              <ma14:wrappingTextBoxFlag xmlns:ma14="http://schemas.microsoft.com/office/mac/drawingml/2011/main" val="0"/>
+              <ma14:wrappingTextBoxFlag xmlns:ma14="http://schemas.microsoft.com/office/mac/drawingml/2011/main" xmlns="" val="0"/>
             </a:ext>
           </a:extLst>
         </p:spPr>
@@ -11795,7 +12034,7 @@
           <a:p>
             <a:pPr algn="r"/>
             <a:fld id="{F7021451-1387-4CA6-816F-3879F97B5CBC}" type="slidenum">
-              <a:rPr b="0" lang="en-US"/>
+              <a:rPr lang="en-US" b="0"/>
               <a:t>17</a:t>
             </a:fld>
             <a:endParaRPr lang="en-US"/>
@@ -11830,9 +12069,11 @@
       <p:sp>
         <p:nvSpPr>
           <p:cNvPr id="2" name="Text 0"/>
-          <p:cNvSpPr/>
+          <p:cNvSpPr>
+            <a:spLocks noGrp="1"/>
+          </p:cNvSpPr>
           <p:nvPr>
-            <p:ph idx="100" type="title" hasCustomPrompt="1"/>
+            <p:ph type="title" idx="100" hasCustomPrompt="1"/>
           </p:nvPr>
         </p:nvSpPr>
         <p:spPr>
@@ -11850,7 +12091,7 @@
           <a:bodyPr wrap="square" lIns="0" tIns="0" rIns="0" bIns="0" rtlCol="0" anchor="b"/>
           <a:lstStyle/>
           <a:p>
-            <a:pPr algn="l" indent="0" marL="0">
+            <a:pPr marL="0" indent="0" algn="l">
               <a:buNone/>
             </a:pPr>
             <a:r>
@@ -11871,9 +12112,11 @@
       <p:sp>
         <p:nvSpPr>
           <p:cNvPr id="3" name="Text 0"/>
-          <p:cNvSpPr/>
+          <p:cNvSpPr>
+            <a:spLocks noGrp="1"/>
+          </p:cNvSpPr>
           <p:nvPr>
-            <p:ph idx="101" type="body" hasCustomPrompt="1"/>
+            <p:ph type="body" idx="101" hasCustomPrompt="1"/>
           </p:nvPr>
         </p:nvSpPr>
         <p:spPr>
@@ -11891,7 +12134,7 @@
           <a:bodyPr wrap="square" lIns="0" tIns="0" rIns="0" bIns="0" rtlCol="0" anchor="t"/>
           <a:lstStyle/>
           <a:p>
-            <a:pPr indent="0" marL="0">
+            <a:pPr marL="0" indent="0">
               <a:buNone/>
             </a:pPr>
             <a:r>
@@ -11905,7 +12148,7 @@
             <a:endParaRPr lang="en-US" sz="1800" dirty="0"/>
           </a:p>
           <a:p>
-            <a:pPr indent="0" marL="0">
+            <a:pPr marL="0" indent="0">
               <a:buNone/>
             </a:pPr>
             <a:r>
@@ -11948,9 +12191,11 @@
       <p:sp>
         <p:nvSpPr>
           <p:cNvPr id="2" name="Text 0"/>
-          <p:cNvSpPr/>
+          <p:cNvSpPr>
+            <a:spLocks noGrp="1"/>
+          </p:cNvSpPr>
           <p:nvPr>
-            <p:ph idx="100" type="title" hasCustomPrompt="1"/>
+            <p:ph type="title" idx="100" hasCustomPrompt="1"/>
           </p:nvPr>
         </p:nvSpPr>
         <p:spPr>
@@ -11968,7 +12213,7 @@
           <a:bodyPr wrap="square" lIns="0" tIns="0" rIns="0" bIns="0" rtlCol="0" anchor="ctr"/>
           <a:lstStyle/>
           <a:p>
-            <a:pPr algn="l" indent="0" marL="0">
+            <a:pPr marL="0" indent="0" algn="l">
               <a:buNone/>
             </a:pPr>
             <a:r>
@@ -12009,7 +12254,10 @@
         </p:spPr>
         <p:txBody>
           <a:bodyPr/>
-          <a:p/>
+          <a:lstStyle/>
+          <a:p>
+            <a:endParaRPr/>
+          </a:p>
         </p:txBody>
       </p:sp>
       <p:sp>
@@ -12033,352 +12281,15 @@
         </p:spPr>
         <p:txBody>
           <a:bodyPr/>
-          <a:p/>
+          <a:lstStyle/>
+          <a:p>
+            <a:endParaRPr/>
+          </a:p>
         </p:txBody>
       </p:sp>
       <p:pic>
         <p:nvPicPr>
-          <p:cNvPr id="5" name="icon-table" descr="preencoded.png">    </p:cNvPr>
-          <p:cNvPicPr>
-            <a:picLocks noChangeAspect="1"/>
-          </p:cNvPicPr>
-          <p:nvPr/>
-        </p:nvPicPr>
-        <p:blipFill>
-          <a:blip r:embed="rId1"/>
-          <a:stretch>
-            <a:fillRect/>
-          </a:stretch>
-        </p:blipFill>
-        <p:spPr>
-          <a:xfrm>
-            <a:off x="1028700" y="2080260"/>
-            <a:ext cx="320040" cy="320040"/>
-          </a:xfrm>
-          <a:prstGeom prst="rect">
-            <a:avLst/>
-          </a:prstGeom>
-        </p:spPr>
-      </p:pic>
-      <p:sp>
-        <p:nvSpPr>
-          <p:cNvPr id="6" name="Text 3"/>
-          <p:cNvSpPr txBox="1"/>
-          <p:nvPr/>
-        </p:nvSpPr>
-        <p:spPr>
-          <a:xfrm>
-            <a:off x="868680" y="2697480"/>
-            <a:ext cx="2651760" cy="365760"/>
-          </a:xfrm>
-          <a:prstGeom prst="rect">
-            <a:avLst/>
-          </a:prstGeom>
-          <a:noFill/>
-          <a:ln/>
-        </p:spPr>
-        <p:txBody>
-          <a:bodyPr wrap="square" lIns="0" tIns="0" rIns="0" bIns="0" rtlCol="0" anchor="t"/>
-          <a:lstStyle/>
-          <a:p>
-            <a:pPr indent="0" marL="0">
-              <a:buNone/>
-            </a:pPr>
-            <a:r>
-              <a:rPr lang="en-US" sz="2000" b="1" dirty="0">
-                <a:solidFill>
-                  <a:schemeClr val="tx2"/>
-                </a:solidFill>
-              </a:rPr>
-              <a:t>Input</a:t>
-            </a:r>
-            <a:endParaRPr lang="en-US" sz="2000" dirty="0"/>
-          </a:p>
-        </p:txBody>
-      </p:sp>
-      <p:sp>
-        <p:nvSpPr>
-          <p:cNvPr id="7" name="Text 4"/>
-          <p:cNvSpPr txBox="1"/>
-          <p:nvPr/>
-        </p:nvSpPr>
-        <p:spPr>
-          <a:xfrm>
-            <a:off x="868680" y="3108960"/>
-            <a:ext cx="2651760" cy="777240"/>
-          </a:xfrm>
-          <a:prstGeom prst="rect">
-            <a:avLst/>
-          </a:prstGeom>
-          <a:noFill/>
-          <a:ln/>
-        </p:spPr>
-        <p:txBody>
-          <a:bodyPr wrap="square" lIns="0" tIns="0" rIns="0" bIns="0" rtlCol="0" anchor="t"/>
-          <a:lstStyle/>
-          <a:p>
-            <a:pPr indent="0" marL="0">
-              <a:buNone/>
-            </a:pPr>
-            <a:r>
-              <a:rPr lang="en-US" sz="1500" dirty="0">
-                <a:solidFill>
-                  <a:schemeClr val="tx1"/>
-                </a:solidFill>
-              </a:rPr>
-              <a:t>Four CRM tables: sales pipeline, accounts, products, sales teams</a:t>
-            </a:r>
-            <a:endParaRPr lang="en-US" sz="1500" dirty="0"/>
-          </a:p>
-        </p:txBody>
-      </p:sp>
-      <p:sp>
-        <p:nvSpPr>
-          <p:cNvPr id="8" name="goal-arrow-0"/>
-          <p:cNvSpPr/>
-          <p:nvPr/>
-        </p:nvSpPr>
-        <p:spPr>
-          <a:xfrm>
-            <a:off x="3959352" y="2606040"/>
-            <a:ext cx="365760" cy="365760"/>
-          </a:xfrm>
-          <a:prstGeom prst="rightArrow">
-            <a:avLst/>
-          </a:prstGeom>
-          <a:solidFill>
-            <a:schemeClr val="accent2"/>
-          </a:solidFill>
-          <a:ln/>
-        </p:spPr>
-        <p:txBody>
-          <a:bodyPr/>
-          <a:p/>
-        </p:txBody>
-      </p:sp>
-      <p:sp>
-        <p:nvSpPr>
-          <p:cNvPr id="9" name="goal-card-1"/>
-          <p:cNvSpPr/>
-          <p:nvPr/>
-        </p:nvSpPr>
-        <p:spPr>
-          <a:xfrm>
-            <a:off x="4434840" y="1600200"/>
-            <a:ext cx="3291840" cy="2377440"/>
-          </a:xfrm>
-          <a:prstGeom prst="roundRect">
-            <a:avLst>
-              <a:gd name="adj" fmla="val 3077"/>
-            </a:avLst>
-          </a:prstGeom>
-          <a:solidFill>
-            <a:schemeClr val="bg2"/>
-          </a:solidFill>
-          <a:ln/>
-        </p:spPr>
-        <p:txBody>
-          <a:bodyPr/>
-          <a:p/>
-        </p:txBody>
-      </p:sp>
-      <p:sp>
-        <p:nvSpPr>
-          <p:cNvPr id="10" name="icon-bg-brain"/>
-          <p:cNvSpPr/>
-          <p:nvPr/>
-        </p:nvSpPr>
-        <p:spPr>
-          <a:xfrm>
-            <a:off x="4754880" y="1920240"/>
-            <a:ext cx="640080" cy="640080"/>
-          </a:xfrm>
-          <a:prstGeom prst="ellipse">
-            <a:avLst/>
-          </a:prstGeom>
-          <a:solidFill>
-            <a:schemeClr val="accent1"/>
-          </a:solidFill>
-          <a:ln/>
-        </p:spPr>
-        <p:txBody>
-          <a:bodyPr/>
-          <a:p/>
-        </p:txBody>
-      </p:sp>
-      <p:pic>
-        <p:nvPicPr>
-          <p:cNvPr id="11" name="icon-brain" descr="preencoded.png">    </p:cNvPr>
-          <p:cNvPicPr>
-            <a:picLocks noChangeAspect="1"/>
-          </p:cNvPicPr>
-          <p:nvPr/>
-        </p:nvPicPr>
-        <p:blipFill>
-          <a:blip r:embed="rId2"/>
-          <a:stretch>
-            <a:fillRect/>
-          </a:stretch>
-        </p:blipFill>
-        <p:spPr>
-          <a:xfrm>
-            <a:off x="4914900" y="2080260"/>
-            <a:ext cx="320040" cy="320040"/>
-          </a:xfrm>
-          <a:prstGeom prst="rect">
-            <a:avLst/>
-          </a:prstGeom>
-        </p:spPr>
-      </p:pic>
-      <p:sp>
-        <p:nvSpPr>
-          <p:cNvPr id="12" name="Text 8"/>
-          <p:cNvSpPr txBox="1"/>
-          <p:nvPr/>
-        </p:nvSpPr>
-        <p:spPr>
-          <a:xfrm>
-            <a:off x="4754880" y="2697480"/>
-            <a:ext cx="2651760" cy="365760"/>
-          </a:xfrm>
-          <a:prstGeom prst="rect">
-            <a:avLst/>
-          </a:prstGeom>
-          <a:noFill/>
-          <a:ln/>
-        </p:spPr>
-        <p:txBody>
-          <a:bodyPr wrap="square" lIns="0" tIns="0" rIns="0" bIns="0" rtlCol="0" anchor="t"/>
-          <a:lstStyle/>
-          <a:p>
-            <a:pPr indent="0" marL="0">
-              <a:buNone/>
-            </a:pPr>
-            <a:r>
-              <a:rPr lang="en-US" sz="2000" b="1" dirty="0">
-                <a:solidFill>
-                  <a:schemeClr val="tx2"/>
-                </a:solidFill>
-              </a:rPr>
-              <a:t>Models</a:t>
-            </a:r>
-            <a:endParaRPr lang="en-US" sz="2000" dirty="0"/>
-          </a:p>
-        </p:txBody>
-      </p:sp>
-      <p:sp>
-        <p:nvSpPr>
-          <p:cNvPr id="13" name="Text 9"/>
-          <p:cNvSpPr txBox="1"/>
-          <p:nvPr/>
-        </p:nvSpPr>
-        <p:spPr>
-          <a:xfrm>
-            <a:off x="4754880" y="3108960"/>
-            <a:ext cx="2651760" cy="777240"/>
-          </a:xfrm>
-          <a:prstGeom prst="rect">
-            <a:avLst/>
-          </a:prstGeom>
-          <a:noFill/>
-          <a:ln/>
-        </p:spPr>
-        <p:txBody>
-          <a:bodyPr wrap="square" lIns="0" tIns="0" rIns="0" bIns="0" rtlCol="0" anchor="t"/>
-          <a:lstStyle/>
-          <a:p>
-            <a:pPr indent="0" marL="0">
-              <a:buNone/>
-            </a:pPr>
-            <a:r>
-              <a:rPr lang="en-US" sz="1500" dirty="0">
-                <a:solidFill>
-                  <a:schemeClr val="tx1"/>
-                </a:solidFill>
-              </a:rPr>
-              <a:t>Dummy control, Logistic Regression, Random Forest, MLP, TabNet</a:t>
-            </a:r>
-            <a:endParaRPr lang="en-US" sz="1500" dirty="0"/>
-          </a:p>
-        </p:txBody>
-      </p:sp>
-      <p:sp>
-        <p:nvSpPr>
-          <p:cNvPr id="14" name="goal-arrow-1"/>
-          <p:cNvSpPr/>
-          <p:nvPr/>
-        </p:nvSpPr>
-        <p:spPr>
-          <a:xfrm>
-            <a:off x="7845552" y="2606040"/>
-            <a:ext cx="365760" cy="365760"/>
-          </a:xfrm>
-          <a:prstGeom prst="rightArrow">
-            <a:avLst/>
-          </a:prstGeom>
-          <a:solidFill>
-            <a:schemeClr val="accent2"/>
-          </a:solidFill>
-          <a:ln/>
-        </p:spPr>
-        <p:txBody>
-          <a:bodyPr/>
-          <a:p/>
-        </p:txBody>
-      </p:sp>
-      <p:sp>
-        <p:nvSpPr>
-          <p:cNvPr id="15" name="goal-card-2"/>
-          <p:cNvSpPr/>
-          <p:nvPr/>
-        </p:nvSpPr>
-        <p:spPr>
-          <a:xfrm>
-            <a:off x="8321040" y="1600200"/>
-            <a:ext cx="3291840" cy="2377440"/>
-          </a:xfrm>
-          <a:prstGeom prst="roundRect">
-            <a:avLst>
-              <a:gd name="adj" fmla="val 3077"/>
-            </a:avLst>
-          </a:prstGeom>
-          <a:solidFill>
-            <a:schemeClr val="bg2"/>
-          </a:solidFill>
-          <a:ln/>
-        </p:spPr>
-        <p:txBody>
-          <a:bodyPr/>
-          <a:p/>
-        </p:txBody>
-      </p:sp>
-      <p:sp>
-        <p:nvSpPr>
-          <p:cNvPr id="16" name="icon-bg-chart"/>
-          <p:cNvSpPr/>
-          <p:nvPr/>
-        </p:nvSpPr>
-        <p:spPr>
-          <a:xfrm>
-            <a:off x="8641080" y="1920240"/>
-            <a:ext cx="640080" cy="640080"/>
-          </a:xfrm>
-          <a:prstGeom prst="ellipse">
-            <a:avLst/>
-          </a:prstGeom>
-          <a:solidFill>
-            <a:schemeClr val="accent1"/>
-          </a:solidFill>
-          <a:ln/>
-        </p:spPr>
-        <p:txBody>
-          <a:bodyPr/>
-          <a:p/>
-        </p:txBody>
-      </p:sp>
-      <p:pic>
-        <p:nvPicPr>
-          <p:cNvPr id="17" name="icon-chart" descr="preencoded.png">    </p:cNvPr>
+          <p:cNvPr id="5" name="icon-table" descr="preencoded.png"/>
           <p:cNvPicPr>
             <a:picLocks noChangeAspect="1"/>
           </p:cNvPicPr>
@@ -12392,6 +12303,364 @@
         </p:blipFill>
         <p:spPr>
           <a:xfrm>
+            <a:off x="1028700" y="2080260"/>
+            <a:ext cx="320040" cy="320040"/>
+          </a:xfrm>
+          <a:prstGeom prst="rect">
+            <a:avLst/>
+          </a:prstGeom>
+        </p:spPr>
+      </p:pic>
+      <p:sp>
+        <p:nvSpPr>
+          <p:cNvPr id="6" name="Text 3"/>
+          <p:cNvSpPr txBox="1"/>
+          <p:nvPr/>
+        </p:nvSpPr>
+        <p:spPr>
+          <a:xfrm>
+            <a:off x="868680" y="2697480"/>
+            <a:ext cx="2651760" cy="365760"/>
+          </a:xfrm>
+          <a:prstGeom prst="rect">
+            <a:avLst/>
+          </a:prstGeom>
+          <a:noFill/>
+          <a:ln/>
+        </p:spPr>
+        <p:txBody>
+          <a:bodyPr wrap="square" lIns="0" tIns="0" rIns="0" bIns="0" rtlCol="0" anchor="t"/>
+          <a:lstStyle/>
+          <a:p>
+            <a:pPr marL="0" indent="0">
+              <a:buNone/>
+            </a:pPr>
+            <a:r>
+              <a:rPr lang="en-US" sz="2000" b="1" dirty="0">
+                <a:solidFill>
+                  <a:schemeClr val="tx2"/>
+                </a:solidFill>
+              </a:rPr>
+              <a:t>Input</a:t>
+            </a:r>
+            <a:endParaRPr lang="en-US" sz="2000" dirty="0"/>
+          </a:p>
+        </p:txBody>
+      </p:sp>
+      <p:sp>
+        <p:nvSpPr>
+          <p:cNvPr id="7" name="Text 4"/>
+          <p:cNvSpPr txBox="1"/>
+          <p:nvPr/>
+        </p:nvSpPr>
+        <p:spPr>
+          <a:xfrm>
+            <a:off x="868680" y="3108960"/>
+            <a:ext cx="2651760" cy="777240"/>
+          </a:xfrm>
+          <a:prstGeom prst="rect">
+            <a:avLst/>
+          </a:prstGeom>
+          <a:noFill/>
+          <a:ln/>
+        </p:spPr>
+        <p:txBody>
+          <a:bodyPr wrap="square" lIns="0" tIns="0" rIns="0" bIns="0" rtlCol="0" anchor="t"/>
+          <a:lstStyle/>
+          <a:p>
+            <a:pPr marL="0" indent="0">
+              <a:buNone/>
+            </a:pPr>
+            <a:r>
+              <a:rPr lang="en-US" sz="1500" dirty="0">
+                <a:solidFill>
+                  <a:schemeClr val="tx1"/>
+                </a:solidFill>
+              </a:rPr>
+              <a:t>Four CRM tables: sales pipeline, accounts, products, sales teams</a:t>
+            </a:r>
+            <a:endParaRPr lang="en-US" sz="1500" dirty="0"/>
+          </a:p>
+        </p:txBody>
+      </p:sp>
+      <p:sp>
+        <p:nvSpPr>
+          <p:cNvPr id="8" name="goal-arrow-0"/>
+          <p:cNvSpPr/>
+          <p:nvPr/>
+        </p:nvSpPr>
+        <p:spPr>
+          <a:xfrm>
+            <a:off x="3959352" y="2606040"/>
+            <a:ext cx="365760" cy="365760"/>
+          </a:xfrm>
+          <a:prstGeom prst="rightArrow">
+            <a:avLst/>
+          </a:prstGeom>
+          <a:solidFill>
+            <a:schemeClr val="accent2"/>
+          </a:solidFill>
+          <a:ln/>
+        </p:spPr>
+        <p:txBody>
+          <a:bodyPr/>
+          <a:lstStyle/>
+          <a:p>
+            <a:endParaRPr/>
+          </a:p>
+        </p:txBody>
+      </p:sp>
+      <p:sp>
+        <p:nvSpPr>
+          <p:cNvPr id="9" name="goal-card-1"/>
+          <p:cNvSpPr/>
+          <p:nvPr/>
+        </p:nvSpPr>
+        <p:spPr>
+          <a:xfrm>
+            <a:off x="4434840" y="1600200"/>
+            <a:ext cx="3291840" cy="2377440"/>
+          </a:xfrm>
+          <a:prstGeom prst="roundRect">
+            <a:avLst>
+              <a:gd name="adj" fmla="val 3077"/>
+            </a:avLst>
+          </a:prstGeom>
+          <a:solidFill>
+            <a:schemeClr val="bg2"/>
+          </a:solidFill>
+          <a:ln/>
+        </p:spPr>
+        <p:txBody>
+          <a:bodyPr/>
+          <a:lstStyle/>
+          <a:p>
+            <a:endParaRPr/>
+          </a:p>
+        </p:txBody>
+      </p:sp>
+      <p:sp>
+        <p:nvSpPr>
+          <p:cNvPr id="10" name="icon-bg-brain"/>
+          <p:cNvSpPr/>
+          <p:nvPr/>
+        </p:nvSpPr>
+        <p:spPr>
+          <a:xfrm>
+            <a:off x="4754880" y="1920240"/>
+            <a:ext cx="640080" cy="640080"/>
+          </a:xfrm>
+          <a:prstGeom prst="ellipse">
+            <a:avLst/>
+          </a:prstGeom>
+          <a:solidFill>
+            <a:schemeClr val="accent1"/>
+          </a:solidFill>
+          <a:ln/>
+        </p:spPr>
+        <p:txBody>
+          <a:bodyPr/>
+          <a:lstStyle/>
+          <a:p>
+            <a:endParaRPr/>
+          </a:p>
+        </p:txBody>
+      </p:sp>
+      <p:pic>
+        <p:nvPicPr>
+          <p:cNvPr id="11" name="icon-brain" descr="preencoded.png"/>
+          <p:cNvPicPr>
+            <a:picLocks noChangeAspect="1"/>
+          </p:cNvPicPr>
+          <p:nvPr/>
+        </p:nvPicPr>
+        <p:blipFill>
+          <a:blip r:embed="rId4"/>
+          <a:stretch>
+            <a:fillRect/>
+          </a:stretch>
+        </p:blipFill>
+        <p:spPr>
+          <a:xfrm>
+            <a:off x="4914900" y="2080260"/>
+            <a:ext cx="320040" cy="320040"/>
+          </a:xfrm>
+          <a:prstGeom prst="rect">
+            <a:avLst/>
+          </a:prstGeom>
+        </p:spPr>
+      </p:pic>
+      <p:sp>
+        <p:nvSpPr>
+          <p:cNvPr id="12" name="Text 8"/>
+          <p:cNvSpPr txBox="1"/>
+          <p:nvPr/>
+        </p:nvSpPr>
+        <p:spPr>
+          <a:xfrm>
+            <a:off x="4754880" y="2697480"/>
+            <a:ext cx="2651760" cy="365760"/>
+          </a:xfrm>
+          <a:prstGeom prst="rect">
+            <a:avLst/>
+          </a:prstGeom>
+          <a:noFill/>
+          <a:ln/>
+        </p:spPr>
+        <p:txBody>
+          <a:bodyPr wrap="square" lIns="0" tIns="0" rIns="0" bIns="0" rtlCol="0" anchor="t"/>
+          <a:lstStyle/>
+          <a:p>
+            <a:pPr marL="0" indent="0">
+              <a:buNone/>
+            </a:pPr>
+            <a:r>
+              <a:rPr lang="en-US" sz="2000" b="1" dirty="0">
+                <a:solidFill>
+                  <a:schemeClr val="tx2"/>
+                </a:solidFill>
+              </a:rPr>
+              <a:t>Models</a:t>
+            </a:r>
+            <a:endParaRPr lang="en-US" sz="2000" dirty="0"/>
+          </a:p>
+        </p:txBody>
+      </p:sp>
+      <p:sp>
+        <p:nvSpPr>
+          <p:cNvPr id="13" name="Text 9"/>
+          <p:cNvSpPr txBox="1"/>
+          <p:nvPr/>
+        </p:nvSpPr>
+        <p:spPr>
+          <a:xfrm>
+            <a:off x="4754880" y="3108960"/>
+            <a:ext cx="2651760" cy="777240"/>
+          </a:xfrm>
+          <a:prstGeom prst="rect">
+            <a:avLst/>
+          </a:prstGeom>
+          <a:noFill/>
+          <a:ln/>
+        </p:spPr>
+        <p:txBody>
+          <a:bodyPr wrap="square" lIns="0" tIns="0" rIns="0" bIns="0" rtlCol="0" anchor="t"/>
+          <a:lstStyle/>
+          <a:p>
+            <a:pPr marL="0" indent="0">
+              <a:buNone/>
+            </a:pPr>
+            <a:r>
+              <a:rPr lang="en-US" sz="1500" dirty="0">
+                <a:solidFill>
+                  <a:schemeClr val="tx1"/>
+                </a:solidFill>
+              </a:rPr>
+              <a:t>Dummy control, Logistic Regression, Random Forest, MLP, TabNet</a:t>
+            </a:r>
+            <a:endParaRPr lang="en-US" sz="1500" dirty="0"/>
+          </a:p>
+        </p:txBody>
+      </p:sp>
+      <p:sp>
+        <p:nvSpPr>
+          <p:cNvPr id="14" name="goal-arrow-1"/>
+          <p:cNvSpPr/>
+          <p:nvPr/>
+        </p:nvSpPr>
+        <p:spPr>
+          <a:xfrm>
+            <a:off x="7845552" y="2606040"/>
+            <a:ext cx="365760" cy="365760"/>
+          </a:xfrm>
+          <a:prstGeom prst="rightArrow">
+            <a:avLst/>
+          </a:prstGeom>
+          <a:solidFill>
+            <a:schemeClr val="accent2"/>
+          </a:solidFill>
+          <a:ln/>
+        </p:spPr>
+        <p:txBody>
+          <a:bodyPr/>
+          <a:lstStyle/>
+          <a:p>
+            <a:endParaRPr/>
+          </a:p>
+        </p:txBody>
+      </p:sp>
+      <p:sp>
+        <p:nvSpPr>
+          <p:cNvPr id="15" name="goal-card-2"/>
+          <p:cNvSpPr/>
+          <p:nvPr/>
+        </p:nvSpPr>
+        <p:spPr>
+          <a:xfrm>
+            <a:off x="8321040" y="1600200"/>
+            <a:ext cx="3291840" cy="2377440"/>
+          </a:xfrm>
+          <a:prstGeom prst="roundRect">
+            <a:avLst>
+              <a:gd name="adj" fmla="val 3077"/>
+            </a:avLst>
+          </a:prstGeom>
+          <a:solidFill>
+            <a:schemeClr val="bg2"/>
+          </a:solidFill>
+          <a:ln/>
+        </p:spPr>
+        <p:txBody>
+          <a:bodyPr/>
+          <a:lstStyle/>
+          <a:p>
+            <a:endParaRPr/>
+          </a:p>
+        </p:txBody>
+      </p:sp>
+      <p:sp>
+        <p:nvSpPr>
+          <p:cNvPr id="16" name="icon-bg-chart"/>
+          <p:cNvSpPr/>
+          <p:nvPr/>
+        </p:nvSpPr>
+        <p:spPr>
+          <a:xfrm>
+            <a:off x="8641080" y="1920240"/>
+            <a:ext cx="640080" cy="640080"/>
+          </a:xfrm>
+          <a:prstGeom prst="ellipse">
+            <a:avLst/>
+          </a:prstGeom>
+          <a:solidFill>
+            <a:schemeClr val="accent1"/>
+          </a:solidFill>
+          <a:ln/>
+        </p:spPr>
+        <p:txBody>
+          <a:bodyPr/>
+          <a:lstStyle/>
+          <a:p>
+            <a:endParaRPr/>
+          </a:p>
+        </p:txBody>
+      </p:sp>
+      <p:pic>
+        <p:nvPicPr>
+          <p:cNvPr id="17" name="icon-chart" descr="preencoded.png"/>
+          <p:cNvPicPr>
+            <a:picLocks noChangeAspect="1"/>
+          </p:cNvPicPr>
+          <p:nvPr/>
+        </p:nvPicPr>
+        <p:blipFill>
+          <a:blip r:embed="rId5"/>
+          <a:stretch>
+            <a:fillRect/>
+          </a:stretch>
+        </p:blipFill>
+        <p:spPr>
+          <a:xfrm>
             <a:off x="8801100" y="2080260"/>
             <a:ext cx="320040" cy="320040"/>
           </a:xfrm>
@@ -12421,7 +12690,7 @@
           <a:bodyPr wrap="square" lIns="0" tIns="0" rIns="0" bIns="0" rtlCol="0" anchor="t"/>
           <a:lstStyle/>
           <a:p>
-            <a:pPr indent="0" marL="0">
+            <a:pPr marL="0" indent="0">
               <a:buNone/>
             </a:pPr>
             <a:r>
@@ -12457,7 +12726,7 @@
           <a:bodyPr wrap="square" lIns="0" tIns="0" rIns="0" bIns="0" rtlCol="0" anchor="t"/>
           <a:lstStyle/>
           <a:p>
-            <a:pPr indent="0" marL="0">
+            <a:pPr marL="0" indent="0">
               <a:buNone/>
             </a:pPr>
             <a:r>
@@ -12495,7 +12764,10 @@
         </p:spPr>
         <p:txBody>
           <a:bodyPr/>
-          <a:p/>
+          <a:lstStyle/>
+          <a:p>
+            <a:endParaRPr/>
+          </a:p>
         </p:txBody>
       </p:sp>
       <p:sp>
@@ -12519,7 +12791,7 @@
           <a:bodyPr wrap="square" lIns="0" tIns="0" rIns="0" bIns="0" rtlCol="0" anchor="t"/>
           <a:lstStyle/>
           <a:p>
-            <a:pPr indent="0" marL="0">
+            <a:pPr marL="0" indent="0">
               <a:buNone/>
             </a:pPr>
             <a:r>
@@ -12555,7 +12827,7 @@
           <a:bodyPr wrap="square" lIns="0" tIns="0" rIns="0" bIns="0" rtlCol="0" anchor="t"/>
           <a:lstStyle/>
           <a:p>
-            <a:pPr indent="0" marL="0">
+            <a:pPr marL="0" indent="0">
               <a:spcAft>
                 <a:spcPts val="600"/>
               </a:spcAft>
@@ -12569,30 +12841,24 @@
               </a:rPr>
               <a:t>A · Original Maven CRM data: </a:t>
             </a:r>
-            <a:pPr indent="0" marL="0">
+            <a:r>
+              <a:rPr lang="en-US" sz="1600" dirty="0">
+                <a:solidFill>
+                  <a:schemeClr val="tx1"/>
+                </a:solidFill>
+              </a:rPr>
+              <a:t>the project's reported results.</a:t>
+            </a:r>
+            <a:endParaRPr lang="en-US" sz="1600" dirty="0"/>
+          </a:p>
+          <a:p>
+            <a:pPr marL="0" indent="0">
               <a:spcAft>
                 <a:spcPts val="600"/>
               </a:spcAft>
               <a:buNone/>
             </a:pPr>
             <a:r>
-              <a:rPr lang="en-US" sz="1600" dirty="0">
-                <a:solidFill>
-                  <a:schemeClr val="tx1"/>
-                </a:solidFill>
-              </a:rPr>
-              <a:t>the project's reported results.</a:t>
-            </a:r>
-            <a:endParaRPr lang="en-US" sz="1600" dirty="0"/>
-          </a:p>
-          <a:p>
-            <a:pPr indent="0" marL="0">
-              <a:spcAft>
-                <a:spcPts val="600"/>
-              </a:spcAft>
-              <a:buNone/>
-            </a:pPr>
-            <a:r>
               <a:rPr lang="en-US" sz="1600" b="1" dirty="0">
                 <a:solidFill>
                   <a:schemeClr val="accent2"/>
@@ -12600,12 +12866,6 @@
               </a:rPr>
               <a:t>B · Simulated data with a known formula: </a:t>
             </a:r>
-            <a:pPr indent="0" marL="0">
-              <a:spcAft>
-                <a:spcPts val="600"/>
-              </a:spcAft>
-              <a:buNone/>
-            </a:pPr>
             <a:r>
               <a:rPr lang="en-US" sz="1600" dirty="0">
                 <a:solidFill>
@@ -12638,7 +12898,7 @@
           </a:prstGeom>
           <a:extLst>
             <a:ext uri="{C572A759-6A51-4108-AA02-DFA0A04FC94B}">
-              <ma14:wrappingTextBoxFlag xmlns:ma14="http://schemas.microsoft.com/office/mac/drawingml/2011/main" val="0"/>
+              <ma14:wrappingTextBoxFlag xmlns:ma14="http://schemas.microsoft.com/office/mac/drawingml/2011/main" xmlns="" val="0"/>
             </a:ext>
           </a:extLst>
         </p:spPr>
@@ -12656,7 +12916,7 @@
           <a:p>
             <a:pPr algn="r"/>
             <a:fld id="{F7021451-1387-4CA6-816F-3879F97B5CBC}" type="slidenum">
-              <a:rPr b="0" lang="en-US"/>
+              <a:rPr lang="en-US" b="0"/>
               <a:t>2</a:t>
             </a:fld>
             <a:endParaRPr lang="en-US"/>
@@ -12691,9 +12951,11 @@
       <p:sp>
         <p:nvSpPr>
           <p:cNvPr id="2" name="Text 0"/>
-          <p:cNvSpPr/>
+          <p:cNvSpPr>
+            <a:spLocks noGrp="1"/>
+          </p:cNvSpPr>
           <p:nvPr>
-            <p:ph idx="100" type="title" hasCustomPrompt="1"/>
+            <p:ph type="title" idx="100" hasCustomPrompt="1"/>
           </p:nvPr>
         </p:nvSpPr>
         <p:spPr>
@@ -12711,7 +12973,7 @@
           <a:bodyPr wrap="square" lIns="0" tIns="0" rIns="0" bIns="0" rtlCol="0" anchor="ctr"/>
           <a:lstStyle/>
           <a:p>
-            <a:pPr algn="l" indent="0" marL="0">
+            <a:pPr marL="0" indent="0" algn="l">
               <a:buNone/>
             </a:pPr>
             <a:r>
@@ -12750,7 +13012,7 @@
           <a:bodyPr wrap="square" lIns="0" tIns="0" rIns="0" bIns="0" rtlCol="0" anchor="b"/>
           <a:lstStyle/>
           <a:p>
-            <a:pPr indent="0" marL="0">
+            <a:pPr marL="0" indent="0">
               <a:buNone/>
             </a:pPr>
             <a:r>
@@ -12789,7 +13051,7 @@
           <a:bodyPr wrap="square" lIns="0" tIns="0" rIns="0" bIns="0" rtlCol="0" anchor="t"/>
           <a:lstStyle/>
           <a:p>
-            <a:pPr indent="0" marL="0">
+            <a:pPr marL="0" indent="0">
               <a:buNone/>
             </a:pPr>
             <a:r>
@@ -12825,7 +13087,7 @@
           <a:bodyPr wrap="square" lIns="0" tIns="0" rIns="0" bIns="0" rtlCol="0" anchor="b"/>
           <a:lstStyle/>
           <a:p>
-            <a:pPr indent="0" marL="0">
+            <a:pPr marL="0" indent="0">
               <a:buNone/>
             </a:pPr>
             <a:r>
@@ -12864,7 +13126,7 @@
           <a:bodyPr wrap="square" lIns="0" tIns="0" rIns="0" bIns="0" rtlCol="0" anchor="t"/>
           <a:lstStyle/>
           <a:p>
-            <a:pPr indent="0" marL="0">
+            <a:pPr marL="0" indent="0">
               <a:buNone/>
             </a:pPr>
             <a:r>
@@ -12900,7 +13162,7 @@
           <a:bodyPr wrap="square" lIns="0" tIns="0" rIns="0" bIns="0" rtlCol="0" anchor="b"/>
           <a:lstStyle/>
           <a:p>
-            <a:pPr indent="0" marL="0">
+            <a:pPr marL="0" indent="0">
               <a:buNone/>
             </a:pPr>
             <a:r>
@@ -12939,7 +13201,7 @@
           <a:bodyPr wrap="square" lIns="0" tIns="0" rIns="0" bIns="0" rtlCol="0" anchor="t"/>
           <a:lstStyle/>
           <a:p>
-            <a:pPr indent="0" marL="0">
+            <a:pPr marL="0" indent="0">
               <a:buNone/>
             </a:pPr>
             <a:r>
@@ -12975,7 +13237,7 @@
           <a:bodyPr wrap="square" lIns="0" tIns="0" rIns="0" bIns="0" rtlCol="0" anchor="b"/>
           <a:lstStyle/>
           <a:p>
-            <a:pPr indent="0" marL="0">
+            <a:pPr marL="0" indent="0">
               <a:buNone/>
             </a:pPr>
             <a:r>
@@ -13014,7 +13276,7 @@
           <a:bodyPr wrap="square" lIns="0" tIns="0" rIns="0" bIns="0" rtlCol="0" anchor="t"/>
           <a:lstStyle/>
           <a:p>
-            <a:pPr indent="0" marL="0">
+            <a:pPr marL="0" indent="0">
               <a:buNone/>
             </a:pPr>
             <a:r>
@@ -13050,7 +13312,7 @@
           <a:bodyPr wrap="square" lIns="0" tIns="0" rIns="0" bIns="0" rtlCol="0" anchor="t"/>
           <a:lstStyle/>
           <a:p>
-            <a:pPr indent="0" marL="0">
+            <a:pPr marL="0" indent="0">
               <a:buNone/>
             </a:pPr>
             <a:r>
@@ -13059,48 +13321,37 @@
                   <a:schemeClr val="tx1"/>
                 </a:solidFill>
               </a:rPr>
-              <a:t>Train only on 6,711 closed deals (63% Won). </a:t>
-            </a:r>
-            <a:pPr indent="0" marL="0">
+              <a:t>Train only on 6,711 closed deals (63% Won). Open deals are scored, never labelled Lost.</a:t>
+            </a:r>
+            <a:endParaRPr lang="en-US" sz="1600" dirty="0"/>
+          </a:p>
+        </p:txBody>
+      </p:sp>
+      <p:sp>
+        <p:nvSpPr>
+          <p:cNvPr id="12" name="Text 10"/>
+          <p:cNvSpPr txBox="1"/>
+          <p:nvPr/>
+        </p:nvSpPr>
+        <p:spPr>
+          <a:xfrm>
+            <a:off x="548640" y="5669280"/>
+            <a:ext cx="5303520" cy="457200"/>
+          </a:xfrm>
+          <a:prstGeom prst="rect">
+            <a:avLst/>
+          </a:prstGeom>
+          <a:noFill/>
+          <a:ln/>
+        </p:spPr>
+        <p:txBody>
+          <a:bodyPr wrap="square" lIns="0" tIns="0" rIns="0" bIns="0" rtlCol="0" anchor="t"/>
+          <a:lstStyle/>
+          <a:p>
+            <a:pPr marL="0" indent="0">
               <a:buNone/>
             </a:pPr>
             <a:r>
-              <a:rPr lang="en-US" sz="1600" dirty="0">
-                <a:solidFill>
-                  <a:schemeClr val="tx1"/>
-                </a:solidFill>
-              </a:rPr>
-              <a:t>Open deals are scored, never labelled Lost.</a:t>
-            </a:r>
-            <a:endParaRPr lang="en-US" sz="1600" dirty="0"/>
-          </a:p>
-        </p:txBody>
-      </p:sp>
-      <p:sp>
-        <p:nvSpPr>
-          <p:cNvPr id="12" name="Text 10"/>
-          <p:cNvSpPr txBox="1"/>
-          <p:nvPr/>
-        </p:nvSpPr>
-        <p:spPr>
-          <a:xfrm>
-            <a:off x="548640" y="5669280"/>
-            <a:ext cx="5303520" cy="457200"/>
-          </a:xfrm>
-          <a:prstGeom prst="rect">
-            <a:avLst/>
-          </a:prstGeom>
-          <a:noFill/>
-          <a:ln/>
-        </p:spPr>
-        <p:txBody>
-          <a:bodyPr wrap="square" lIns="0" tIns="0" rIns="0" bIns="0" rtlCol="0" anchor="t"/>
-          <a:lstStyle/>
-          <a:p>
-            <a:pPr indent="0" marL="0">
-              <a:buNone/>
-            </a:pPr>
-            <a:r>
               <a:rPr lang="en-US" sz="1100" dirty="0">
                 <a:solidFill>
                   <a:schemeClr val="accent4"/>
@@ -13114,7 +13365,7 @@
       </p:sp>
       <p:graphicFrame>
         <p:nvGraphicFramePr>
-          <p:cNvPr id="13" name="stage-chart" descr=""/>
+          <p:cNvPr id="13" name="stage-chart"/>
           <p:cNvGraphicFramePr/>
           <p:nvPr/>
         </p:nvGraphicFramePr>
@@ -13122,9 +13373,9 @@
           <a:off x="6309360" y="1325880"/>
           <a:ext cx="5303520" cy="4754880"/>
         </p:xfrm>
-        <a:graphic xmlns:a="http://schemas.openxmlformats.org/drawingml/2006/main">
+        <a:graphic>
           <a:graphicData uri="http://schemas.openxmlformats.org/drawingml/2006/chart">
-            <c:chart xmlns:c="http://schemas.openxmlformats.org/drawingml/2006/chart" r:id="rId1"/>
+            <c:chart xmlns:c="http://schemas.openxmlformats.org/drawingml/2006/chart" xmlns:r="http://schemas.openxmlformats.org/officeDocument/2006/relationships" r:id="rId3"/>
           </a:graphicData>
         </a:graphic>
       </p:graphicFrame>
@@ -13148,7 +13399,7 @@
           </a:prstGeom>
           <a:extLst>
             <a:ext uri="{C572A759-6A51-4108-AA02-DFA0A04FC94B}">
-              <ma14:wrappingTextBoxFlag xmlns:ma14="http://schemas.microsoft.com/office/mac/drawingml/2011/main" val="0"/>
+              <ma14:wrappingTextBoxFlag xmlns:ma14="http://schemas.microsoft.com/office/mac/drawingml/2011/main" xmlns="" val="0"/>
             </a:ext>
           </a:extLst>
         </p:spPr>
@@ -13166,7 +13417,7 @@
           <a:p>
             <a:pPr algn="r"/>
             <a:fld id="{F7021451-1387-4CA6-816F-3879F97B5CBC}" type="slidenum">
-              <a:rPr b="0" lang="en-US"/>
+              <a:rPr lang="en-US" b="0"/>
               <a:t>3</a:t>
             </a:fld>
             <a:endParaRPr lang="en-US"/>
@@ -13201,9 +13452,11 @@
       <p:sp>
         <p:nvSpPr>
           <p:cNvPr id="2" name="Text 0"/>
-          <p:cNvSpPr/>
+          <p:cNvSpPr>
+            <a:spLocks noGrp="1"/>
+          </p:cNvSpPr>
           <p:nvPr>
-            <p:ph idx="100" type="title" hasCustomPrompt="1"/>
+            <p:ph type="title" idx="100" hasCustomPrompt="1"/>
           </p:nvPr>
         </p:nvSpPr>
         <p:spPr>
@@ -13221,7 +13474,7 @@
           <a:bodyPr wrap="square" lIns="0" tIns="0" rIns="0" bIns="0" rtlCol="0" anchor="ctr"/>
           <a:lstStyle/>
           <a:p>
-            <a:pPr algn="l" indent="0" marL="0">
+            <a:pPr marL="0" indent="0" algn="l">
               <a:buNone/>
             </a:pPr>
             <a:r>
@@ -13262,7 +13515,10 @@
         </p:spPr>
         <p:txBody>
           <a:bodyPr/>
-          <a:p/>
+          <a:lstStyle/>
+          <a:p>
+            <a:endParaRPr/>
+          </a:p>
         </p:txBody>
       </p:sp>
       <p:sp>
@@ -13286,7 +13542,7 @@
           <a:bodyPr wrap="square" lIns="0" tIns="0" rIns="0" bIns="0" rtlCol="0" anchor="ctr"/>
           <a:lstStyle/>
           <a:p>
-            <a:pPr indent="0" marL="0">
+            <a:pPr marL="0" indent="0">
               <a:buNone/>
             </a:pPr>
             <a:r>
@@ -13300,7 +13556,7 @@
             <a:endParaRPr lang="en-US" sz="1800" dirty="0"/>
           </a:p>
           <a:p>
-            <a:pPr indent="0" marL="0">
+            <a:pPr marL="0" indent="0">
               <a:buNone/>
             </a:pPr>
             <a:r>
@@ -13336,7 +13592,7 @@
           <a:bodyPr wrap="square" lIns="0" tIns="0" rIns="0" bIns="0" rtlCol="0" anchor="t"/>
           <a:lstStyle/>
           <a:p>
-            <a:pPr indent="0" marL="0">
+            <a:pPr marL="0" indent="0">
               <a:buNone/>
             </a:pPr>
             <a:r>
@@ -13374,7 +13630,10 @@
         </p:spPr>
         <p:txBody>
           <a:bodyPr/>
-          <a:p/>
+          <a:lstStyle/>
+          <a:p>
+            <a:endParaRPr/>
+          </a:p>
         </p:txBody>
       </p:sp>
       <p:sp>
@@ -13398,7 +13657,7 @@
           <a:bodyPr wrap="square" lIns="0" tIns="0" rIns="0" bIns="0" rtlCol="0" anchor="ctr"/>
           <a:lstStyle/>
           <a:p>
-            <a:pPr indent="0" marL="0">
+            <a:pPr marL="0" indent="0">
               <a:buNone/>
             </a:pPr>
             <a:r>
@@ -13412,7 +13671,7 @@
             <a:endParaRPr lang="en-US" sz="1800" dirty="0"/>
           </a:p>
           <a:p>
-            <a:pPr indent="0" marL="0">
+            <a:pPr marL="0" indent="0">
               <a:buNone/>
             </a:pPr>
             <a:r>
@@ -13448,7 +13707,7 @@
           <a:bodyPr wrap="square" lIns="0" tIns="0" rIns="0" bIns="0" rtlCol="0" anchor="t"/>
           <a:lstStyle/>
           <a:p>
-            <a:pPr indent="0" marL="0">
+            <a:pPr marL="0" indent="0">
               <a:buNone/>
             </a:pPr>
             <a:r>
@@ -13486,7 +13745,10 @@
         </p:spPr>
         <p:txBody>
           <a:bodyPr/>
-          <a:p/>
+          <a:lstStyle/>
+          <a:p>
+            <a:endParaRPr/>
+          </a:p>
         </p:txBody>
       </p:sp>
       <p:sp>
@@ -13510,7 +13772,7 @@
           <a:bodyPr wrap="square" lIns="0" tIns="0" rIns="0" bIns="0" rtlCol="0" anchor="ctr"/>
           <a:lstStyle/>
           <a:p>
-            <a:pPr indent="0" marL="0">
+            <a:pPr marL="0" indent="0">
               <a:buNone/>
             </a:pPr>
             <a:r>
@@ -13524,7 +13786,7 @@
             <a:endParaRPr lang="en-US" sz="1800" dirty="0"/>
           </a:p>
           <a:p>
-            <a:pPr indent="0" marL="0">
+            <a:pPr marL="0" indent="0">
               <a:buNone/>
             </a:pPr>
             <a:r>
@@ -13560,7 +13822,7 @@
           <a:bodyPr wrap="square" lIns="0" tIns="0" rIns="0" bIns="0" rtlCol="0" anchor="t"/>
           <a:lstStyle/>
           <a:p>
-            <a:pPr indent="0" marL="0">
+            <a:pPr marL="0" indent="0">
               <a:buNone/>
             </a:pPr>
             <a:r>
@@ -13600,7 +13862,10 @@
         </p:spPr>
         <p:txBody>
           <a:bodyPr/>
-          <a:p/>
+          <a:lstStyle/>
+          <a:p>
+            <a:endParaRPr/>
+          </a:p>
         </p:txBody>
       </p:sp>
       <p:sp>
@@ -13624,7 +13889,7 @@
           <a:bodyPr wrap="square" lIns="0" tIns="0" rIns="0" bIns="0" rtlCol="0" anchor="t"/>
           <a:lstStyle/>
           <a:p>
-            <a:pPr algn="r" indent="0" marL="0">
+            <a:pPr marL="0" indent="0" algn="r">
               <a:buNone/>
             </a:pPr>
             <a:r>
@@ -13660,7 +13925,7 @@
           <a:bodyPr wrap="square" lIns="0" tIns="0" rIns="0" bIns="0" rtlCol="0" anchor="b"/>
           <a:lstStyle/>
           <a:p>
-            <a:pPr indent="0" marL="0">
+            <a:pPr marL="0" indent="0">
               <a:buNone/>
             </a:pPr>
             <a:r>
@@ -13699,7 +13964,7 @@
           <a:bodyPr wrap="square" lIns="0" tIns="0" rIns="0" bIns="0" rtlCol="0" anchor="t"/>
           <a:lstStyle/>
           <a:p>
-            <a:pPr indent="0" marL="0">
+            <a:pPr marL="0" indent="0">
               <a:buNone/>
             </a:pPr>
             <a:r>
@@ -13828,7 +14093,7 @@
           </a:prstGeom>
           <a:extLst>
             <a:ext uri="{C572A759-6A51-4108-AA02-DFA0A04FC94B}">
-              <ma14:wrappingTextBoxFlag xmlns:ma14="http://schemas.microsoft.com/office/mac/drawingml/2011/main" val="0"/>
+              <ma14:wrappingTextBoxFlag xmlns:ma14="http://schemas.microsoft.com/office/mac/drawingml/2011/main" xmlns="" val="0"/>
             </a:ext>
           </a:extLst>
         </p:spPr>
@@ -13846,7 +14111,7 @@
           <a:p>
             <a:pPr algn="r"/>
             <a:fld id="{F7021451-1387-4CA6-816F-3879F97B5CBC}" type="slidenum">
-              <a:rPr b="0" lang="en-US"/>
+              <a:rPr lang="en-US" b="0"/>
               <a:t>4</a:t>
             </a:fld>
             <a:endParaRPr lang="en-US"/>
@@ -13881,9 +14146,11 @@
       <p:sp>
         <p:nvSpPr>
           <p:cNvPr id="2" name="Text 0"/>
-          <p:cNvSpPr/>
+          <p:cNvSpPr>
+            <a:spLocks noGrp="1"/>
+          </p:cNvSpPr>
           <p:nvPr>
-            <p:ph idx="100" type="title" hasCustomPrompt="1"/>
+            <p:ph type="title" idx="100" hasCustomPrompt="1"/>
           </p:nvPr>
         </p:nvSpPr>
         <p:spPr>
@@ -13901,7 +14168,7 @@
           <a:bodyPr wrap="square" lIns="0" tIns="0" rIns="0" bIns="0" rtlCol="0" anchor="ctr"/>
           <a:lstStyle/>
           <a:p>
-            <a:pPr algn="l" indent="0" marL="0">
+            <a:pPr marL="0" indent="0" algn="l">
               <a:buNone/>
             </a:pPr>
             <a:r>
@@ -13942,7 +14209,10 @@
         </p:spPr>
         <p:txBody>
           <a:bodyPr/>
-          <a:p/>
+          <a:lstStyle/>
+          <a:p>
+            <a:endParaRPr/>
+          </a:p>
         </p:txBody>
       </p:sp>
       <p:sp>
@@ -13966,7 +14236,7 @@
           <a:bodyPr wrap="square" lIns="0" tIns="0" rIns="0" bIns="0" rtlCol="0" anchor="t"/>
           <a:lstStyle/>
           <a:p>
-            <a:pPr indent="0" marL="0">
+            <a:pPr marL="0" indent="0">
               <a:buNone/>
             </a:pPr>
             <a:r>
@@ -14002,7 +14272,7 @@
           <a:bodyPr wrap="square" lIns="0" tIns="0" rIns="0" bIns="0" rtlCol="0" anchor="t"/>
           <a:lstStyle/>
           <a:p>
-            <a:pPr indent="0" marL="0">
+            <a:pPr marL="0" indent="0">
               <a:buNone/>
             </a:pPr>
             <a:r>
@@ -14040,7 +14310,10 @@
         </p:spPr>
         <p:txBody>
           <a:bodyPr/>
-          <a:p/>
+          <a:lstStyle/>
+          <a:p>
+            <a:endParaRPr/>
+          </a:p>
         </p:txBody>
       </p:sp>
       <p:sp>
@@ -14064,7 +14337,7 @@
           <a:bodyPr wrap="square" lIns="0" tIns="0" rIns="0" bIns="0" rtlCol="0" anchor="t"/>
           <a:lstStyle/>
           <a:p>
-            <a:pPr indent="0" marL="0">
+            <a:pPr marL="0" indent="0">
               <a:buNone/>
             </a:pPr>
             <a:r>
@@ -14100,7 +14373,7 @@
           <a:bodyPr wrap="square" lIns="0" tIns="0" rIns="0" bIns="0" rtlCol="0" anchor="t"/>
           <a:lstStyle/>
           <a:p>
-            <a:pPr indent="0" marL="0">
+            <a:pPr marL="0" indent="0">
               <a:buNone/>
             </a:pPr>
             <a:r>
@@ -14138,7 +14411,10 @@
         </p:spPr>
         <p:txBody>
           <a:bodyPr/>
-          <a:p/>
+          <a:lstStyle/>
+          <a:p>
+            <a:endParaRPr/>
+          </a:p>
         </p:txBody>
       </p:sp>
       <p:sp>
@@ -14162,7 +14438,7 @@
           <a:bodyPr wrap="square" lIns="0" tIns="0" rIns="0" bIns="0" rtlCol="0" anchor="t"/>
           <a:lstStyle/>
           <a:p>
-            <a:pPr indent="0" marL="0">
+            <a:pPr marL="0" indent="0">
               <a:buNone/>
             </a:pPr>
             <a:r>
@@ -14198,7 +14474,7 @@
           <a:bodyPr wrap="square" lIns="0" tIns="0" rIns="0" bIns="0" rtlCol="0" anchor="t"/>
           <a:lstStyle/>
           <a:p>
-            <a:pPr indent="0" marL="0">
+            <a:pPr marL="0" indent="0">
               <a:buNone/>
             </a:pPr>
             <a:r>
@@ -14236,7 +14512,10 @@
         </p:spPr>
         <p:txBody>
           <a:bodyPr/>
-          <a:p/>
+          <a:lstStyle/>
+          <a:p>
+            <a:endParaRPr/>
+          </a:p>
         </p:txBody>
       </p:sp>
       <p:sp>
@@ -14260,7 +14539,7 @@
           <a:bodyPr wrap="square" lIns="0" tIns="0" rIns="0" bIns="0" rtlCol="0" anchor="t"/>
           <a:lstStyle/>
           <a:p>
-            <a:pPr indent="0" marL="0">
+            <a:pPr marL="0" indent="0">
               <a:buNone/>
             </a:pPr>
             <a:r>
@@ -14296,7 +14575,7 @@
           <a:bodyPr wrap="square" lIns="0" tIns="0" rIns="0" bIns="0" rtlCol="0" anchor="t"/>
           <a:lstStyle/>
           <a:p>
-            <a:pPr indent="0" marL="0">
+            <a:pPr marL="0" indent="0">
               <a:buNone/>
             </a:pPr>
             <a:r>
@@ -14334,7 +14613,10 @@
         </p:spPr>
         <p:txBody>
           <a:bodyPr/>
-          <a:p/>
+          <a:lstStyle/>
+          <a:p>
+            <a:endParaRPr/>
+          </a:p>
         </p:txBody>
       </p:sp>
       <p:sp>
@@ -14358,7 +14640,7 @@
           <a:bodyPr wrap="square" lIns="0" tIns="0" rIns="0" bIns="0" rtlCol="0" anchor="t"/>
           <a:lstStyle/>
           <a:p>
-            <a:pPr indent="0" marL="0">
+            <a:pPr marL="0" indent="0">
               <a:buNone/>
             </a:pPr>
             <a:r>
@@ -14394,7 +14676,7 @@
           <a:bodyPr wrap="square" lIns="0" tIns="0" rIns="0" bIns="0" rtlCol="0" anchor="t"/>
           <a:lstStyle/>
           <a:p>
-            <a:pPr indent="0" marL="0">
+            <a:pPr marL="0" indent="0">
               <a:buNone/>
             </a:pPr>
             <a:r>
@@ -14430,252 +14712,15 @@
         </p:spPr>
         <p:txBody>
           <a:bodyPr/>
-          <a:p/>
+          <a:lstStyle/>
+          <a:p>
+            <a:endParaRPr/>
+          </a:p>
         </p:txBody>
       </p:sp>
       <p:pic>
         <p:nvPicPr>
-          <p:cNvPr id="19" name="icon-bullseye" descr="preencoded.png">    </p:cNvPr>
-          <p:cNvPicPr>
-            <a:picLocks noChangeAspect="1"/>
-          </p:cNvPicPr>
-          <p:nvPr/>
-        </p:nvPicPr>
-        <p:blipFill>
-          <a:blip r:embed="rId1"/>
-          <a:stretch>
-            <a:fillRect/>
-          </a:stretch>
-        </p:blipFill>
-        <p:spPr>
-          <a:xfrm>
-            <a:off x="697230" y="4034790"/>
-            <a:ext cx="297180" cy="297180"/>
-          </a:xfrm>
-          <a:prstGeom prst="rect">
-            <a:avLst/>
-          </a:prstGeom>
-        </p:spPr>
-      </p:pic>
-      <p:sp>
-        <p:nvSpPr>
-          <p:cNvPr id="20" name="Text 17"/>
-          <p:cNvSpPr txBox="1"/>
-          <p:nvPr/>
-        </p:nvSpPr>
-        <p:spPr>
-          <a:xfrm>
-            <a:off x="1280160" y="3858768"/>
-            <a:ext cx="1783080" cy="320040"/>
-          </a:xfrm>
-          <a:prstGeom prst="rect">
-            <a:avLst/>
-          </a:prstGeom>
-          <a:noFill/>
-          <a:ln/>
-        </p:spPr>
-        <p:txBody>
-          <a:bodyPr wrap="square" lIns="0" tIns="0" rIns="0" bIns="0" rtlCol="0" anchor="t"/>
-          <a:lstStyle/>
-          <a:p>
-            <a:pPr indent="0" marL="0">
-              <a:buNone/>
-            </a:pPr>
-            <a:r>
-              <a:rPr lang="en-US" sz="1700" b="1" dirty="0">
-                <a:solidFill>
-                  <a:schemeClr val="tx2"/>
-                </a:solidFill>
-              </a:rPr>
-              <a:t>Select model</a:t>
-            </a:r>
-            <a:endParaRPr lang="en-US" sz="1700" dirty="0"/>
-          </a:p>
-        </p:txBody>
-      </p:sp>
-      <p:sp>
-        <p:nvSpPr>
-          <p:cNvPr id="21" name="Text 18"/>
-          <p:cNvSpPr txBox="1"/>
-          <p:nvPr/>
-        </p:nvSpPr>
-        <p:spPr>
-          <a:xfrm>
-            <a:off x="1280160" y="4206240"/>
-            <a:ext cx="1783080" cy="640080"/>
-          </a:xfrm>
-          <a:prstGeom prst="rect">
-            <a:avLst/>
-          </a:prstGeom>
-          <a:noFill/>
-          <a:ln/>
-        </p:spPr>
-        <p:txBody>
-          <a:bodyPr wrap="square" lIns="0" tIns="0" rIns="0" bIns="0" rtlCol="0" anchor="t"/>
-          <a:lstStyle/>
-          <a:p>
-            <a:pPr indent="0" marL="0">
-              <a:buNone/>
-            </a:pPr>
-            <a:r>
-              <a:rPr lang="en-US" sz="1300" dirty="0">
-                <a:solidFill>
-                  <a:schemeClr val="accent4"/>
-                </a:solidFill>
-              </a:rPr>
-              <a:t>by validation ROC-AUC</a:t>
-            </a:r>
-            <a:endParaRPr lang="en-US" sz="1300" dirty="0"/>
-          </a:p>
-        </p:txBody>
-      </p:sp>
-      <p:sp>
-        <p:nvSpPr>
-          <p:cNvPr id="22" name="icon-bg-sync"/>
-          <p:cNvSpPr/>
-          <p:nvPr/>
-        </p:nvSpPr>
-        <p:spPr>
-          <a:xfrm>
-            <a:off x="3408578" y="3886200"/>
-            <a:ext cx="594360" cy="594360"/>
-          </a:xfrm>
-          <a:prstGeom prst="ellipse">
-            <a:avLst/>
-          </a:prstGeom>
-          <a:solidFill>
-            <a:schemeClr val="accent1"/>
-          </a:solidFill>
-          <a:ln/>
-        </p:spPr>
-        <p:txBody>
-          <a:bodyPr/>
-          <a:p/>
-        </p:txBody>
-      </p:sp>
-      <p:pic>
-        <p:nvPicPr>
-          <p:cNvPr id="23" name="icon-sync" descr="preencoded.png">    </p:cNvPr>
-          <p:cNvPicPr>
-            <a:picLocks noChangeAspect="1"/>
-          </p:cNvPicPr>
-          <p:nvPr/>
-        </p:nvPicPr>
-        <p:blipFill>
-          <a:blip r:embed="rId2"/>
-          <a:stretch>
-            <a:fillRect/>
-          </a:stretch>
-        </p:blipFill>
-        <p:spPr>
-          <a:xfrm>
-            <a:off x="3557168" y="4034790"/>
-            <a:ext cx="297180" cy="297180"/>
-          </a:xfrm>
-          <a:prstGeom prst="rect">
-            <a:avLst/>
-          </a:prstGeom>
-        </p:spPr>
-      </p:pic>
-      <p:sp>
-        <p:nvSpPr>
-          <p:cNvPr id="24" name="Text 20"/>
-          <p:cNvSpPr txBox="1"/>
-          <p:nvPr/>
-        </p:nvSpPr>
-        <p:spPr>
-          <a:xfrm>
-            <a:off x="4140098" y="3858768"/>
-            <a:ext cx="1783080" cy="320040"/>
-          </a:xfrm>
-          <a:prstGeom prst="rect">
-            <a:avLst/>
-          </a:prstGeom>
-          <a:noFill/>
-          <a:ln/>
-        </p:spPr>
-        <p:txBody>
-          <a:bodyPr wrap="square" lIns="0" tIns="0" rIns="0" bIns="0" rtlCol="0" anchor="t"/>
-          <a:lstStyle/>
-          <a:p>
-            <a:pPr indent="0" marL="0">
-              <a:buNone/>
-            </a:pPr>
-            <a:r>
-              <a:rPr lang="en-US" sz="1700" b="1" dirty="0">
-                <a:solidFill>
-                  <a:schemeClr val="tx2"/>
-                </a:solidFill>
-              </a:rPr>
-              <a:t>Pick threshold</a:t>
-            </a:r>
-            <a:endParaRPr lang="en-US" sz="1700" dirty="0"/>
-          </a:p>
-        </p:txBody>
-      </p:sp>
-      <p:sp>
-        <p:nvSpPr>
-          <p:cNvPr id="25" name="Text 21"/>
-          <p:cNvSpPr txBox="1"/>
-          <p:nvPr/>
-        </p:nvSpPr>
-        <p:spPr>
-          <a:xfrm>
-            <a:off x="4140098" y="4206240"/>
-            <a:ext cx="1783080" cy="640080"/>
-          </a:xfrm>
-          <a:prstGeom prst="rect">
-            <a:avLst/>
-          </a:prstGeom>
-          <a:noFill/>
-          <a:ln/>
-        </p:spPr>
-        <p:txBody>
-          <a:bodyPr wrap="square" lIns="0" tIns="0" rIns="0" bIns="0" rtlCol="0" anchor="t"/>
-          <a:lstStyle/>
-          <a:p>
-            <a:pPr indent="0" marL="0">
-              <a:buNone/>
-            </a:pPr>
-            <a:r>
-              <a:rPr lang="en-US" sz="1300" dirty="0">
-                <a:solidFill>
-                  <a:schemeClr val="accent4"/>
-                </a:solidFill>
-              </a:rPr>
-              <a:t>maximise validation macro-F1</a:t>
-            </a:r>
-            <a:endParaRPr lang="en-US" sz="1300" dirty="0"/>
-          </a:p>
-        </p:txBody>
-      </p:sp>
-      <p:sp>
-        <p:nvSpPr>
-          <p:cNvPr id="26" name="icon-bg-layers"/>
-          <p:cNvSpPr/>
-          <p:nvPr/>
-        </p:nvSpPr>
-        <p:spPr>
-          <a:xfrm>
-            <a:off x="6268517" y="3886200"/>
-            <a:ext cx="594360" cy="594360"/>
-          </a:xfrm>
-          <a:prstGeom prst="ellipse">
-            <a:avLst/>
-          </a:prstGeom>
-          <a:solidFill>
-            <a:schemeClr val="accent1"/>
-          </a:solidFill>
-          <a:ln/>
-        </p:spPr>
-        <p:txBody>
-          <a:bodyPr/>
-          <a:p/>
-        </p:txBody>
-      </p:sp>
-      <p:pic>
-        <p:nvPicPr>
-          <p:cNvPr id="27" name="icon-layers" descr="preencoded.png">    </p:cNvPr>
+          <p:cNvPr id="19" name="icon-bullseye" descr="preencoded.png"/>
           <p:cNvPicPr>
             <a:picLocks noChangeAspect="1"/>
           </p:cNvPicPr>
@@ -14689,7 +14734,7 @@
         </p:blipFill>
         <p:spPr>
           <a:xfrm>
-            <a:off x="6417107" y="4034790"/>
+            <a:off x="697230" y="4034790"/>
             <a:ext cx="297180" cy="297180"/>
           </a:xfrm>
           <a:prstGeom prst="rect">
@@ -14699,13 +14744,13 @@
       </p:pic>
       <p:sp>
         <p:nvSpPr>
-          <p:cNvPr id="28" name="Text 23"/>
+          <p:cNvPr id="20" name="Text 17"/>
           <p:cNvSpPr txBox="1"/>
           <p:nvPr/>
         </p:nvSpPr>
         <p:spPr>
           <a:xfrm>
-            <a:off x="7000037" y="3858768"/>
+            <a:off x="1280160" y="3858768"/>
             <a:ext cx="1783080" cy="320040"/>
           </a:xfrm>
           <a:prstGeom prst="rect">
@@ -14718,7 +14763,7 @@
           <a:bodyPr wrap="square" lIns="0" tIns="0" rIns="0" bIns="0" rtlCol="0" anchor="t"/>
           <a:lstStyle/>
           <a:p>
-            <a:pPr indent="0" marL="0">
+            <a:pPr marL="0" indent="0">
               <a:buNone/>
             </a:pPr>
             <a:r>
@@ -14727,7 +14772,7 @@
                   <a:schemeClr val="tx2"/>
                 </a:solidFill>
               </a:rPr>
-              <a:t>Calibrate</a:t>
+              <a:t>Select model</a:t>
             </a:r>
             <a:endParaRPr lang="en-US" sz="1700" dirty="0"/>
           </a:p>
@@ -14735,13 +14780,13 @@
       </p:sp>
       <p:sp>
         <p:nvSpPr>
-          <p:cNvPr id="29" name="Text 24"/>
+          <p:cNvPr id="21" name="Text 18"/>
           <p:cNvSpPr txBox="1"/>
           <p:nvPr/>
         </p:nvSpPr>
         <p:spPr>
           <a:xfrm>
-            <a:off x="7000037" y="4206240"/>
+            <a:off x="1280160" y="4206240"/>
             <a:ext cx="1783080" cy="640080"/>
           </a:xfrm>
           <a:prstGeom prst="rect">
@@ -14754,7 +14799,7 @@
           <a:bodyPr wrap="square" lIns="0" tIns="0" rIns="0" bIns="0" rtlCol="0" anchor="t"/>
           <a:lstStyle/>
           <a:p>
-            <a:pPr indent="0" marL="0">
+            <a:pPr marL="0" indent="0">
               <a:buNone/>
             </a:pPr>
             <a:r>
@@ -14763,7 +14808,7 @@
                   <a:schemeClr val="accent4"/>
                 </a:solidFill>
               </a:rPr>
-              <a:t>sigmoid on validation; base model frozen</a:t>
+              <a:t>by validation ROC-AUC</a:t>
             </a:r>
             <a:endParaRPr lang="en-US" sz="1300" dirty="0"/>
           </a:p>
@@ -14771,31 +14816,34 @@
       </p:sp>
       <p:sp>
         <p:nvSpPr>
-          <p:cNvPr id="30" name="icon-bg-check"/>
+          <p:cNvPr id="22" name="icon-bg-sync"/>
           <p:cNvSpPr/>
           <p:nvPr/>
         </p:nvSpPr>
         <p:spPr>
           <a:xfrm>
-            <a:off x="9128455" y="3886200"/>
+            <a:off x="3408578" y="3886200"/>
             <a:ext cx="594360" cy="594360"/>
           </a:xfrm>
           <a:prstGeom prst="ellipse">
             <a:avLst/>
           </a:prstGeom>
           <a:solidFill>
-            <a:schemeClr val="tx2"/>
+            <a:schemeClr val="accent1"/>
           </a:solidFill>
           <a:ln/>
         </p:spPr>
         <p:txBody>
           <a:bodyPr/>
-          <a:p/>
+          <a:lstStyle/>
+          <a:p>
+            <a:endParaRPr/>
+          </a:p>
         </p:txBody>
       </p:sp>
       <p:pic>
         <p:nvPicPr>
-          <p:cNvPr id="31" name="icon-check" descr="preencoded.png">    </p:cNvPr>
+          <p:cNvPr id="23" name="icon-sync" descr="preencoded.png"/>
           <p:cNvPicPr>
             <a:picLocks noChangeAspect="1"/>
           </p:cNvPicPr>
@@ -14809,6 +14857,252 @@
         </p:blipFill>
         <p:spPr>
           <a:xfrm>
+            <a:off x="3557168" y="4034790"/>
+            <a:ext cx="297180" cy="297180"/>
+          </a:xfrm>
+          <a:prstGeom prst="rect">
+            <a:avLst/>
+          </a:prstGeom>
+        </p:spPr>
+      </p:pic>
+      <p:sp>
+        <p:nvSpPr>
+          <p:cNvPr id="24" name="Text 20"/>
+          <p:cNvSpPr txBox="1"/>
+          <p:nvPr/>
+        </p:nvSpPr>
+        <p:spPr>
+          <a:xfrm>
+            <a:off x="4140098" y="3858768"/>
+            <a:ext cx="1783080" cy="320040"/>
+          </a:xfrm>
+          <a:prstGeom prst="rect">
+            <a:avLst/>
+          </a:prstGeom>
+          <a:noFill/>
+          <a:ln/>
+        </p:spPr>
+        <p:txBody>
+          <a:bodyPr wrap="square" lIns="0" tIns="0" rIns="0" bIns="0" rtlCol="0" anchor="t"/>
+          <a:lstStyle/>
+          <a:p>
+            <a:pPr marL="0" indent="0">
+              <a:buNone/>
+            </a:pPr>
+            <a:r>
+              <a:rPr lang="en-US" sz="1700" b="1" dirty="0">
+                <a:solidFill>
+                  <a:schemeClr val="tx2"/>
+                </a:solidFill>
+              </a:rPr>
+              <a:t>Pick threshold</a:t>
+            </a:r>
+            <a:endParaRPr lang="en-US" sz="1700" dirty="0"/>
+          </a:p>
+        </p:txBody>
+      </p:sp>
+      <p:sp>
+        <p:nvSpPr>
+          <p:cNvPr id="25" name="Text 21"/>
+          <p:cNvSpPr txBox="1"/>
+          <p:nvPr/>
+        </p:nvSpPr>
+        <p:spPr>
+          <a:xfrm>
+            <a:off x="4140098" y="4206240"/>
+            <a:ext cx="1783080" cy="640080"/>
+          </a:xfrm>
+          <a:prstGeom prst="rect">
+            <a:avLst/>
+          </a:prstGeom>
+          <a:noFill/>
+          <a:ln/>
+        </p:spPr>
+        <p:txBody>
+          <a:bodyPr wrap="square" lIns="0" tIns="0" rIns="0" bIns="0" rtlCol="0" anchor="t"/>
+          <a:lstStyle/>
+          <a:p>
+            <a:pPr marL="0" indent="0">
+              <a:buNone/>
+            </a:pPr>
+            <a:r>
+              <a:rPr lang="en-US" sz="1300" dirty="0">
+                <a:solidFill>
+                  <a:schemeClr val="accent4"/>
+                </a:solidFill>
+              </a:rPr>
+              <a:t>maximise validation macro-F1</a:t>
+            </a:r>
+            <a:endParaRPr lang="en-US" sz="1300" dirty="0"/>
+          </a:p>
+        </p:txBody>
+      </p:sp>
+      <p:sp>
+        <p:nvSpPr>
+          <p:cNvPr id="26" name="icon-bg-layers"/>
+          <p:cNvSpPr/>
+          <p:nvPr/>
+        </p:nvSpPr>
+        <p:spPr>
+          <a:xfrm>
+            <a:off x="6268517" y="3886200"/>
+            <a:ext cx="594360" cy="594360"/>
+          </a:xfrm>
+          <a:prstGeom prst="ellipse">
+            <a:avLst/>
+          </a:prstGeom>
+          <a:solidFill>
+            <a:schemeClr val="accent1"/>
+          </a:solidFill>
+          <a:ln/>
+        </p:spPr>
+        <p:txBody>
+          <a:bodyPr/>
+          <a:lstStyle/>
+          <a:p>
+            <a:endParaRPr/>
+          </a:p>
+        </p:txBody>
+      </p:sp>
+      <p:pic>
+        <p:nvPicPr>
+          <p:cNvPr id="27" name="icon-layers" descr="preencoded.png"/>
+          <p:cNvPicPr>
+            <a:picLocks noChangeAspect="1"/>
+          </p:cNvPicPr>
+          <p:nvPr/>
+        </p:nvPicPr>
+        <p:blipFill>
+          <a:blip r:embed="rId5"/>
+          <a:stretch>
+            <a:fillRect/>
+          </a:stretch>
+        </p:blipFill>
+        <p:spPr>
+          <a:xfrm>
+            <a:off x="6417107" y="4034790"/>
+            <a:ext cx="297180" cy="297180"/>
+          </a:xfrm>
+          <a:prstGeom prst="rect">
+            <a:avLst/>
+          </a:prstGeom>
+        </p:spPr>
+      </p:pic>
+      <p:sp>
+        <p:nvSpPr>
+          <p:cNvPr id="28" name="Text 23"/>
+          <p:cNvSpPr txBox="1"/>
+          <p:nvPr/>
+        </p:nvSpPr>
+        <p:spPr>
+          <a:xfrm>
+            <a:off x="7000037" y="3858768"/>
+            <a:ext cx="1783080" cy="320040"/>
+          </a:xfrm>
+          <a:prstGeom prst="rect">
+            <a:avLst/>
+          </a:prstGeom>
+          <a:noFill/>
+          <a:ln/>
+        </p:spPr>
+        <p:txBody>
+          <a:bodyPr wrap="square" lIns="0" tIns="0" rIns="0" bIns="0" rtlCol="0" anchor="t"/>
+          <a:lstStyle/>
+          <a:p>
+            <a:pPr marL="0" indent="0">
+              <a:buNone/>
+            </a:pPr>
+            <a:r>
+              <a:rPr lang="en-US" sz="1700" b="1" dirty="0">
+                <a:solidFill>
+                  <a:schemeClr val="tx2"/>
+                </a:solidFill>
+              </a:rPr>
+              <a:t>Calibrate</a:t>
+            </a:r>
+            <a:endParaRPr lang="en-US" sz="1700" dirty="0"/>
+          </a:p>
+        </p:txBody>
+      </p:sp>
+      <p:sp>
+        <p:nvSpPr>
+          <p:cNvPr id="29" name="Text 24"/>
+          <p:cNvSpPr txBox="1"/>
+          <p:nvPr/>
+        </p:nvSpPr>
+        <p:spPr>
+          <a:xfrm>
+            <a:off x="7000037" y="4206240"/>
+            <a:ext cx="1783080" cy="640080"/>
+          </a:xfrm>
+          <a:prstGeom prst="rect">
+            <a:avLst/>
+          </a:prstGeom>
+          <a:noFill/>
+          <a:ln/>
+        </p:spPr>
+        <p:txBody>
+          <a:bodyPr wrap="square" lIns="0" tIns="0" rIns="0" bIns="0" rtlCol="0" anchor="t"/>
+          <a:lstStyle/>
+          <a:p>
+            <a:pPr marL="0" indent="0">
+              <a:buNone/>
+            </a:pPr>
+            <a:r>
+              <a:rPr lang="en-US" sz="1300" dirty="0">
+                <a:solidFill>
+                  <a:schemeClr val="accent4"/>
+                </a:solidFill>
+              </a:rPr>
+              <a:t>sigmoid on validation; base model frozen</a:t>
+            </a:r>
+            <a:endParaRPr lang="en-US" sz="1300" dirty="0"/>
+          </a:p>
+        </p:txBody>
+      </p:sp>
+      <p:sp>
+        <p:nvSpPr>
+          <p:cNvPr id="30" name="icon-bg-check"/>
+          <p:cNvSpPr/>
+          <p:nvPr/>
+        </p:nvSpPr>
+        <p:spPr>
+          <a:xfrm>
+            <a:off x="9128455" y="3886200"/>
+            <a:ext cx="594360" cy="594360"/>
+          </a:xfrm>
+          <a:prstGeom prst="ellipse">
+            <a:avLst/>
+          </a:prstGeom>
+          <a:solidFill>
+            <a:schemeClr val="tx2"/>
+          </a:solidFill>
+          <a:ln/>
+        </p:spPr>
+        <p:txBody>
+          <a:bodyPr/>
+          <a:lstStyle/>
+          <a:p>
+            <a:endParaRPr/>
+          </a:p>
+        </p:txBody>
+      </p:sp>
+      <p:pic>
+        <p:nvPicPr>
+          <p:cNvPr id="31" name="icon-check" descr="preencoded.png"/>
+          <p:cNvPicPr>
+            <a:picLocks noChangeAspect="1"/>
+          </p:cNvPicPr>
+          <p:nvPr/>
+        </p:nvPicPr>
+        <p:blipFill>
+          <a:blip r:embed="rId6"/>
+          <a:stretch>
+            <a:fillRect/>
+          </a:stretch>
+        </p:blipFill>
+        <p:spPr>
+          <a:xfrm>
             <a:off x="9277045" y="4034790"/>
             <a:ext cx="297180" cy="297180"/>
           </a:xfrm>
@@ -14838,7 +15132,7 @@
           <a:bodyPr wrap="square" lIns="0" tIns="0" rIns="0" bIns="0" rtlCol="0" anchor="t"/>
           <a:lstStyle/>
           <a:p>
-            <a:pPr indent="0" marL="0">
+            <a:pPr marL="0" indent="0">
               <a:buNone/>
             </a:pPr>
             <a:r>
@@ -14874,7 +15168,7 @@
           <a:bodyPr wrap="square" lIns="0" tIns="0" rIns="0" bIns="0" rtlCol="0" anchor="t"/>
           <a:lstStyle/>
           <a:p>
-            <a:pPr indent="0" marL="0">
+            <a:pPr marL="0" indent="0">
               <a:buNone/>
             </a:pPr>
             <a:r>
@@ -14910,7 +15204,7 @@
           <a:bodyPr wrap="square" lIns="0" tIns="0" rIns="0" bIns="0" rtlCol="0" anchor="t"/>
           <a:lstStyle/>
           <a:p>
-            <a:pPr indent="0" marL="0">
+            <a:pPr marL="0" indent="0">
               <a:buNone/>
             </a:pPr>
             <a:r>
@@ -14927,7 +15221,7 @@
       </p:sp>
       <p:sp>
         <p:nvSpPr>
-          <p:cNvPr id="25" name="Slide Number Placeholder 0"/>
+          <p:cNvPr id="35" name="Slide Number Placeholder 0"/>
           <p:cNvSpPr>
             <a:spLocks noGrp="1"/>
           </p:cNvSpPr>
@@ -14945,7 +15239,7 @@
           </a:prstGeom>
           <a:extLst>
             <a:ext uri="{C572A759-6A51-4108-AA02-DFA0A04FC94B}">
-              <ma14:wrappingTextBoxFlag xmlns:ma14="http://schemas.microsoft.com/office/mac/drawingml/2011/main" val="0"/>
+              <ma14:wrappingTextBoxFlag xmlns:ma14="http://schemas.microsoft.com/office/mac/drawingml/2011/main" xmlns="" val="0"/>
             </a:ext>
           </a:extLst>
         </p:spPr>
@@ -14963,7 +15257,7 @@
           <a:p>
             <a:pPr algn="r"/>
             <a:fld id="{F7021451-1387-4CA6-816F-3879F97B5CBC}" type="slidenum">
-              <a:rPr b="0" lang="en-US"/>
+              <a:rPr lang="en-US" b="0"/>
               <a:t>5</a:t>
             </a:fld>
             <a:endParaRPr lang="en-US"/>
@@ -14998,9 +15292,11 @@
       <p:sp>
         <p:nvSpPr>
           <p:cNvPr id="2" name="Text 0"/>
-          <p:cNvSpPr/>
+          <p:cNvSpPr>
+            <a:spLocks noGrp="1"/>
+          </p:cNvSpPr>
           <p:nvPr>
-            <p:ph idx="100" type="title" hasCustomPrompt="1"/>
+            <p:ph type="title" idx="100" hasCustomPrompt="1"/>
           </p:nvPr>
         </p:nvSpPr>
         <p:spPr>
@@ -15018,7 +15314,7 @@
           <a:bodyPr wrap="square" lIns="0" tIns="0" rIns="0" bIns="0" rtlCol="0" anchor="ctr"/>
           <a:lstStyle/>
           <a:p>
-            <a:pPr algn="l" indent="0" marL="0">
+            <a:pPr marL="0" indent="0" algn="l">
               <a:buNone/>
             </a:pPr>
             <a:r>
@@ -15057,19 +15353,22 @@
         </p:spPr>
         <p:txBody>
           <a:bodyPr/>
-          <a:p/>
+          <a:lstStyle/>
+          <a:p>
+            <a:endParaRPr/>
+          </a:p>
         </p:txBody>
       </p:sp>
       <p:pic>
         <p:nvPicPr>
-          <p:cNvPr id="4" name="icon-warn" descr="preencoded.png">    </p:cNvPr>
+          <p:cNvPr id="4" name="icon-warn" descr="preencoded.png"/>
           <p:cNvPicPr>
             <a:picLocks noChangeAspect="1"/>
           </p:cNvPicPr>
           <p:nvPr/>
         </p:nvPicPr>
         <p:blipFill>
-          <a:blip r:embed="rId5"/>
+          <a:blip r:embed="rId3"/>
           <a:stretch>
             <a:fillRect/>
           </a:stretch>
@@ -15105,7 +15404,7 @@
           <a:bodyPr wrap="square" lIns="0" tIns="0" rIns="0" bIns="0" rtlCol="0" anchor="ctr"/>
           <a:lstStyle/>
           <a:p>
-            <a:pPr indent="0" marL="0">
+            <a:pPr marL="0" indent="0">
               <a:buNone/>
             </a:pPr>
             <a:r>
@@ -15253,19 +15552,22 @@
         </p:spPr>
         <p:txBody>
           <a:bodyPr/>
-          <a:p/>
+          <a:lstStyle/>
+          <a:p>
+            <a:endParaRPr/>
+          </a:p>
         </p:txBody>
       </p:sp>
       <p:pic>
         <p:nvPicPr>
-          <p:cNvPr id="8" name="icon-search" descr="preencoded.png">    </p:cNvPr>
+          <p:cNvPr id="8" name="icon-search" descr="preencoded.png"/>
           <p:cNvPicPr>
             <a:picLocks noChangeAspect="1"/>
           </p:cNvPicPr>
           <p:nvPr/>
         </p:nvPicPr>
         <p:blipFill>
-          <a:blip r:embed="rId2"/>
+          <a:blip r:embed="rId4"/>
           <a:stretch>
             <a:fillRect/>
           </a:stretch>
@@ -15301,7 +15603,7 @@
           <a:bodyPr wrap="square" lIns="0" tIns="0" rIns="0" bIns="0" rtlCol="0" anchor="ctr"/>
           <a:lstStyle/>
           <a:p>
-            <a:pPr indent="0" marL="0">
+            <a:pPr marL="0" indent="0">
               <a:buNone/>
             </a:pPr>
             <a:r>
@@ -15368,7 +15670,7 @@
                   <a:schemeClr val="tx1"/>
                 </a:solidFill>
               </a:rPr>
-              <a:t>At each step an attentive transformer outputs a sparse mask (sparsemax) that selects a few inputs, separately for every deal</a:t>
+              <a:t>At each step, an attentive transformer outputs a sparse mask (sparsemax) that selects a few inputs, separately for every deal</a:t>
             </a:r>
             <a:endParaRPr lang="en-US" sz="1500" dirty="0"/>
           </a:p>
@@ -15448,7 +15750,7 @@
           </a:prstGeom>
           <a:extLst>
             <a:ext uri="{C572A759-6A51-4108-AA02-DFA0A04FC94B}">
-              <ma14:wrappingTextBoxFlag xmlns:ma14="http://schemas.microsoft.com/office/mac/drawingml/2011/main" val="0"/>
+              <ma14:wrappingTextBoxFlag xmlns:ma14="http://schemas.microsoft.com/office/mac/drawingml/2011/main" xmlns="" val="0"/>
             </a:ext>
           </a:extLst>
         </p:spPr>
@@ -15466,7 +15768,7 @@
           <a:p>
             <a:pPr algn="r"/>
             <a:fld id="{F7021451-1387-4CA6-816F-3879F97B5CBC}" type="slidenum">
-              <a:rPr b="0" lang="en-US"/>
+              <a:rPr lang="en-US" b="0"/>
               <a:t>6</a:t>
             </a:fld>
             <a:endParaRPr lang="en-US"/>
@@ -15489,16 +15791,34 @@
         </p:nvGraphicFramePr>
         <p:xfrm>
           <a:off x="548640" y="4526280"/>
-          <a:ext cx="11091672" cy="1700784"/>
+          <a:ext cx="11091672" cy="1722120"/>
         </p:xfrm>
         <a:graphic>
           <a:graphicData uri="http://schemas.openxmlformats.org/drawingml/2006/table">
             <a:tbl>
               <a:tblPr/>
               <a:tblGrid>
-                <a:gridCol w="2377440"/>
-                <a:gridCol w="4023360"/>
-                <a:gridCol w="4690872"/>
+                <a:gridCol w="2377440">
+                  <a:extLst>
+                    <a:ext uri="{9D8B030D-6E8A-4147-A177-3AD203B41FA5}">
+                      <a16:colId xmlns:a16="http://schemas.microsoft.com/office/drawing/2014/main" val="20000"/>
+                    </a:ext>
+                  </a:extLst>
+                </a:gridCol>
+                <a:gridCol w="4023360">
+                  <a:extLst>
+                    <a:ext uri="{9D8B030D-6E8A-4147-A177-3AD203B41FA5}">
+                      <a16:colId xmlns:a16="http://schemas.microsoft.com/office/drawing/2014/main" val="20001"/>
+                    </a:ext>
+                  </a:extLst>
+                </a:gridCol>
+                <a:gridCol w="4690872">
+                  <a:extLst>
+                    <a:ext uri="{9D8B030D-6E8A-4147-A177-3AD203B41FA5}">
+                      <a16:colId xmlns:a16="http://schemas.microsoft.com/office/drawing/2014/main" val="20002"/>
+                    </a:ext>
+                  </a:extLst>
+                </a:gridCol>
               </a:tblGrid>
               <a:tr h="283464">
                 <a:tc>
@@ -15506,21 +15826,13 @@
                     <a:bodyPr/>
                     <a:lstStyle/>
                     <a:p>
-                      <a:pPr algn="l" indent="0" marL="0">
+                      <a:pPr marL="0" indent="0" algn="l">
                         <a:buNone/>
                       </a:pPr>
-                      <a:r>
-                        <a:rPr lang="en-US" sz="1200" b="1" dirty="0">
-                          <a:solidFill>
-                            <a:schemeClr val="bg1"/>
-                          </a:solidFill>
-                        </a:rPr>
-                        <a:t/>
-                      </a:r>
                       <a:endParaRPr lang="en-US" sz="1400" dirty="0"/>
                     </a:p>
                   </a:txBody>
-                  <a:tcPr marL="91440" marR="91440" marT="45720" marB="45720" anchor="ctr">
+                  <a:tcPr anchor="ctr">
                     <a:lnL w="6350" cap="flat" cmpd="sng" algn="ctr">
                       <a:solidFill>
                         <a:srgbClr val="DCE5E3"/>
@@ -15567,7 +15879,7 @@
                     <a:bodyPr/>
                     <a:lstStyle/>
                     <a:p>
-                      <a:pPr algn="l" indent="0" marL="0">
+                      <a:pPr marL="0" indent="0" algn="l">
                         <a:buNone/>
                       </a:pPr>
                       <a:r>
@@ -15581,7 +15893,7 @@
                       <a:endParaRPr lang="en-US" sz="1400" dirty="0"/>
                     </a:p>
                   </a:txBody>
-                  <a:tcPr marL="91440" marR="91440" marT="45720" marB="45720" anchor="ctr">
+                  <a:tcPr anchor="ctr">
                     <a:lnL w="6350" cap="flat" cmpd="sng" algn="ctr">
                       <a:solidFill>
                         <a:srgbClr val="DCE5E3"/>
@@ -15628,7 +15940,7 @@
                     <a:bodyPr/>
                     <a:lstStyle/>
                     <a:p>
-                      <a:pPr algn="l" indent="0" marL="0">
+                      <a:pPr marL="0" indent="0" algn="l">
                         <a:buNone/>
                       </a:pPr>
                       <a:r>
@@ -15642,7 +15954,7 @@
                       <a:endParaRPr lang="en-US" sz="1400" dirty="0"/>
                     </a:p>
                   </a:txBody>
-                  <a:tcPr marL="91440" marR="91440" marT="45720" marB="45720" anchor="ctr">
+                  <a:tcPr anchor="ctr">
                     <a:lnL w="6350" cap="flat" cmpd="sng" algn="ctr">
                       <a:solidFill>
                         <a:srgbClr val="DCE5E3"/>
@@ -15684,6 +15996,11 @@
                     </a:solidFill>
                   </a:tcPr>
                 </a:tc>
+                <a:extLst>
+                  <a:ext uri="{0D108BD9-81ED-4DB2-BD59-A6C34878D82A}">
+                    <a16:rowId xmlns:a16="http://schemas.microsoft.com/office/drawing/2014/main" val="10000"/>
+                  </a:ext>
+                </a:extLst>
               </a:tr>
               <a:tr h="283464">
                 <a:tc>
@@ -15691,7 +16008,7 @@
                     <a:bodyPr/>
                     <a:lstStyle/>
                     <a:p>
-                      <a:pPr algn="l" indent="0" marL="0">
+                      <a:pPr marL="0" indent="0" algn="l">
                         <a:buNone/>
                       </a:pPr>
                       <a:r>
@@ -15705,7 +16022,7 @@
                       <a:endParaRPr lang="en-US" sz="1400" dirty="0"/>
                     </a:p>
                   </a:txBody>
-                  <a:tcPr marL="91440" marR="91440" marT="45720" marB="45720" anchor="ctr">
+                  <a:tcPr anchor="ctr">
                     <a:lnL w="6350" cap="flat" cmpd="sng" algn="ctr">
                       <a:solidFill>
                         <a:srgbClr val="DCE5E3"/>
@@ -15752,7 +16069,7 @@
                     <a:bodyPr/>
                     <a:lstStyle/>
                     <a:p>
-                      <a:pPr algn="l" indent="0" marL="0">
+                      <a:pPr marL="0" indent="0" algn="l">
                         <a:buNone/>
                       </a:pPr>
                       <a:r>
@@ -15766,7 +16083,7 @@
                       <a:endParaRPr lang="en-US" sz="1400" dirty="0"/>
                     </a:p>
                   </a:txBody>
-                  <a:tcPr marL="91440" marR="91440" marT="45720" marB="45720" anchor="ctr">
+                  <a:tcPr anchor="ctr">
                     <a:lnL w="6350" cap="flat" cmpd="sng" algn="ctr">
                       <a:solidFill>
                         <a:srgbClr val="DCE5E3"/>
@@ -15813,7 +16130,7 @@
                     <a:bodyPr/>
                     <a:lstStyle/>
                     <a:p>
-                      <a:pPr algn="l" indent="0" marL="0">
+                      <a:pPr marL="0" indent="0" algn="l">
                         <a:buNone/>
                       </a:pPr>
                       <a:r>
@@ -15827,7 +16144,7 @@
                       <a:endParaRPr lang="en-US" sz="1400" dirty="0"/>
                     </a:p>
                   </a:txBody>
-                  <a:tcPr marL="91440" marR="91440" marT="45720" marB="45720" anchor="ctr">
+                  <a:tcPr anchor="ctr">
                     <a:lnL w="6350" cap="flat" cmpd="sng" algn="ctr">
                       <a:solidFill>
                         <a:srgbClr val="DCE5E3"/>
@@ -15869,6 +16186,11 @@
                     </a:solidFill>
                   </a:tcPr>
                 </a:tc>
+                <a:extLst>
+                  <a:ext uri="{0D108BD9-81ED-4DB2-BD59-A6C34878D82A}">
+                    <a16:rowId xmlns:a16="http://schemas.microsoft.com/office/drawing/2014/main" val="10001"/>
+                  </a:ext>
+                </a:extLst>
               </a:tr>
               <a:tr h="283464">
                 <a:tc>
@@ -15876,7 +16198,7 @@
                     <a:bodyPr/>
                     <a:lstStyle/>
                     <a:p>
-                      <a:pPr algn="l" indent="0" marL="0">
+                      <a:pPr marL="0" indent="0" algn="l">
                         <a:buNone/>
                       </a:pPr>
                       <a:r>
@@ -15890,7 +16212,7 @@
                       <a:endParaRPr lang="en-US" sz="1400" dirty="0"/>
                     </a:p>
                   </a:txBody>
-                  <a:tcPr marL="91440" marR="91440" marT="45720" marB="45720" anchor="ctr">
+                  <a:tcPr anchor="ctr">
                     <a:lnL w="6350" cap="flat" cmpd="sng" algn="ctr">
                       <a:solidFill>
                         <a:srgbClr val="DCE5E3"/>
@@ -15937,7 +16259,7 @@
                     <a:bodyPr/>
                     <a:lstStyle/>
                     <a:p>
-                      <a:pPr algn="l" indent="0" marL="0">
+                      <a:pPr marL="0" indent="0" algn="l">
                         <a:buNone/>
                       </a:pPr>
                       <a:r>
@@ -15951,7 +16273,7 @@
                       <a:endParaRPr lang="en-US" sz="1400" dirty="0"/>
                     </a:p>
                   </a:txBody>
-                  <a:tcPr marL="91440" marR="91440" marT="45720" marB="45720" anchor="ctr">
+                  <a:tcPr anchor="ctr">
                     <a:lnL w="6350" cap="flat" cmpd="sng" algn="ctr">
                       <a:solidFill>
                         <a:srgbClr val="DCE5E3"/>
@@ -15998,7 +16320,7 @@
                     <a:bodyPr/>
                     <a:lstStyle/>
                     <a:p>
-                      <a:pPr algn="l" indent="0" marL="0">
+                      <a:pPr marL="0" indent="0" algn="l">
                         <a:buNone/>
                       </a:pPr>
                       <a:r>
@@ -16012,7 +16334,7 @@
                       <a:endParaRPr lang="en-US" sz="1400" dirty="0"/>
                     </a:p>
                   </a:txBody>
-                  <a:tcPr marL="91440" marR="91440" marT="45720" marB="45720" anchor="ctr">
+                  <a:tcPr anchor="ctr">
                     <a:lnL w="6350" cap="flat" cmpd="sng" algn="ctr">
                       <a:solidFill>
                         <a:srgbClr val="DCE5E3"/>
@@ -16054,6 +16376,11 @@
                     </a:solidFill>
                   </a:tcPr>
                 </a:tc>
+                <a:extLst>
+                  <a:ext uri="{0D108BD9-81ED-4DB2-BD59-A6C34878D82A}">
+                    <a16:rowId xmlns:a16="http://schemas.microsoft.com/office/drawing/2014/main" val="10002"/>
+                  </a:ext>
+                </a:extLst>
               </a:tr>
               <a:tr h="283464">
                 <a:tc>
@@ -16061,7 +16388,7 @@
                     <a:bodyPr/>
                     <a:lstStyle/>
                     <a:p>
-                      <a:pPr algn="l" indent="0" marL="0">
+                      <a:pPr marL="0" indent="0" algn="l">
                         <a:buNone/>
                       </a:pPr>
                       <a:r>
@@ -16075,7 +16402,7 @@
                       <a:endParaRPr lang="en-US" sz="1400" dirty="0"/>
                     </a:p>
                   </a:txBody>
-                  <a:tcPr marL="91440" marR="91440" marT="45720" marB="45720" anchor="ctr">
+                  <a:tcPr anchor="ctr">
                     <a:lnL w="6350" cap="flat" cmpd="sng" algn="ctr">
                       <a:solidFill>
                         <a:srgbClr val="DCE5E3"/>
@@ -16122,7 +16449,7 @@
                     <a:bodyPr/>
                     <a:lstStyle/>
                     <a:p>
-                      <a:pPr algn="l" indent="0" marL="0">
+                      <a:pPr marL="0" indent="0" algn="l">
                         <a:buNone/>
                       </a:pPr>
                       <a:r>
@@ -16136,7 +16463,7 @@
                       <a:endParaRPr lang="en-US" sz="1400" dirty="0"/>
                     </a:p>
                   </a:txBody>
-                  <a:tcPr marL="91440" marR="91440" marT="45720" marB="45720" anchor="ctr">
+                  <a:tcPr anchor="ctr">
                     <a:lnL w="6350" cap="flat" cmpd="sng" algn="ctr">
                       <a:solidFill>
                         <a:srgbClr val="DCE5E3"/>
@@ -16183,7 +16510,7 @@
                     <a:bodyPr/>
                     <a:lstStyle/>
                     <a:p>
-                      <a:pPr algn="l" indent="0" marL="0">
+                      <a:pPr marL="0" indent="0" algn="l">
                         <a:buNone/>
                       </a:pPr>
                       <a:r>
@@ -16197,7 +16524,7 @@
                       <a:endParaRPr lang="en-US" sz="1400" dirty="0"/>
                     </a:p>
                   </a:txBody>
-                  <a:tcPr marL="91440" marR="91440" marT="45720" marB="45720" anchor="ctr">
+                  <a:tcPr anchor="ctr">
                     <a:lnL w="6350" cap="flat" cmpd="sng" algn="ctr">
                       <a:solidFill>
                         <a:srgbClr val="DCE5E3"/>
@@ -16239,6 +16566,11 @@
                     </a:solidFill>
                   </a:tcPr>
                 </a:tc>
+                <a:extLst>
+                  <a:ext uri="{0D108BD9-81ED-4DB2-BD59-A6C34878D82A}">
+                    <a16:rowId xmlns:a16="http://schemas.microsoft.com/office/drawing/2014/main" val="10003"/>
+                  </a:ext>
+                </a:extLst>
               </a:tr>
               <a:tr h="283464">
                 <a:tc>
@@ -16246,7 +16578,7 @@
                     <a:bodyPr/>
                     <a:lstStyle/>
                     <a:p>
-                      <a:pPr algn="l" indent="0" marL="0">
+                      <a:pPr marL="0" indent="0" algn="l">
                         <a:buNone/>
                       </a:pPr>
                       <a:r>
@@ -16260,7 +16592,7 @@
                       <a:endParaRPr lang="en-US" sz="1400" dirty="0"/>
                     </a:p>
                   </a:txBody>
-                  <a:tcPr marL="91440" marR="91440" marT="45720" marB="45720" anchor="ctr">
+                  <a:tcPr anchor="ctr">
                     <a:lnL w="6350" cap="flat" cmpd="sng" algn="ctr">
                       <a:solidFill>
                         <a:srgbClr val="DCE5E3"/>
@@ -16307,7 +16639,7 @@
                     <a:bodyPr/>
                     <a:lstStyle/>
                     <a:p>
-                      <a:pPr algn="l" indent="0" marL="0">
+                      <a:pPr marL="0" indent="0" algn="l">
                         <a:buNone/>
                       </a:pPr>
                       <a:r>
@@ -16321,7 +16653,7 @@
                       <a:endParaRPr lang="en-US" sz="1400" dirty="0"/>
                     </a:p>
                   </a:txBody>
-                  <a:tcPr marL="91440" marR="91440" marT="45720" marB="45720" anchor="ctr">
+                  <a:tcPr anchor="ctr">
                     <a:lnL w="6350" cap="flat" cmpd="sng" algn="ctr">
                       <a:solidFill>
                         <a:srgbClr val="DCE5E3"/>
@@ -16368,7 +16700,7 @@
                     <a:bodyPr/>
                     <a:lstStyle/>
                     <a:p>
-                      <a:pPr algn="l" indent="0" marL="0">
+                      <a:pPr marL="0" indent="0" algn="l">
                         <a:buNone/>
                       </a:pPr>
                       <a:r>
@@ -16382,7 +16714,7 @@
                       <a:endParaRPr lang="en-US" sz="1400" dirty="0"/>
                     </a:p>
                   </a:txBody>
-                  <a:tcPr marL="91440" marR="91440" marT="45720" marB="45720" anchor="ctr">
+                  <a:tcPr anchor="ctr">
                     <a:lnL w="6350" cap="flat" cmpd="sng" algn="ctr">
                       <a:solidFill>
                         <a:srgbClr val="DCE5E3"/>
@@ -16424,6 +16756,11 @@
                     </a:solidFill>
                   </a:tcPr>
                 </a:tc>
+                <a:extLst>
+                  <a:ext uri="{0D108BD9-81ED-4DB2-BD59-A6C34878D82A}">
+                    <a16:rowId xmlns:a16="http://schemas.microsoft.com/office/drawing/2014/main" val="10004"/>
+                  </a:ext>
+                </a:extLst>
               </a:tr>
               <a:tr h="283464">
                 <a:tc>
@@ -16431,7 +16768,7 @@
                     <a:bodyPr/>
                     <a:lstStyle/>
                     <a:p>
-                      <a:pPr algn="l" indent="0" marL="0">
+                      <a:pPr marL="0" indent="0" algn="l">
                         <a:buNone/>
                       </a:pPr>
                       <a:r>
@@ -16445,7 +16782,7 @@
                       <a:endParaRPr lang="en-US" sz="1400" dirty="0"/>
                     </a:p>
                   </a:txBody>
-                  <a:tcPr marL="91440" marR="91440" marT="45720" marB="45720" anchor="ctr">
+                  <a:tcPr anchor="ctr">
                     <a:lnL w="6350" cap="flat" cmpd="sng" algn="ctr">
                       <a:solidFill>
                         <a:srgbClr val="DCE5E3"/>
@@ -16492,7 +16829,7 @@
                     <a:bodyPr/>
                     <a:lstStyle/>
                     <a:p>
-                      <a:pPr algn="l" indent="0" marL="0">
+                      <a:pPr marL="0" indent="0" algn="l">
                         <a:buNone/>
                       </a:pPr>
                       <a:r>
@@ -16506,7 +16843,7 @@
                       <a:endParaRPr lang="en-US" sz="1400" dirty="0"/>
                     </a:p>
                   </a:txBody>
-                  <a:tcPr marL="91440" marR="91440" marT="45720" marB="45720" anchor="ctr">
+                  <a:tcPr anchor="ctr">
                     <a:lnL w="6350" cap="flat" cmpd="sng" algn="ctr">
                       <a:solidFill>
                         <a:srgbClr val="DCE5E3"/>
@@ -16553,7 +16890,7 @@
                     <a:bodyPr/>
                     <a:lstStyle/>
                     <a:p>
-                      <a:pPr algn="l" indent="0" marL="0">
+                      <a:pPr marL="0" indent="0" algn="l">
                         <a:buNone/>
                       </a:pPr>
                       <a:r>
@@ -16567,7 +16904,7 @@
                       <a:endParaRPr lang="en-US" sz="1400" dirty="0"/>
                     </a:p>
                   </a:txBody>
-                  <a:tcPr marL="91440" marR="91440" marT="45720" marB="45720" anchor="ctr">
+                  <a:tcPr anchor="ctr">
                     <a:lnL w="6350" cap="flat" cmpd="sng" algn="ctr">
                       <a:solidFill>
                         <a:srgbClr val="DCE5E3"/>
@@ -16609,6 +16946,11 @@
                     </a:solidFill>
                   </a:tcPr>
                 </a:tc>
+                <a:extLst>
+                  <a:ext uri="{0D108BD9-81ED-4DB2-BD59-A6C34878D82A}">
+                    <a16:rowId xmlns:a16="http://schemas.microsoft.com/office/drawing/2014/main" val="10005"/>
+                  </a:ext>
+                </a:extLst>
               </a:tr>
             </a:tbl>
           </a:graphicData>
@@ -16642,9 +16984,11 @@
       <p:sp>
         <p:nvSpPr>
           <p:cNvPr id="2" name="Text 0"/>
-          <p:cNvSpPr/>
+          <p:cNvSpPr>
+            <a:spLocks noGrp="1"/>
+          </p:cNvSpPr>
           <p:nvPr>
-            <p:ph idx="100" type="title" hasCustomPrompt="1"/>
+            <p:ph type="title" idx="100" hasCustomPrompt="1"/>
           </p:nvPr>
         </p:nvSpPr>
         <p:spPr>
@@ -16662,7 +17006,7 @@
           <a:bodyPr wrap="square" lIns="0" tIns="0" rIns="0" bIns="0" rtlCol="0" anchor="ctr"/>
           <a:lstStyle/>
           <a:p>
-            <a:pPr algn="l" indent="0" marL="0">
+            <a:pPr marL="0" indent="0" algn="l">
               <a:buNone/>
             </a:pPr>
             <a:r>
@@ -16701,19 +17045,22 @@
         </p:spPr>
         <p:txBody>
           <a:bodyPr/>
-          <a:p/>
+          <a:lstStyle/>
+          <a:p>
+            <a:endParaRPr/>
+          </a:p>
         </p:txBody>
       </p:sp>
       <p:pic>
         <p:nvPicPr>
-          <p:cNvPr id="4" name="icon-warn" descr="preencoded.png">    </p:cNvPr>
+          <p:cNvPr id="4" name="icon-warn" descr="preencoded.png"/>
           <p:cNvPicPr>
             <a:picLocks noChangeAspect="1"/>
           </p:cNvPicPr>
           <p:nvPr/>
         </p:nvPicPr>
         <p:blipFill>
-          <a:blip r:embed="rId1"/>
+          <a:blip r:embed="rId3"/>
           <a:stretch>
             <a:fillRect/>
           </a:stretch>
@@ -16749,7 +17096,7 @@
           <a:bodyPr wrap="square" lIns="0" tIns="0" rIns="0" bIns="0" rtlCol="0" anchor="ctr"/>
           <a:lstStyle/>
           <a:p>
-            <a:pPr indent="0" marL="0">
+            <a:pPr marL="0" indent="0">
               <a:buNone/>
             </a:pPr>
             <a:r>
@@ -16879,19 +17226,22 @@
         </p:spPr>
         <p:txBody>
           <a:bodyPr/>
-          <a:p/>
+          <a:lstStyle/>
+          <a:p>
+            <a:endParaRPr/>
+          </a:p>
         </p:txBody>
       </p:sp>
       <p:pic>
         <p:nvPicPr>
-          <p:cNvPr id="8" name="icon-search" descr="preencoded.png">    </p:cNvPr>
+          <p:cNvPr id="8" name="icon-search" descr="preencoded.png"/>
           <p:cNvPicPr>
             <a:picLocks noChangeAspect="1"/>
           </p:cNvPicPr>
           <p:nvPr/>
         </p:nvPicPr>
         <p:blipFill>
-          <a:blip r:embed="rId5"/>
+          <a:blip r:embed="rId4"/>
           <a:stretch>
             <a:fillRect/>
           </a:stretch>
@@ -16927,7 +17277,7 @@
           <a:bodyPr wrap="square" lIns="0" tIns="0" rIns="0" bIns="0" rtlCol="0" anchor="ctr"/>
           <a:lstStyle/>
           <a:p>
-            <a:pPr indent="0" marL="0">
+            <a:pPr marL="0" indent="0">
               <a:buNone/>
             </a:pPr>
             <a:r>
@@ -16994,7 +17344,7 @@
                   <a:schemeClr val="tx1"/>
                 </a:solidFill>
               </a:rPr>
-              <a:t>Deal-level features: sector match, industry trend, competitor</a:t>
+              <a:t>Deal-level features: sector matches, industry trends, competitors</a:t>
             </a:r>
             <a:endParaRPr lang="en-US" sz="1500" dirty="0"/>
           </a:p>
@@ -17056,7 +17406,7 @@
           </a:prstGeom>
           <a:extLst>
             <a:ext uri="{C572A759-6A51-4108-AA02-DFA0A04FC94B}">
-              <ma14:wrappingTextBoxFlag xmlns:ma14="http://schemas.microsoft.com/office/mac/drawingml/2011/main" val="0"/>
+              <ma14:wrappingTextBoxFlag xmlns:ma14="http://schemas.microsoft.com/office/mac/drawingml/2011/main" xmlns="" val="0"/>
             </a:ext>
           </a:extLst>
         </p:spPr>
@@ -17074,7 +17424,7 @@
           <a:p>
             <a:pPr algn="r"/>
             <a:fld id="{F7021451-1387-4CA6-816F-3879F97B5CBC}" type="slidenum">
-              <a:rPr b="0" lang="en-US"/>
+              <a:rPr lang="en-US" b="0"/>
               <a:t>7</a:t>
             </a:fld>
             <a:endParaRPr lang="en-US"/>
@@ -17104,9 +17454,27 @@
             <a:tbl>
               <a:tblPr/>
               <a:tblGrid>
-                <a:gridCol w="4142232"/>
-                <a:gridCol w="3474720"/>
-                <a:gridCol w="3474720"/>
+                <a:gridCol w="4142232">
+                  <a:extLst>
+                    <a:ext uri="{9D8B030D-6E8A-4147-A177-3AD203B41FA5}">
+                      <a16:colId xmlns:a16="http://schemas.microsoft.com/office/drawing/2014/main" val="20000"/>
+                    </a:ext>
+                  </a:extLst>
+                </a:gridCol>
+                <a:gridCol w="3474720">
+                  <a:extLst>
+                    <a:ext uri="{9D8B030D-6E8A-4147-A177-3AD203B41FA5}">
+                      <a16:colId xmlns:a16="http://schemas.microsoft.com/office/drawing/2014/main" val="20001"/>
+                    </a:ext>
+                  </a:extLst>
+                </a:gridCol>
+                <a:gridCol w="3474720">
+                  <a:extLst>
+                    <a:ext uri="{9D8B030D-6E8A-4147-A177-3AD203B41FA5}">
+                      <a16:colId xmlns:a16="http://schemas.microsoft.com/office/drawing/2014/main" val="20002"/>
+                    </a:ext>
+                  </a:extLst>
+                </a:gridCol>
               </a:tblGrid>
               <a:tr h="347472">
                 <a:tc>
@@ -17114,21 +17482,13 @@
                     <a:bodyPr/>
                     <a:lstStyle/>
                     <a:p>
-                      <a:pPr algn="l" indent="0" marL="0">
+                      <a:pPr marL="0" indent="0" algn="l">
                         <a:buNone/>
                       </a:pPr>
-                      <a:r>
-                        <a:rPr lang="en-US" sz="1400" b="1" dirty="0">
-                          <a:solidFill>
-                            <a:schemeClr val="bg1"/>
-                          </a:solidFill>
-                        </a:rPr>
-                        <a:t/>
-                      </a:r>
                       <a:endParaRPr lang="en-US" sz="1400" dirty="0"/>
                     </a:p>
                   </a:txBody>
-                  <a:tcPr marL="91440" marR="91440" marT="45720" marB="45720" anchor="ctr">
+                  <a:tcPr anchor="ctr">
                     <a:lnL w="6350" cap="flat" cmpd="sng" algn="ctr">
                       <a:solidFill>
                         <a:srgbClr val="DCE5E3"/>
@@ -17175,7 +17535,7 @@
                     <a:bodyPr/>
                     <a:lstStyle/>
                     <a:p>
-                      <a:pPr algn="l" indent="0" marL="0">
+                      <a:pPr marL="0" indent="0" algn="l">
                         <a:buNone/>
                       </a:pPr>
                       <a:r>
@@ -17189,7 +17549,7 @@
                       <a:endParaRPr lang="en-US" sz="1400" dirty="0"/>
                     </a:p>
                   </a:txBody>
-                  <a:tcPr marL="91440" marR="91440" marT="45720" marB="45720" anchor="ctr">
+                  <a:tcPr anchor="ctr">
                     <a:lnL w="6350" cap="flat" cmpd="sng" algn="ctr">
                       <a:solidFill>
                         <a:srgbClr val="DCE5E3"/>
@@ -17236,7 +17596,7 @@
                     <a:bodyPr/>
                     <a:lstStyle/>
                     <a:p>
-                      <a:pPr algn="l" indent="0" marL="0">
+                      <a:pPr marL="0" indent="0" algn="l">
                         <a:buNone/>
                       </a:pPr>
                       <a:r>
@@ -17250,7 +17610,7 @@
                       <a:endParaRPr lang="en-US" sz="1400" dirty="0"/>
                     </a:p>
                   </a:txBody>
-                  <a:tcPr marL="91440" marR="91440" marT="45720" marB="45720" anchor="ctr">
+                  <a:tcPr anchor="ctr">
                     <a:lnL w="6350" cap="flat" cmpd="sng" algn="ctr">
                       <a:solidFill>
                         <a:srgbClr val="DCE5E3"/>
@@ -17292,6 +17652,11 @@
                     </a:solidFill>
                   </a:tcPr>
                 </a:tc>
+                <a:extLst>
+                  <a:ext uri="{0D108BD9-81ED-4DB2-BD59-A6C34878D82A}">
+                    <a16:rowId xmlns:a16="http://schemas.microsoft.com/office/drawing/2014/main" val="10000"/>
+                  </a:ext>
+                </a:extLst>
               </a:tr>
               <a:tr h="347472">
                 <a:tc>
@@ -17299,7 +17664,7 @@
                     <a:bodyPr/>
                     <a:lstStyle/>
                     <a:p>
-                      <a:pPr algn="l" indent="0" marL="0">
+                      <a:pPr marL="0" indent="0" algn="l">
                         <a:buNone/>
                       </a:pPr>
                       <a:r>
@@ -17313,7 +17678,7 @@
                       <a:endParaRPr lang="en-US" sz="1400" dirty="0"/>
                     </a:p>
                   </a:txBody>
-                  <a:tcPr marL="91440" marR="91440" marT="45720" marB="45720" anchor="ctr">
+                  <a:tcPr anchor="ctr">
                     <a:lnL w="6350" cap="flat" cmpd="sng" algn="ctr">
                       <a:solidFill>
                         <a:srgbClr val="DCE5E3"/>
@@ -17360,7 +17725,7 @@
                     <a:bodyPr/>
                     <a:lstStyle/>
                     <a:p>
-                      <a:pPr algn="l" indent="0" marL="0">
+                      <a:pPr marL="0" indent="0" algn="l">
                         <a:buNone/>
                       </a:pPr>
                       <a:r>
@@ -17374,7 +17739,7 @@
                       <a:endParaRPr lang="en-US" sz="1400" dirty="0"/>
                     </a:p>
                   </a:txBody>
-                  <a:tcPr marL="91440" marR="91440" marT="45720" marB="45720" anchor="ctr">
+                  <a:tcPr anchor="ctr">
                     <a:lnL w="6350" cap="flat" cmpd="sng" algn="ctr">
                       <a:solidFill>
                         <a:srgbClr val="DCE5E3"/>
@@ -17421,7 +17786,7 @@
                     <a:bodyPr/>
                     <a:lstStyle/>
                     <a:p>
-                      <a:pPr algn="l" indent="0" marL="0">
+                      <a:pPr marL="0" indent="0" algn="l">
                         <a:buNone/>
                       </a:pPr>
                       <a:r>
@@ -17435,7 +17800,7 @@
                       <a:endParaRPr lang="en-US" sz="1400" dirty="0"/>
                     </a:p>
                   </a:txBody>
-                  <a:tcPr marL="91440" marR="91440" marT="45720" marB="45720" anchor="ctr">
+                  <a:tcPr anchor="ctr">
                     <a:lnL w="6350" cap="flat" cmpd="sng" algn="ctr">
                       <a:solidFill>
                         <a:srgbClr val="DCE5E3"/>
@@ -17477,6 +17842,11 @@
                     </a:solidFill>
                   </a:tcPr>
                 </a:tc>
+                <a:extLst>
+                  <a:ext uri="{0D108BD9-81ED-4DB2-BD59-A6C34878D82A}">
+                    <a16:rowId xmlns:a16="http://schemas.microsoft.com/office/drawing/2014/main" val="10001"/>
+                  </a:ext>
+                </a:extLst>
               </a:tr>
               <a:tr h="347472">
                 <a:tc>
@@ -17484,7 +17854,7 @@
                     <a:bodyPr/>
                     <a:lstStyle/>
                     <a:p>
-                      <a:pPr algn="l" indent="0" marL="0">
+                      <a:pPr marL="0" indent="0" algn="l">
                         <a:buNone/>
                       </a:pPr>
                       <a:r>
@@ -17498,7 +17868,7 @@
                       <a:endParaRPr lang="en-US" sz="1400" dirty="0"/>
                     </a:p>
                   </a:txBody>
-                  <a:tcPr marL="91440" marR="91440" marT="45720" marB="45720" anchor="ctr">
+                  <a:tcPr anchor="ctr">
                     <a:lnL w="6350" cap="flat" cmpd="sng" algn="ctr">
                       <a:solidFill>
                         <a:srgbClr val="DCE5E3"/>
@@ -17545,7 +17915,7 @@
                     <a:bodyPr/>
                     <a:lstStyle/>
                     <a:p>
-                      <a:pPr algn="l" indent="0" marL="0">
+                      <a:pPr marL="0" indent="0" algn="l">
                         <a:buNone/>
                       </a:pPr>
                       <a:r>
@@ -17559,7 +17929,7 @@
                       <a:endParaRPr lang="en-US" sz="1400" dirty="0"/>
                     </a:p>
                   </a:txBody>
-                  <a:tcPr marL="91440" marR="91440" marT="45720" marB="45720" anchor="ctr">
+                  <a:tcPr anchor="ctr">
                     <a:lnL w="6350" cap="flat" cmpd="sng" algn="ctr">
                       <a:solidFill>
                         <a:srgbClr val="DCE5E3"/>
@@ -17606,7 +17976,7 @@
                     <a:bodyPr/>
                     <a:lstStyle/>
                     <a:p>
-                      <a:pPr algn="l" indent="0" marL="0">
+                      <a:pPr marL="0" indent="0" algn="l">
                         <a:buNone/>
                       </a:pPr>
                       <a:r>
@@ -17620,7 +17990,7 @@
                       <a:endParaRPr lang="en-US" sz="1400" dirty="0"/>
                     </a:p>
                   </a:txBody>
-                  <a:tcPr marL="91440" marR="91440" marT="45720" marB="45720" anchor="ctr">
+                  <a:tcPr anchor="ctr">
                     <a:lnL w="6350" cap="flat" cmpd="sng" algn="ctr">
                       <a:solidFill>
                         <a:srgbClr val="DCE5E3"/>
@@ -17662,6 +18032,11 @@
                     </a:solidFill>
                   </a:tcPr>
                 </a:tc>
+                <a:extLst>
+                  <a:ext uri="{0D108BD9-81ED-4DB2-BD59-A6C34878D82A}">
+                    <a16:rowId xmlns:a16="http://schemas.microsoft.com/office/drawing/2014/main" val="10002"/>
+                  </a:ext>
+                </a:extLst>
               </a:tr>
               <a:tr h="347472">
                 <a:tc>
@@ -17669,7 +18044,7 @@
                     <a:bodyPr/>
                     <a:lstStyle/>
                     <a:p>
-                      <a:pPr algn="l" indent="0" marL="0">
+                      <a:pPr marL="0" indent="0" algn="l">
                         <a:buNone/>
                       </a:pPr>
                       <a:r>
@@ -17683,7 +18058,7 @@
                       <a:endParaRPr lang="en-US" sz="1400" dirty="0"/>
                     </a:p>
                   </a:txBody>
-                  <a:tcPr marL="91440" marR="91440" marT="45720" marB="45720" anchor="ctr">
+                  <a:tcPr anchor="ctr">
                     <a:lnL w="6350" cap="flat" cmpd="sng" algn="ctr">
                       <a:solidFill>
                         <a:srgbClr val="DCE5E3"/>
@@ -17730,7 +18105,7 @@
                     <a:bodyPr/>
                     <a:lstStyle/>
                     <a:p>
-                      <a:pPr algn="l" indent="0" marL="0">
+                      <a:pPr marL="0" indent="0" algn="l">
                         <a:buNone/>
                       </a:pPr>
                       <a:r>
@@ -17744,7 +18119,7 @@
                       <a:endParaRPr lang="en-US" sz="1400" dirty="0"/>
                     </a:p>
                   </a:txBody>
-                  <a:tcPr marL="91440" marR="91440" marT="45720" marB="45720" anchor="ctr">
+                  <a:tcPr anchor="ctr">
                     <a:lnL w="6350" cap="flat" cmpd="sng" algn="ctr">
                       <a:solidFill>
                         <a:srgbClr val="DCE5E3"/>
@@ -17791,7 +18166,7 @@
                     <a:bodyPr/>
                     <a:lstStyle/>
                     <a:p>
-                      <a:pPr algn="l" indent="0" marL="0">
+                      <a:pPr marL="0" indent="0" algn="l">
                         <a:buNone/>
                       </a:pPr>
                       <a:r>
@@ -17805,7 +18180,7 @@
                       <a:endParaRPr lang="en-US" sz="1400" dirty="0"/>
                     </a:p>
                   </a:txBody>
-                  <a:tcPr marL="91440" marR="91440" marT="45720" marB="45720" anchor="ctr">
+                  <a:tcPr anchor="ctr">
                     <a:lnL w="6350" cap="flat" cmpd="sng" algn="ctr">
                       <a:solidFill>
                         <a:srgbClr val="DCE5E3"/>
@@ -17847,6 +18222,11 @@
                     </a:solidFill>
                   </a:tcPr>
                 </a:tc>
+                <a:extLst>
+                  <a:ext uri="{0D108BD9-81ED-4DB2-BD59-A6C34878D82A}">
+                    <a16:rowId xmlns:a16="http://schemas.microsoft.com/office/drawing/2014/main" val="10003"/>
+                  </a:ext>
+                </a:extLst>
               </a:tr>
               <a:tr h="347472">
                 <a:tc>
@@ -17854,7 +18234,7 @@
                     <a:bodyPr/>
                     <a:lstStyle/>
                     <a:p>
-                      <a:pPr algn="l" indent="0" marL="0">
+                      <a:pPr marL="0" indent="0" algn="l">
                         <a:buNone/>
                       </a:pPr>
                       <a:r>
@@ -17868,7 +18248,7 @@
                       <a:endParaRPr lang="en-US" sz="1400" dirty="0"/>
                     </a:p>
                   </a:txBody>
-                  <a:tcPr marL="91440" marR="91440" marT="45720" marB="45720" anchor="ctr">
+                  <a:tcPr anchor="ctr">
                     <a:lnL w="6350" cap="flat" cmpd="sng" algn="ctr">
                       <a:solidFill>
                         <a:srgbClr val="DCE5E3"/>
@@ -17915,7 +18295,7 @@
                     <a:bodyPr/>
                     <a:lstStyle/>
                     <a:p>
-                      <a:pPr algn="l" indent="0" marL="0">
+                      <a:pPr marL="0" indent="0" algn="l">
                         <a:buNone/>
                       </a:pPr>
                       <a:r>
@@ -17929,7 +18309,7 @@
                       <a:endParaRPr lang="en-US" sz="1400" dirty="0"/>
                     </a:p>
                   </a:txBody>
-                  <a:tcPr marL="91440" marR="91440" marT="45720" marB="45720" anchor="ctr">
+                  <a:tcPr anchor="ctr">
                     <a:lnL w="6350" cap="flat" cmpd="sng" algn="ctr">
                       <a:solidFill>
                         <a:srgbClr val="DCE5E3"/>
@@ -17976,7 +18356,7 @@
                     <a:bodyPr/>
                     <a:lstStyle/>
                     <a:p>
-                      <a:pPr algn="l" indent="0" marL="0">
+                      <a:pPr marL="0" indent="0" algn="l">
                         <a:buNone/>
                       </a:pPr>
                       <a:r>
@@ -17990,7 +18370,7 @@
                       <a:endParaRPr lang="en-US" sz="1400" dirty="0"/>
                     </a:p>
                   </a:txBody>
-                  <a:tcPr marL="91440" marR="91440" marT="45720" marB="45720" anchor="ctr">
+                  <a:tcPr anchor="ctr">
                     <a:lnL w="6350" cap="flat" cmpd="sng" algn="ctr">
                       <a:solidFill>
                         <a:srgbClr val="DCE5E3"/>
@@ -18032,6 +18412,11 @@
                     </a:solidFill>
                   </a:tcPr>
                 </a:tc>
+                <a:extLst>
+                  <a:ext uri="{0D108BD9-81ED-4DB2-BD59-A6C34878D82A}">
+                    <a16:rowId xmlns:a16="http://schemas.microsoft.com/office/drawing/2014/main" val="10004"/>
+                  </a:ext>
+                </a:extLst>
               </a:tr>
             </a:tbl>
           </a:graphicData>
@@ -18065,9 +18450,11 @@
       <p:sp>
         <p:nvSpPr>
           <p:cNvPr id="2" name="Text 0"/>
-          <p:cNvSpPr/>
+          <p:cNvSpPr>
+            <a:spLocks noGrp="1"/>
+          </p:cNvSpPr>
           <p:nvPr>
-            <p:ph idx="100" type="title" hasCustomPrompt="1"/>
+            <p:ph type="title" idx="100" hasCustomPrompt="1"/>
           </p:nvPr>
         </p:nvSpPr>
         <p:spPr>
@@ -18085,7 +18472,7 @@
           <a:bodyPr wrap="square" lIns="0" tIns="0" rIns="0" bIns="0" rtlCol="0" anchor="b"/>
           <a:lstStyle/>
           <a:p>
-            <a:pPr algn="l" indent="0" marL="0">
+            <a:pPr marL="0" indent="0" algn="l">
               <a:buNone/>
             </a:pPr>
             <a:r>
@@ -18106,9 +18493,11 @@
       <p:sp>
         <p:nvSpPr>
           <p:cNvPr id="3" name="Text 0"/>
-          <p:cNvSpPr/>
+          <p:cNvSpPr>
+            <a:spLocks noGrp="1"/>
+          </p:cNvSpPr>
           <p:nvPr>
-            <p:ph idx="101" type="body" hasCustomPrompt="1"/>
+            <p:ph type="body" idx="101" hasCustomPrompt="1"/>
           </p:nvPr>
         </p:nvSpPr>
         <p:spPr>
@@ -18126,7 +18515,7 @@
           <a:bodyPr wrap="square" lIns="0" tIns="0" rIns="0" bIns="0" rtlCol="0" anchor="t"/>
           <a:lstStyle/>
           <a:p>
-            <a:pPr indent="0" marL="0">
+            <a:pPr marL="0" indent="0">
               <a:buNone/>
             </a:pPr>
             <a:r>
@@ -18161,7 +18550,7 @@
           </a:prstGeom>
           <a:extLst>
             <a:ext uri="{C572A759-6A51-4108-AA02-DFA0A04FC94B}">
-              <ma14:wrappingTextBoxFlag xmlns:ma14="http://schemas.microsoft.com/office/mac/drawingml/2011/main" val="0"/>
+              <ma14:wrappingTextBoxFlag xmlns:ma14="http://schemas.microsoft.com/office/mac/drawingml/2011/main" xmlns="" val="0"/>
             </a:ext>
           </a:extLst>
         </p:spPr>
@@ -18179,7 +18568,7 @@
           <a:p>
             <a:pPr algn="r"/>
             <a:fld id="{F7021451-1387-4CA6-816F-3879F97B5CBC}" type="slidenum">
-              <a:rPr b="0" lang="en-US"/>
+              <a:rPr lang="en-US" b="0"/>
               <a:t>8</a:t>
             </a:fld>
             <a:endParaRPr lang="en-US"/>
@@ -18214,9 +18603,11 @@
       <p:sp>
         <p:nvSpPr>
           <p:cNvPr id="2" name="Text 0"/>
-          <p:cNvSpPr/>
+          <p:cNvSpPr>
+            <a:spLocks noGrp="1"/>
+          </p:cNvSpPr>
           <p:nvPr>
-            <p:ph idx="100" type="title" hasCustomPrompt="1"/>
+            <p:ph type="title" idx="100" hasCustomPrompt="1"/>
           </p:nvPr>
         </p:nvSpPr>
         <p:spPr>
@@ -18234,7 +18625,7 @@
           <a:bodyPr wrap="square" lIns="0" tIns="0" rIns="0" bIns="0" rtlCol="0" anchor="ctr"/>
           <a:lstStyle/>
           <a:p>
-            <a:pPr algn="l" indent="0" marL="0">
+            <a:pPr marL="0" indent="0" algn="l">
               <a:buNone/>
             </a:pPr>
             <a:r>
@@ -18275,7 +18666,10 @@
         </p:spPr>
         <p:txBody>
           <a:bodyPr/>
-          <a:p/>
+          <a:lstStyle/>
+          <a:p>
+            <a:endParaRPr/>
+          </a:p>
         </p:txBody>
       </p:sp>
       <p:sp>
@@ -18299,19 +18693,22 @@
         </p:spPr>
         <p:txBody>
           <a:bodyPr/>
-          <a:p/>
+          <a:lstStyle/>
+          <a:p>
+            <a:endParaRPr/>
+          </a:p>
         </p:txBody>
       </p:sp>
       <p:pic>
         <p:nvPicPr>
-          <p:cNvPr id="5" name="icon-table" descr="preencoded.png">    </p:cNvPr>
+          <p:cNvPr id="5" name="icon-table" descr="preencoded.png"/>
           <p:cNvPicPr>
             <a:picLocks noChangeAspect="1"/>
           </p:cNvPicPr>
           <p:nvPr/>
         </p:nvPicPr>
         <p:blipFill>
-          <a:blip r:embed="rId1"/>
+          <a:blip r:embed="rId3"/>
           <a:stretch>
             <a:fillRect/>
           </a:stretch>
@@ -18347,7 +18744,7 @@
           <a:bodyPr wrap="square" lIns="0" tIns="0" rIns="0" bIns="0" rtlCol="0" anchor="ctr"/>
           <a:lstStyle/>
           <a:p>
-            <a:pPr indent="0" marL="0">
+            <a:pPr marL="0" indent="0">
               <a:buNone/>
             </a:pPr>
             <a:r>
@@ -18461,7 +18858,10 @@
         </p:spPr>
         <p:txBody>
           <a:bodyPr/>
-          <a:p/>
+          <a:lstStyle/>
+          <a:p>
+            <a:endParaRPr/>
+          </a:p>
         </p:txBody>
       </p:sp>
       <p:sp>
@@ -18485,19 +18885,22 @@
         </p:spPr>
         <p:txBody>
           <a:bodyPr/>
-          <a:p/>
+          <a:lstStyle/>
+          <a:p>
+            <a:endParaRPr/>
+          </a:p>
         </p:txBody>
       </p:sp>
       <p:pic>
         <p:nvPicPr>
-          <p:cNvPr id="10" name="icon-dice" descr="preencoded.png">    </p:cNvPr>
+          <p:cNvPr id="10" name="icon-dice" descr="preencoded.png"/>
           <p:cNvPicPr>
             <a:picLocks noChangeAspect="1"/>
           </p:cNvPicPr>
           <p:nvPr/>
         </p:nvPicPr>
         <p:blipFill>
-          <a:blip r:embed="rId2"/>
+          <a:blip r:embed="rId4"/>
           <a:stretch>
             <a:fillRect/>
           </a:stretch>
@@ -18533,7 +18936,7 @@
           <a:bodyPr wrap="square" lIns="0" tIns="0" rIns="0" bIns="0" rtlCol="0" anchor="ctr"/>
           <a:lstStyle/>
           <a:p>
-            <a:pPr indent="0" marL="0">
+            <a:pPr marL="0" indent="0">
               <a:buNone/>
             </a:pPr>
             <a:r>
@@ -18647,7 +19050,10 @@
         </p:spPr>
         <p:txBody>
           <a:bodyPr/>
-          <a:p/>
+          <a:lstStyle/>
+          <a:p>
+            <a:endParaRPr/>
+          </a:p>
         </p:txBody>
       </p:sp>
       <p:sp>
@@ -18671,19 +19077,22 @@
         </p:spPr>
         <p:txBody>
           <a:bodyPr/>
-          <a:p/>
+          <a:lstStyle/>
+          <a:p>
+            <a:endParaRPr/>
+          </a:p>
         </p:txBody>
       </p:sp>
       <p:pic>
         <p:nvPicPr>
-          <p:cNvPr id="15" name="icon-flask" descr="preencoded.png">    </p:cNvPr>
+          <p:cNvPr id="15" name="icon-flask" descr="preencoded.png"/>
           <p:cNvPicPr>
             <a:picLocks noChangeAspect="1"/>
           </p:cNvPicPr>
           <p:nvPr/>
         </p:nvPicPr>
         <p:blipFill>
-          <a:blip r:embed="rId3"/>
+          <a:blip r:embed="rId5"/>
           <a:stretch>
             <a:fillRect/>
           </a:stretch>
@@ -18719,7 +19128,7 @@
           <a:bodyPr wrap="square" lIns="0" tIns="0" rIns="0" bIns="0" rtlCol="0" anchor="ctr"/>
           <a:lstStyle/>
           <a:p>
-            <a:pPr indent="0" marL="0">
+            <a:pPr marL="0" indent="0">
               <a:buNone/>
             </a:pPr>
             <a:r>
@@ -18833,7 +19242,10 @@
         </p:spPr>
         <p:txBody>
           <a:bodyPr/>
-          <a:p/>
+          <a:lstStyle/>
+          <a:p>
+            <a:endParaRPr/>
+          </a:p>
         </p:txBody>
       </p:sp>
       <p:sp>
@@ -18857,19 +19269,22 @@
         </p:spPr>
         <p:txBody>
           <a:bodyPr/>
-          <a:p/>
+          <a:lstStyle/>
+          <a:p>
+            <a:endParaRPr/>
+          </a:p>
         </p:txBody>
       </p:sp>
       <p:pic>
         <p:nvPicPr>
-          <p:cNvPr id="20" name="icon-bullseye" descr="preencoded.png">    </p:cNvPr>
+          <p:cNvPr id="20" name="icon-bullseye" descr="preencoded.png"/>
           <p:cNvPicPr>
             <a:picLocks noChangeAspect="1"/>
           </p:cNvPicPr>
           <p:nvPr/>
         </p:nvPicPr>
         <p:blipFill>
-          <a:blip r:embed="rId4"/>
+          <a:blip r:embed="rId6"/>
           <a:stretch>
             <a:fillRect/>
           </a:stretch>
@@ -18905,7 +19320,7 @@
           <a:bodyPr wrap="square" lIns="0" tIns="0" rIns="0" bIns="0" rtlCol="0" anchor="ctr"/>
           <a:lstStyle/>
           <a:p>
-            <a:pPr indent="0" marL="0">
+            <a:pPr marL="0" indent="0">
               <a:buNone/>
             </a:pPr>
             <a:r>
@@ -18916,9 +19331,6 @@
               </a:rPr>
               <a:t>We know every deal's true win probability. </a:t>
             </a:r>
-            <a:pPr indent="0" marL="0">
-              <a:buNone/>
-            </a:pPr>
             <a:r>
               <a:rPr lang="en-US" sz="1700" dirty="0">
                 <a:solidFill>
@@ -18951,7 +19363,7 @@
           </a:prstGeom>
           <a:extLst>
             <a:ext uri="{C572A759-6A51-4108-AA02-DFA0A04FC94B}">
-              <ma14:wrappingTextBoxFlag xmlns:ma14="http://schemas.microsoft.com/office/mac/drawingml/2011/main" val="0"/>
+              <ma14:wrappingTextBoxFlag xmlns:ma14="http://schemas.microsoft.com/office/mac/drawingml/2011/main" xmlns="" val="0"/>
             </a:ext>
           </a:extLst>
         </p:spPr>
@@ -18969,7 +19381,7 @@
           <a:p>
             <a:pPr algn="r"/>
             <a:fld id="{F7021451-1387-4CA6-816F-3879F97B5CBC}" type="slidenum">
-              <a:rPr b="0" lang="en-US"/>
+              <a:rPr lang="en-US" b="0"/>
               <a:t>9</a:t>
             </a:fld>
             <a:endParaRPr lang="en-US"/>
@@ -19277,4 +19689,319 @@
     </a:ext>
   </a:extLst>
 </a:theme>
+</file>
+
+<file path=ppt/theme/theme2.xml><?xml version="1.0" encoding="utf-8"?>
+<a:theme xmlns:a="http://schemas.openxmlformats.org/drawingml/2006/main" name="Office Theme">
+  <a:themeElements>
+    <a:clrScheme name="Office">
+      <a:dk1>
+        <a:sysClr val="windowText" lastClr="000000"/>
+      </a:dk1>
+      <a:lt1>
+        <a:sysClr val="window" lastClr="FFFFFF"/>
+      </a:lt1>
+      <a:dk2>
+        <a:srgbClr val="0E2841"/>
+      </a:dk2>
+      <a:lt2>
+        <a:srgbClr val="E8E8E8"/>
+      </a:lt2>
+      <a:accent1>
+        <a:srgbClr val="156082"/>
+      </a:accent1>
+      <a:accent2>
+        <a:srgbClr val="E97132"/>
+      </a:accent2>
+      <a:accent3>
+        <a:srgbClr val="196B24"/>
+      </a:accent3>
+      <a:accent4>
+        <a:srgbClr val="0F9ED5"/>
+      </a:accent4>
+      <a:accent5>
+        <a:srgbClr val="A02B93"/>
+      </a:accent5>
+      <a:accent6>
+        <a:srgbClr val="4EA72E"/>
+      </a:accent6>
+      <a:hlink>
+        <a:srgbClr val="467886"/>
+      </a:hlink>
+      <a:folHlink>
+        <a:srgbClr val="96607D"/>
+      </a:folHlink>
+    </a:clrScheme>
+    <a:fontScheme name="Office">
+      <a:majorFont>
+        <a:latin typeface="Aptos Display" panose="02110004020202020204"/>
+        <a:ea typeface=""/>
+        <a:cs typeface=""/>
+        <a:font script="Jpan" typeface="游ゴシック Light"/>
+        <a:font script="Hang" typeface="맑은 고딕"/>
+        <a:font script="Hans" typeface="等线 Light"/>
+        <a:font script="Hant" typeface="新細明體"/>
+        <a:font script="Arab" typeface="Times New Roman"/>
+        <a:font script="Hebr" typeface="Times New Roman"/>
+        <a:font script="Thai" typeface="Angsana New"/>
+        <a:font script="Ethi" typeface="Nyala"/>
+        <a:font script="Beng" typeface="Vrinda"/>
+        <a:font script="Gujr" typeface="Shruti"/>
+        <a:font script="Khmr" typeface="MoolBoran"/>
+        <a:font script="Knda" typeface="Tunga"/>
+        <a:font script="Guru" typeface="Raavi"/>
+        <a:font script="Cans" typeface="Euphemia"/>
+        <a:font script="Cher" typeface="Plantagenet Cherokee"/>
+        <a:font script="Yiii" typeface="Microsoft Yi Baiti"/>
+        <a:font script="Tibt" typeface="Microsoft Himalaya"/>
+        <a:font script="Thaa" typeface="MV Boli"/>
+        <a:font script="Deva" typeface="Mangal"/>
+        <a:font script="Telu" typeface="Gautami"/>
+        <a:font script="Taml" typeface="Latha"/>
+        <a:font script="Syrc" typeface="Estrangelo Edessa"/>
+        <a:font script="Orya" typeface="Kalinga"/>
+        <a:font script="Mlym" typeface="Kartika"/>
+        <a:font script="Laoo" typeface="DokChampa"/>
+        <a:font script="Sinh" typeface="Iskoola Pota"/>
+        <a:font script="Mong" typeface="Mongolian Baiti"/>
+        <a:font script="Viet" typeface="Times New Roman"/>
+        <a:font script="Uigh" typeface="Microsoft Uighur"/>
+        <a:font script="Geor" typeface="Sylfaen"/>
+        <a:font script="Armn" typeface="Arial"/>
+        <a:font script="Bugi" typeface="Leelawadee UI"/>
+        <a:font script="Bopo" typeface="Microsoft JhengHei"/>
+        <a:font script="Java" typeface="Javanese Text"/>
+        <a:font script="Lisu" typeface="Segoe UI"/>
+        <a:font script="Mymr" typeface="Myanmar Text"/>
+        <a:font script="Nkoo" typeface="Ebrima"/>
+        <a:font script="Olck" typeface="Nirmala UI"/>
+        <a:font script="Osma" typeface="Ebrima"/>
+        <a:font script="Phag" typeface="Phagspa"/>
+        <a:font script="Syrn" typeface="Estrangelo Edessa"/>
+        <a:font script="Syrj" typeface="Estrangelo Edessa"/>
+        <a:font script="Syre" typeface="Estrangelo Edessa"/>
+        <a:font script="Sora" typeface="Nirmala UI"/>
+        <a:font script="Tale" typeface="Microsoft Tai Le"/>
+        <a:font script="Talu" typeface="Microsoft New Tai Lue"/>
+        <a:font script="Tfng" typeface="Ebrima"/>
+      </a:majorFont>
+      <a:minorFont>
+        <a:latin typeface="Aptos" panose="02110004020202020204"/>
+        <a:ea typeface=""/>
+        <a:cs typeface=""/>
+        <a:font script="Jpan" typeface="游ゴシック"/>
+        <a:font script="Hang" typeface="맑은 고딕"/>
+        <a:font script="Hans" typeface="等线"/>
+        <a:font script="Hant" typeface="新細明體"/>
+        <a:font script="Arab" typeface="Arial"/>
+        <a:font script="Hebr" typeface="Arial"/>
+        <a:font script="Thai" typeface="Cordia New"/>
+        <a:font script="Ethi" typeface="Nyala"/>
+        <a:font script="Beng" typeface="Vrinda"/>
+        <a:font script="Gujr" typeface="Shruti"/>
+        <a:font script="Khmr" typeface="DaunPenh"/>
+        <a:font script="Knda" typeface="Tunga"/>
+        <a:font script="Guru" typeface="Raavi"/>
+        <a:font script="Cans" typeface="Euphemia"/>
+        <a:font script="Cher" typeface="Plantagenet Cherokee"/>
+        <a:font script="Yiii" typeface="Microsoft Yi Baiti"/>
+        <a:font script="Tibt" typeface="Microsoft Himalaya"/>
+        <a:font script="Thaa" typeface="MV Boli"/>
+        <a:font script="Deva" typeface="Mangal"/>
+        <a:font script="Telu" typeface="Gautami"/>
+        <a:font script="Taml" typeface="Latha"/>
+        <a:font script="Syrc" typeface="Estrangelo Edessa"/>
+        <a:font script="Orya" typeface="Kalinga"/>
+        <a:font script="Mlym" typeface="Kartika"/>
+        <a:font script="Laoo" typeface="DokChampa"/>
+        <a:font script="Sinh" typeface="Iskoola Pota"/>
+        <a:font script="Mong" typeface="Mongolian Baiti"/>
+        <a:font script="Viet" typeface="Arial"/>
+        <a:font script="Uigh" typeface="Microsoft Uighur"/>
+        <a:font script="Geor" typeface="Sylfaen"/>
+        <a:font script="Armn" typeface="Arial"/>
+        <a:font script="Bugi" typeface="Leelawadee UI"/>
+        <a:font script="Bopo" typeface="Microsoft JhengHei"/>
+        <a:font script="Java" typeface="Javanese Text"/>
+        <a:font script="Lisu" typeface="Segoe UI"/>
+        <a:font script="Mymr" typeface="Myanmar Text"/>
+        <a:font script="Nkoo" typeface="Ebrima"/>
+        <a:font script="Olck" typeface="Nirmala UI"/>
+        <a:font script="Osma" typeface="Ebrima"/>
+        <a:font script="Phag" typeface="Phagspa"/>
+        <a:font script="Syrn" typeface="Estrangelo Edessa"/>
+        <a:font script="Syrj" typeface="Estrangelo Edessa"/>
+        <a:font script="Syre" typeface="Estrangelo Edessa"/>
+        <a:font script="Sora" typeface="Nirmala UI"/>
+        <a:font script="Tale" typeface="Microsoft Tai Le"/>
+        <a:font script="Talu" typeface="Microsoft New Tai Lue"/>
+        <a:font script="Tfng" typeface="Ebrima"/>
+      </a:minorFont>
+    </a:fontScheme>
+    <a:fmtScheme name="Office">
+      <a:fillStyleLst>
+        <a:solidFill>
+          <a:schemeClr val="phClr"/>
+        </a:solidFill>
+        <a:gradFill rotWithShape="1">
+          <a:gsLst>
+            <a:gs pos="0">
+              <a:schemeClr val="phClr">
+                <a:lumMod val="110000"/>
+                <a:satMod val="105000"/>
+                <a:tint val="67000"/>
+              </a:schemeClr>
+            </a:gs>
+            <a:gs pos="50000">
+              <a:schemeClr val="phClr">
+                <a:lumMod val="105000"/>
+                <a:satMod val="103000"/>
+                <a:tint val="73000"/>
+              </a:schemeClr>
+            </a:gs>
+            <a:gs pos="100000">
+              <a:schemeClr val="phClr">
+                <a:lumMod val="105000"/>
+                <a:satMod val="109000"/>
+                <a:tint val="81000"/>
+              </a:schemeClr>
+            </a:gs>
+          </a:gsLst>
+          <a:lin ang="5400000" scaled="0"/>
+        </a:gradFill>
+        <a:gradFill rotWithShape="1">
+          <a:gsLst>
+            <a:gs pos="0">
+              <a:schemeClr val="phClr">
+                <a:satMod val="103000"/>
+                <a:lumMod val="102000"/>
+                <a:tint val="94000"/>
+              </a:schemeClr>
+            </a:gs>
+            <a:gs pos="50000">
+              <a:schemeClr val="phClr">
+                <a:satMod val="110000"/>
+                <a:lumMod val="100000"/>
+                <a:shade val="100000"/>
+              </a:schemeClr>
+            </a:gs>
+            <a:gs pos="100000">
+              <a:schemeClr val="phClr">
+                <a:lumMod val="99000"/>
+                <a:satMod val="120000"/>
+                <a:shade val="78000"/>
+              </a:schemeClr>
+            </a:gs>
+          </a:gsLst>
+          <a:lin ang="5400000" scaled="0"/>
+        </a:gradFill>
+      </a:fillStyleLst>
+      <a:lnStyleLst>
+        <a:ln w="12700" cap="flat" cmpd="sng" algn="ctr">
+          <a:solidFill>
+            <a:schemeClr val="phClr"/>
+          </a:solidFill>
+          <a:prstDash val="solid"/>
+          <a:miter lim="800000"/>
+        </a:ln>
+        <a:ln w="19050" cap="flat" cmpd="sng" algn="ctr">
+          <a:solidFill>
+            <a:schemeClr val="phClr"/>
+          </a:solidFill>
+          <a:prstDash val="solid"/>
+          <a:miter lim="800000"/>
+        </a:ln>
+        <a:ln w="25400" cap="flat" cmpd="sng" algn="ctr">
+          <a:solidFill>
+            <a:schemeClr val="phClr"/>
+          </a:solidFill>
+          <a:prstDash val="solid"/>
+          <a:miter lim="800000"/>
+        </a:ln>
+      </a:lnStyleLst>
+      <a:effectStyleLst>
+        <a:effectStyle>
+          <a:effectLst/>
+        </a:effectStyle>
+        <a:effectStyle>
+          <a:effectLst/>
+        </a:effectStyle>
+        <a:effectStyle>
+          <a:effectLst>
+            <a:outerShdw blurRad="57150" dist="19050" dir="5400000" algn="ctr" rotWithShape="0">
+              <a:srgbClr val="000000">
+                <a:alpha val="63000"/>
+              </a:srgbClr>
+            </a:outerShdw>
+          </a:effectLst>
+        </a:effectStyle>
+      </a:effectStyleLst>
+      <a:bgFillStyleLst>
+        <a:solidFill>
+          <a:schemeClr val="phClr"/>
+        </a:solidFill>
+        <a:solidFill>
+          <a:schemeClr val="phClr">
+            <a:tint val="95000"/>
+            <a:satMod val="170000"/>
+          </a:schemeClr>
+        </a:solidFill>
+        <a:gradFill rotWithShape="1">
+          <a:gsLst>
+            <a:gs pos="0">
+              <a:schemeClr val="phClr">
+                <a:tint val="93000"/>
+                <a:satMod val="150000"/>
+                <a:shade val="98000"/>
+                <a:lumMod val="102000"/>
+              </a:schemeClr>
+            </a:gs>
+            <a:gs pos="50000">
+              <a:schemeClr val="phClr">
+                <a:tint val="98000"/>
+                <a:satMod val="130000"/>
+                <a:shade val="90000"/>
+                <a:lumMod val="103000"/>
+              </a:schemeClr>
+            </a:gs>
+            <a:gs pos="100000">
+              <a:schemeClr val="phClr">
+                <a:shade val="63000"/>
+                <a:satMod val="120000"/>
+              </a:schemeClr>
+            </a:gs>
+          </a:gsLst>
+          <a:lin ang="5400000" scaled="0"/>
+        </a:gradFill>
+      </a:bgFillStyleLst>
+    </a:fmtScheme>
+  </a:themeElements>
+  <a:objectDefaults>
+    <a:lnDef>
+      <a:spPr/>
+      <a:bodyPr/>
+      <a:lstStyle/>
+      <a:style>
+        <a:lnRef idx="2">
+          <a:schemeClr val="accent1"/>
+        </a:lnRef>
+        <a:fillRef idx="0">
+          <a:schemeClr val="accent1"/>
+        </a:fillRef>
+        <a:effectRef idx="1">
+          <a:schemeClr val="accent1"/>
+        </a:effectRef>
+        <a:fontRef idx="minor">
+          <a:schemeClr val="tx1"/>
+        </a:fontRef>
+      </a:style>
+    </a:lnDef>
+  </a:objectDefaults>
+  <a:extraClrSchemeLst/>
+  <a:extLst>
+    <a:ext uri="{05A4C25C-085E-4340-85A3-A5531E510DB2}">
+      <thm15:themeFamily xmlns:thm15="http://schemas.microsoft.com/office/thememl/2012/main" name="Office Theme" id="{2E142A2C-CD16-42D6-873A-C26D2A0506FA}" vid="{1BDDFF52-6CD6-40A5-AB3C-68EB2F1E4D0A}"/>
+    </a:ext>
+  </a:extLst>
+</a:theme>
 </file>